--- a/Hakem Alkhraisha_CSBP711_Assignment1_Slides.pptx
+++ b/Hakem Alkhraisha_CSBP711_Assignment1_Slides.pptx
@@ -4,9 +4,6 @@
   <p:sldMasterIdLst>
     <p:sldMasterId id="2147483648" r:id="rId1"/>
   </p:sldMasterIdLst>
-  <p:notesMasterIdLst>
-    <p:notesMasterId r:id="rId7"/>
-  </p:notesMasterIdLst>
   <p:sldIdLst>
     <p:sldId id="256" r:id="rId2"/>
     <p:sldId id="257" r:id="rId3"/>
@@ -14,6 +11,9 @@
     <p:sldId id="259" r:id="rId5"/>
     <p:sldId id="260" r:id="rId6"/>
   </p:sldIdLst>
+  <p:notesMasterIdLst>
+    <p:notesMasterId r:id="rId7"/>
+  </p:notesMasterIdLst>
   <p:sldSz cx="12192000" cy="6858000"/>
   <p:notesSz cx="6858000" cy="12192000"/>
   <p:defaultTextStyle>
@@ -108,11 +108,6 @@
       </a:defRPr>
     </a:lvl9pPr>
   </p:defaultTextStyle>
-  <p:extLst>
-    <p:ext uri="{EFAFB233-063F-42B5-8137-9DF3F51BA10A}">
-      <p15:sldGuideLst xmlns:p15="http://schemas.microsoft.com/office/powerpoint/2012/main"/>
-    </p:ext>
-  </p:extLst>
 </p:presentation>
 </file>
 
@@ -138,10 +133,234 @@
           <a:chExt cx="0" cy="0"/>
         </a:xfrm>
       </p:grpSpPr>
+      <p:sp>
+        <p:nvSpPr>
+          <p:cNvPr id="2" name="Header Placeholder 1"/>
+          <p:cNvSpPr>
+            <a:spLocks noGrp="1"/>
+          </p:cNvSpPr>
+          <p:nvPr>
+            <p:ph type="hdr" sz="quarter"/>
+          </p:nvPr>
+        </p:nvSpPr>
+        <p:spPr>
+          <a:xfrm>
+            <a:off x="0" y="0"/>
+            <a:ext cx="2971800" cy="458788"/>
+          </a:xfrm>
+          <a:prstGeom prst="rect">
+            <a:avLst/>
+          </a:prstGeom>
+        </p:spPr>
+        <p:txBody>
+          <a:bodyPr vert="horz" lIns="91440" tIns="45720" rIns="91440" bIns="45720" rtlCol="0"/>
+          <a:lstStyle>
+            <a:lvl1pPr algn="l">
+              <a:defRPr sz="1200"/>
+            </a:lvl1pPr>
+          </a:lstStyle>
+          <a:p>
+            <a:endParaRPr lang="en-US"/>
+          </a:p>
+        </p:txBody>
+      </p:sp>
+      <p:sp>
+        <p:nvSpPr>
+          <p:cNvPr id="3" name="Date Placeholder 2"/>
+          <p:cNvSpPr>
+            <a:spLocks noGrp="1"/>
+          </p:cNvSpPr>
+          <p:nvPr>
+            <p:ph type="dt" idx="1"/>
+          </p:nvPr>
+        </p:nvSpPr>
+        <p:spPr>
+          <a:xfrm>
+            <a:off x="3884613" y="0"/>
+            <a:ext cx="2971800" cy="458788"/>
+          </a:xfrm>
+          <a:prstGeom prst="rect">
+            <a:avLst/>
+          </a:prstGeom>
+        </p:spPr>
+        <p:txBody>
+          <a:bodyPr vert="horz" lIns="91440" tIns="45720" rIns="91440" bIns="45720" rtlCol="0"/>
+          <a:lstStyle>
+            <a:lvl1pPr algn="r">
+              <a:defRPr sz="1200"/>
+            </a:lvl1pPr>
+          </a:lstStyle>
+          <a:p>
+            <a:fld id="{5282F153-3F37-0F45-9E97-73ACFA13230C}" type="datetimeFigureOut">
+              <a:rPr lang="en-US"/>
+              <a:t>7/23/19</a:t>
+            </a:fld>
+            <a:endParaRPr lang="en-US"/>
+          </a:p>
+        </p:txBody>
+      </p:sp>
+      <p:sp>
+        <p:nvSpPr>
+          <p:cNvPr id="4" name="Slide Image Placeholder 3"/>
+          <p:cNvSpPr>
+            <a:spLocks noGrp="1" noRot="1" noChangeAspect="1"/>
+          </p:cNvSpPr>
+          <p:nvPr>
+            <p:ph type="sldImg" idx="2"/>
+          </p:nvPr>
+        </p:nvSpPr>
+        <p:spPr>
+          <a:xfrm>
+            <a:off x="685800" y="1143000"/>
+            <a:ext cx="5486400" cy="3086100"/>
+          </a:xfrm>
+          <a:prstGeom prst="rect">
+            <a:avLst/>
+          </a:prstGeom>
+          <a:noFill/>
+          <a:ln w="12700">
+            <a:solidFill>
+              <a:prstClr val="black"/>
+            </a:solidFill>
+          </a:ln>
+        </p:spPr>
+        <p:txBody>
+          <a:bodyPr vert="horz" lIns="91440" tIns="45720" rIns="91440" bIns="45720" rtlCol="0" anchor="ctr"/>
+          <a:lstStyle/>
+          <a:p>
+            <a:endParaRPr lang="en-US"/>
+          </a:p>
+        </p:txBody>
+      </p:sp>
+      <p:sp>
+        <p:nvSpPr>
+          <p:cNvPr id="5" name="Notes Placeholder 4"/>
+          <p:cNvSpPr>
+            <a:spLocks noGrp="1"/>
+          </p:cNvSpPr>
+          <p:nvPr>
+            <p:ph type="body" sz="quarter" idx="3"/>
+          </p:nvPr>
+        </p:nvSpPr>
+        <p:spPr>
+          <a:xfrm>
+            <a:off x="685800" y="4400550"/>
+            <a:ext cx="5486400" cy="3600450"/>
+          </a:xfrm>
+          <a:prstGeom prst="rect">
+            <a:avLst/>
+          </a:prstGeom>
+        </p:spPr>
+        <p:txBody>
+          <a:bodyPr vert="horz" lIns="91440" tIns="45720" rIns="91440" bIns="45720" rtlCol="0"/>
+          <a:lstStyle/>
+          <a:p>
+            <a:pPr lvl="0"/>
+            <a:r>
+              <a:rPr lang="en-US"/>
+              <a:t>Click to edit Master text styles</a:t>
+            </a:r>
+          </a:p>
+          <a:p>
+            <a:pPr lvl="1"/>
+            <a:r>
+              <a:rPr lang="en-US"/>
+              <a:t>Second level</a:t>
+            </a:r>
+          </a:p>
+          <a:p>
+            <a:pPr lvl="2"/>
+            <a:r>
+              <a:rPr lang="en-US"/>
+              <a:t>Third level</a:t>
+            </a:r>
+          </a:p>
+          <a:p>
+            <a:pPr lvl="3"/>
+            <a:r>
+              <a:rPr lang="en-US"/>
+              <a:t>Fourth level</a:t>
+            </a:r>
+          </a:p>
+          <a:p>
+            <a:pPr lvl="4"/>
+            <a:r>
+              <a:rPr lang="en-US"/>
+              <a:t>Fifth level</a:t>
+            </a:r>
+          </a:p>
+        </p:txBody>
+      </p:sp>
+      <p:sp>
+        <p:nvSpPr>
+          <p:cNvPr id="6" name="Footer Placeholder 5"/>
+          <p:cNvSpPr>
+            <a:spLocks noGrp="1"/>
+          </p:cNvSpPr>
+          <p:nvPr>
+            <p:ph type="ftr" sz="quarter" idx="4"/>
+          </p:nvPr>
+        </p:nvSpPr>
+        <p:spPr>
+          <a:xfrm>
+            <a:off x="0" y="8685213"/>
+            <a:ext cx="2971800" cy="458787"/>
+          </a:xfrm>
+          <a:prstGeom prst="rect">
+            <a:avLst/>
+          </a:prstGeom>
+        </p:spPr>
+        <p:txBody>
+          <a:bodyPr vert="horz" lIns="91440" tIns="45720" rIns="91440" bIns="45720" rtlCol="0" anchor="b"/>
+          <a:lstStyle>
+            <a:lvl1pPr algn="l">
+              <a:defRPr sz="1200"/>
+            </a:lvl1pPr>
+          </a:lstStyle>
+          <a:p>
+            <a:endParaRPr lang="en-US"/>
+          </a:p>
+        </p:txBody>
+      </p:sp>
+      <p:sp>
+        <p:nvSpPr>
+          <p:cNvPr id="7" name="Slide Number Placeholder 6"/>
+          <p:cNvSpPr>
+            <a:spLocks noGrp="1"/>
+          </p:cNvSpPr>
+          <p:nvPr>
+            <p:ph type="sldNum" sz="quarter" idx="5"/>
+          </p:nvPr>
+        </p:nvSpPr>
+        <p:spPr>
+          <a:xfrm>
+            <a:off x="3884613" y="8685213"/>
+            <a:ext cx="2971800" cy="458787"/>
+          </a:xfrm>
+          <a:prstGeom prst="rect">
+            <a:avLst/>
+          </a:prstGeom>
+        </p:spPr>
+        <p:txBody>
+          <a:bodyPr vert="horz" lIns="91440" tIns="45720" rIns="91440" bIns="45720" rtlCol="0" anchor="b"/>
+          <a:lstStyle>
+            <a:lvl1pPr algn="r">
+              <a:defRPr sz="1200"/>
+            </a:lvl1pPr>
+          </a:lstStyle>
+          <a:p>
+            <a:fld id="{CE5E9CC1-C706-0F49-92D6-E571CC5EEA8F}" type="slidenum">
+              <a:rPr lang="en-US"/>
+              <a:t>‹#›</a:t>
+            </a:fld>
+            <a:endParaRPr lang="en-US"/>
+          </a:p>
+        </p:txBody>
+      </p:sp>
     </p:spTree>
     <p:extLst>
       <p:ext uri="{BB962C8B-B14F-4D97-AF65-F5344CB8AC3E}">
-        <p14:creationId xmlns:p14="http://schemas.microsoft.com/office/powerpoint/2010/main" val="3943688782"/>
+        <p14:creationId xmlns:p14="http://schemas.microsoft.com/office/powerpoint/2010/main" val="1024086991"/>
       </p:ext>
     </p:extLst>
   </p:cSld>
@@ -285,6 +504,10 @@
           <a:bodyPr/>
           <a:lstStyle/>
           <a:p>
+            <a:r>
+              <a:rPr lang="en-US" dirty="0"/>
+              <a:t/>
+            </a:r>
             <a:endParaRPr lang="en-US" dirty="0"/>
           </a:p>
         </p:txBody>
@@ -369,6 +592,10 @@
           <a:bodyPr/>
           <a:lstStyle/>
           <a:p>
+            <a:r>
+              <a:rPr lang="en-US" dirty="0"/>
+              <a:t/>
+            </a:r>
             <a:endParaRPr lang="en-US" dirty="0"/>
           </a:p>
         </p:txBody>
@@ -453,6 +680,10 @@
           <a:bodyPr/>
           <a:lstStyle/>
           <a:p>
+            <a:r>
+              <a:rPr lang="en-US" dirty="0"/>
+              <a:t/>
+            </a:r>
             <a:endParaRPr lang="en-US" dirty="0"/>
           </a:p>
         </p:txBody>
@@ -537,6 +768,10 @@
           <a:bodyPr/>
           <a:lstStyle/>
           <a:p>
+            <a:r>
+              <a:rPr lang="en-US" dirty="0"/>
+              <a:t/>
+            </a:r>
             <a:endParaRPr lang="en-US" dirty="0"/>
           </a:p>
         </p:txBody>
@@ -621,6 +856,10 @@
           <a:bodyPr/>
           <a:lstStyle/>
           <a:p>
+            <a:r>
+              <a:rPr lang="en-US" dirty="0"/>
+              <a:t/>
+            </a:r>
             <a:endParaRPr lang="en-US" dirty="0"/>
           </a:p>
         </p:txBody>
@@ -694,11 +933,6 @@
 <file path=ppt/slideMasters/slideMaster1.xml><?xml version="1.0" encoding="utf-8"?>
 <p:sldMaster xmlns:a="http://schemas.openxmlformats.org/drawingml/2006/main" xmlns:r="http://schemas.openxmlformats.org/officeDocument/2006/relationships" xmlns:p="http://schemas.openxmlformats.org/presentationml/2006/main">
   <p:cSld>
-    <p:bg>
-      <p:bgRef idx="1001">
-        <a:schemeClr val="bg1"/>
-      </p:bgRef>
-    </p:bg>
     <p:spTree>
       <p:nvGrpSpPr>
         <p:cNvPr id="1" name=""/>
@@ -981,7 +1215,6 @@
         <a:solidFill>
           <a:srgbClr val="FFFFFF"/>
         </a:solidFill>
-        <a:effectLst/>
       </p:bgPr>
     </p:bg>
     <p:spTree>
@@ -1019,7 +1252,7 @@
           <a:bodyPr wrap="square" lIns="0" tIns="0" rIns="0" bIns="0" rtlCol="0" anchor="ctr"/>
           <a:lstStyle/>
           <a:p>
-            <a:pPr marL="0" indent="0">
+            <a:pPr indent="0" marL="0">
               <a:buNone/>
             </a:pPr>
             <a:r>
@@ -1058,7 +1291,7 @@
           <a:bodyPr wrap="square" lIns="0" tIns="0" rIns="0" bIns="0" rtlCol="0" anchor="ctr"/>
           <a:lstStyle/>
           <a:p>
-            <a:pPr marL="0" indent="0">
+            <a:pPr indent="0" marL="0">
               <a:buNone/>
             </a:pPr>
             <a:r>
@@ -1102,13 +1335,6 @@
             <a:prstDash val="solid"/>
           </a:ln>
         </p:spPr>
-        <p:txBody>
-          <a:bodyPr/>
-          <a:lstStyle/>
-          <a:p>
-            <a:endParaRPr lang="en-US"/>
-          </a:p>
-        </p:txBody>
       </p:sp>
       <p:sp>
         <p:nvSpPr>
@@ -1131,7 +1357,7 @@
           <a:bodyPr wrap="square" lIns="0" tIns="0" rIns="0" bIns="0" rtlCol="0" anchor="ctr"/>
           <a:lstStyle/>
           <a:p>
-            <a:pPr marL="0" indent="0" algn="ctr">
+            <a:pPr algn="ctr" indent="0" marL="0">
               <a:buNone/>
             </a:pPr>
             <a:r>
@@ -1170,7 +1396,7 @@
           <a:bodyPr wrap="square" lIns="0" tIns="0" rIns="0" bIns="0" rtlCol="0" anchor="ctr"/>
           <a:lstStyle/>
           <a:p>
-            <a:pPr marL="0" indent="0" algn="ctr">
+            <a:pPr algn="ctr" indent="0" marL="0">
               <a:buNone/>
             </a:pPr>
             <a:r>
@@ -1214,13 +1440,6 @@
             <a:prstDash val="solid"/>
           </a:ln>
         </p:spPr>
-        <p:txBody>
-          <a:bodyPr/>
-          <a:lstStyle/>
-          <a:p>
-            <a:endParaRPr lang="en-US"/>
-          </a:p>
-        </p:txBody>
       </p:sp>
       <p:sp>
         <p:nvSpPr>
@@ -1243,7 +1462,7 @@
           <a:bodyPr wrap="square" lIns="0" tIns="0" rIns="0" bIns="0" rtlCol="0" anchor="ctr"/>
           <a:lstStyle/>
           <a:p>
-            <a:pPr marL="0" indent="0" algn="ctr">
+            <a:pPr algn="ctr" indent="0" marL="0">
               <a:buNone/>
             </a:pPr>
             <a:r>
@@ -1282,7 +1501,7 @@
           <a:bodyPr wrap="square" lIns="0" tIns="0" rIns="0" bIns="0" rtlCol="0" anchor="ctr"/>
           <a:lstStyle/>
           <a:p>
-            <a:pPr marL="0" indent="0" algn="ctr">
+            <a:pPr algn="ctr" indent="0" marL="0">
               <a:buNone/>
             </a:pPr>
             <a:r>
@@ -1326,13 +1545,6 @@
             <a:prstDash val="solid"/>
           </a:ln>
         </p:spPr>
-        <p:txBody>
-          <a:bodyPr/>
-          <a:lstStyle/>
-          <a:p>
-            <a:endParaRPr lang="en-US"/>
-          </a:p>
-        </p:txBody>
       </p:sp>
       <p:sp>
         <p:nvSpPr>
@@ -1355,7 +1567,7 @@
           <a:bodyPr wrap="square" lIns="0" tIns="0" rIns="0" bIns="0" rtlCol="0" anchor="ctr"/>
           <a:lstStyle/>
           <a:p>
-            <a:pPr marL="0" indent="0" algn="ctr">
+            <a:pPr algn="ctr" indent="0" marL="0">
               <a:buNone/>
             </a:pPr>
             <a:r>
@@ -1394,7 +1606,7 @@
           <a:bodyPr wrap="square" lIns="0" tIns="0" rIns="0" bIns="0" rtlCol="0" anchor="ctr"/>
           <a:lstStyle/>
           <a:p>
-            <a:pPr marL="0" indent="0" algn="ctr">
+            <a:pPr algn="ctr" indent="0" marL="0">
               <a:buNone/>
             </a:pPr>
             <a:r>
@@ -1438,13 +1650,6 @@
             <a:prstDash val="solid"/>
           </a:ln>
         </p:spPr>
-        <p:txBody>
-          <a:bodyPr/>
-          <a:lstStyle/>
-          <a:p>
-            <a:endParaRPr lang="en-US"/>
-          </a:p>
-        </p:txBody>
       </p:sp>
       <p:sp>
         <p:nvSpPr>
@@ -1467,7 +1672,7 @@
           <a:bodyPr wrap="square" lIns="0" tIns="0" rIns="0" bIns="0" rtlCol="0" anchor="ctr"/>
           <a:lstStyle/>
           <a:p>
-            <a:pPr marL="0" indent="0" algn="ctr">
+            <a:pPr algn="ctr" indent="0" marL="0">
               <a:buNone/>
             </a:pPr>
             <a:r>
@@ -1506,7 +1711,7 @@
           <a:bodyPr wrap="square" lIns="0" tIns="0" rIns="0" bIns="0" rtlCol="0" anchor="ctr"/>
           <a:lstStyle/>
           <a:p>
-            <a:pPr marL="0" indent="0" algn="ctr">
+            <a:pPr algn="ctr" indent="0" marL="0">
               <a:buNone/>
             </a:pPr>
             <a:r>
@@ -1545,7 +1750,7 @@
           <a:bodyPr wrap="square" lIns="0" tIns="0" rIns="0" bIns="0" rtlCol="0" anchor="ctr"/>
           <a:lstStyle/>
           <a:p>
-            <a:pPr marL="0" indent="0">
+            <a:pPr indent="0" marL="0">
               <a:buNone/>
             </a:pPr>
             <a:r>
@@ -1674,13 +1879,6 @@
             <a:prstDash val="solid"/>
           </a:ln>
         </p:spPr>
-        <p:txBody>
-          <a:bodyPr/>
-          <a:lstStyle/>
-          <a:p>
-            <a:endParaRPr lang="en-US"/>
-          </a:p>
-        </p:txBody>
       </p:sp>
       <p:sp>
         <p:nvSpPr>
@@ -1703,7 +1901,7 @@
           <a:bodyPr wrap="square" lIns="0" tIns="0" rIns="0" bIns="0" rtlCol="0" anchor="t"/>
           <a:lstStyle/>
           <a:p>
-            <a:pPr marL="0" indent="0">
+            <a:pPr indent="0" marL="0">
               <a:buNone/>
             </a:pPr>
             <a:r>
@@ -1720,7 +1918,7 @@
             <a:endParaRPr lang="en-US" sz="1400" dirty="0"/>
           </a:p>
           <a:p>
-            <a:pPr marL="0" indent="0">
+            <a:pPr indent="0" marL="0">
               <a:buNone/>
             </a:pPr>
             <a:r>
@@ -1737,7 +1935,7 @@
             <a:endParaRPr lang="en-US" sz="1400" dirty="0"/>
           </a:p>
           <a:p>
-            <a:pPr marL="0" indent="0">
+            <a:pPr indent="0" marL="0">
               <a:buNone/>
             </a:pPr>
             <a:r>
@@ -1754,7 +1952,7 @@
             <a:endParaRPr lang="en-US" sz="1400" dirty="0"/>
           </a:p>
           <a:p>
-            <a:pPr marL="0" indent="0">
+            <a:pPr indent="0" marL="0">
               <a:buNone/>
             </a:pPr>
             <a:r>
@@ -1771,7 +1969,7 @@
             <a:endParaRPr lang="en-US" sz="1400" dirty="0"/>
           </a:p>
           <a:p>
-            <a:pPr marL="0" indent="0">
+            <a:pPr indent="0" marL="0">
               <a:buNone/>
             </a:pPr>
             <a:r>
@@ -1810,7 +2008,7 @@
           <a:bodyPr wrap="square" lIns="0" tIns="0" rIns="0" bIns="0" rtlCol="0" anchor="ctr"/>
           <a:lstStyle/>
           <a:p>
-            <a:pPr marL="0" indent="0">
+            <a:pPr indent="0" marL="0">
               <a:buNone/>
             </a:pPr>
             <a:r>
@@ -1844,7 +2042,6 @@
         <a:solidFill>
           <a:srgbClr val="FFFFFF"/>
         </a:solidFill>
-        <a:effectLst/>
       </p:bgPr>
     </p:bg>
     <p:spTree>
@@ -1882,7 +2079,7 @@
           <a:bodyPr wrap="square" lIns="0" tIns="0" rIns="0" bIns="0" rtlCol="0" anchor="ctr"/>
           <a:lstStyle/>
           <a:p>
-            <a:pPr marL="0" indent="0">
+            <a:pPr indent="0" marL="0">
               <a:buNone/>
             </a:pPr>
             <a:r>
@@ -1921,7 +2118,7 @@
           <a:bodyPr wrap="square" lIns="0" tIns="0" rIns="0" bIns="0" rtlCol="0" anchor="ctr"/>
           <a:lstStyle/>
           <a:p>
-            <a:pPr marL="0" indent="0">
+            <a:pPr indent="0" marL="0">
               <a:buNone/>
             </a:pPr>
             <a:r>
@@ -1933,7 +2130,7 @@
                 <a:ea typeface="Calibri" pitchFamily="34" charset="-122"/>
                 <a:cs typeface="Calibri" pitchFamily="34" charset="-120"/>
               </a:rPr>
-              <a:t>Everything below is produced by run_jiang.py and written to results/data_audit.txt</a:t>
+              <a:t>Every number below is written by run_jiang.py (results/data_audit.txt) or audit_overlap.py (results/overlap_audit.txt)</a:t>
             </a:r>
             <a:endParaRPr lang="en-US" sz="1400" dirty="0"/>
           </a:p>
@@ -1965,13 +2162,6 @@
             <a:prstDash val="solid"/>
           </a:ln>
         </p:spPr>
-        <p:txBody>
-          <a:bodyPr/>
-          <a:lstStyle/>
-          <a:p>
-            <a:endParaRPr lang="en-US"/>
-          </a:p>
-        </p:txBody>
       </p:sp>
       <p:sp>
         <p:nvSpPr>
@@ -1994,7 +2184,7 @@
           <a:bodyPr wrap="square" lIns="0" tIns="0" rIns="0" bIns="0" rtlCol="0" anchor="ctr"/>
           <a:lstStyle/>
           <a:p>
-            <a:pPr marL="0" indent="0">
+            <a:pPr indent="0" marL="0">
               <a:buNone/>
             </a:pPr>
             <a:r>
@@ -2033,7 +2223,7 @@
           <a:bodyPr wrap="square" lIns="0" tIns="0" rIns="0" bIns="0" rtlCol="0" anchor="t"/>
           <a:lstStyle/>
           <a:p>
-            <a:pPr marL="0" indent="0">
+            <a:pPr indent="0" marL="0">
               <a:buNone/>
             </a:pPr>
             <a:r>
@@ -2050,7 +2240,7 @@
             <a:endParaRPr lang="en-US" sz="1050" dirty="0"/>
           </a:p>
           <a:p>
-            <a:pPr marL="0" indent="0">
+            <a:pPr indent="0" marL="0">
               <a:buNone/>
             </a:pPr>
             <a:r>
@@ -2094,13 +2284,6 @@
             <a:prstDash val="solid"/>
           </a:ln>
         </p:spPr>
-        <p:txBody>
-          <a:bodyPr/>
-          <a:lstStyle/>
-          <a:p>
-            <a:endParaRPr lang="en-US"/>
-          </a:p>
-        </p:txBody>
       </p:sp>
       <p:sp>
         <p:nvSpPr>
@@ -2123,7 +2306,7 @@
           <a:bodyPr wrap="square" lIns="0" tIns="0" rIns="0" bIns="0" rtlCol="0" anchor="ctr"/>
           <a:lstStyle/>
           <a:p>
-            <a:pPr marL="0" indent="0">
+            <a:pPr indent="0" marL="0">
               <a:buNone/>
             </a:pPr>
             <a:r>
@@ -2162,7 +2345,7 @@
           <a:bodyPr wrap="square" lIns="0" tIns="0" rIns="0" bIns="0" rtlCol="0" anchor="t"/>
           <a:lstStyle/>
           <a:p>
-            <a:pPr marL="0" indent="0">
+            <a:pPr indent="0" marL="0">
               <a:buNone/>
             </a:pPr>
             <a:r>
@@ -2179,7 +2362,7 @@
             <a:endParaRPr lang="en-US" sz="1050" dirty="0"/>
           </a:p>
           <a:p>
-            <a:pPr marL="0" indent="0">
+            <a:pPr indent="0" marL="0">
               <a:buNone/>
             </a:pPr>
             <a:r>
@@ -2223,13 +2406,6 @@
             <a:prstDash val="solid"/>
           </a:ln>
         </p:spPr>
-        <p:txBody>
-          <a:bodyPr/>
-          <a:lstStyle/>
-          <a:p>
-            <a:endParaRPr lang="en-US"/>
-          </a:p>
-        </p:txBody>
       </p:sp>
       <p:sp>
         <p:nvSpPr>
@@ -2252,7 +2428,7 @@
           <a:bodyPr wrap="square" lIns="0" tIns="0" rIns="0" bIns="0" rtlCol="0" anchor="ctr"/>
           <a:lstStyle/>
           <a:p>
-            <a:pPr marL="0" indent="0">
+            <a:pPr indent="0" marL="0">
               <a:buNone/>
             </a:pPr>
             <a:r>
@@ -2291,7 +2467,7 @@
           <a:bodyPr wrap="square" lIns="0" tIns="0" rIns="0" bIns="0" rtlCol="0" anchor="t"/>
           <a:lstStyle/>
           <a:p>
-            <a:pPr marL="0" indent="0">
+            <a:pPr indent="0" marL="0">
               <a:buNone/>
             </a:pPr>
             <a:r>
@@ -2308,7 +2484,7 @@
             <a:endParaRPr lang="en-US" sz="1050" dirty="0"/>
           </a:p>
           <a:p>
-            <a:pPr marL="0" indent="0">
+            <a:pPr indent="0" marL="0">
               <a:buNone/>
             </a:pPr>
             <a:r>
@@ -2352,13 +2528,6 @@
             <a:prstDash val="solid"/>
           </a:ln>
         </p:spPr>
-        <p:txBody>
-          <a:bodyPr/>
-          <a:lstStyle/>
-          <a:p>
-            <a:endParaRPr lang="en-US"/>
-          </a:p>
-        </p:txBody>
       </p:sp>
       <p:sp>
         <p:nvSpPr>
@@ -2381,7 +2550,7 @@
           <a:bodyPr wrap="square" lIns="0" tIns="0" rIns="0" bIns="0" rtlCol="0" anchor="ctr"/>
           <a:lstStyle/>
           <a:p>
-            <a:pPr marL="0" indent="0">
+            <a:pPr indent="0" marL="0">
               <a:buNone/>
             </a:pPr>
             <a:r>
@@ -2420,7 +2589,7 @@
           <a:bodyPr wrap="square" lIns="0" tIns="0" rIns="0" bIns="0" rtlCol="0" anchor="t"/>
           <a:lstStyle/>
           <a:p>
-            <a:pPr marL="0" indent="0">
+            <a:pPr indent="0" marL="0">
               <a:buNone/>
             </a:pPr>
             <a:r>
@@ -2437,7 +2606,7 @@
             <a:endParaRPr lang="en-US" sz="1050" dirty="0"/>
           </a:p>
           <a:p>
-            <a:pPr marL="0" indent="0">
+            <a:pPr indent="0" marL="0">
               <a:buNone/>
             </a:pPr>
             <a:r>
@@ -2476,7 +2645,7 @@
           <a:bodyPr wrap="square" lIns="0" tIns="0" rIns="0" bIns="0" rtlCol="0" anchor="ctr"/>
           <a:lstStyle/>
           <a:p>
-            <a:pPr marL="0" indent="0">
+            <a:pPr indent="0" marL="0">
               <a:buNone/>
             </a:pPr>
             <a:r>
@@ -2531,7 +2700,7 @@
                 <a:ea typeface="Calibri" pitchFamily="34" charset="-122"/>
                 <a:cs typeface="Calibri" pitchFamily="34" charset="-120"/>
               </a:rPr>
-              <a:t>Block-sparse columns (no merged cells): the reference and the specimen size are written on the first row of each study block only (1,053 blank reference cells) → forward-filled, otherwise every study looks like a single row. Two stray unnamed columns ignored.</a:t>
+              <a:t>Block-sparse columns (no merged cells): the reference and specimen size are written on the first row of each study block only (1,053 blank reference cells) → forward-filled. Two stray unnamed columns ignored.</a:t>
             </a:r>
             <a:endParaRPr lang="en-US" sz="1200" dirty="0"/>
           </a:p>
@@ -2615,7 +2784,7 @@
                 <a:ea typeface="Calibri" pitchFamily="34" charset="-122"/>
                 <a:cs typeface="Calibri" pitchFamily="34" charset="-120"/>
               </a:rPr>
-              <a:t>Derived columns dropped: the authors' ratios (Na/Al, Si/Al, normalised curing) are functions of kept columns. Limitation: molarity could have been derived from NaOH solids for 239 of the 247 missing rows instead of imputed.</a:t>
+              <a:t>Derived columns dropped: the authors' ratios (Na/Al, Si/Al, normalised curing) repeat kept columns, except that for 239 of the 247 rows with missing molarity the NaOH-solids columns could have supplied it; I imputed instead (limitation).</a:t>
             </a:r>
             <a:endParaRPr lang="en-US" sz="1200" dirty="0"/>
           </a:p>
@@ -2636,7 +2805,7 @@
                 <a:ea typeface="Calibri" pitchFamily="34" charset="-122"/>
                 <a:cs typeface="Calibri" pitchFamily="34" charset="-120"/>
               </a:rPr>
-              <a:t>Leakage: one block supplies 113 rows (10 %); rows from one laboratory share materials and procedures, so a random split leaks the laboratory into the test set. The by-study split holds out blocks, not laboratories: 19 % of held-out rows still share their fly-ash fingerprint with a training row, so it removes most, not all, of the leakage.</a:t>
+              <a:t>Leakage: one block supplies 113 rows (10 %); rows from one laboratory share materials and procedures, so a random split leaks the laboratory into the test set. The by-study split holds out blocks, not laboratories: 15 % of held-out rows (39 % in the worst fold) still share their fly-ash fingerprint with a training row, so it removes most, not all, of the leakage.</a:t>
             </a:r>
             <a:endParaRPr lang="en-US" sz="1200" dirty="0"/>
           </a:p>
@@ -2644,14 +2813,14 @@
       </p:sp>
       <p:pic>
         <p:nvPicPr>
-          <p:cNvPr id="18" name="Image 0" descr="/home/claude/jiang/figures/F1_data.png"/>
+          <p:cNvPr id="18" name="Image 0" descr="/home/claude/jiang/figures/F1_data.png">    </p:cNvPr>
           <p:cNvPicPr>
             <a:picLocks noChangeAspect="1"/>
           </p:cNvPicPr>
           <p:nvPr/>
         </p:nvPicPr>
         <p:blipFill>
-          <a:blip r:embed="rId3"/>
+          <a:blip r:embed="rId1"/>
           <a:stretch>
             <a:fillRect/>
           </a:stretch>
@@ -2687,7 +2856,7 @@
           <a:bodyPr wrap="square" lIns="0" tIns="0" rIns="0" bIns="0" rtlCol="0" anchor="ctr"/>
           <a:lstStyle/>
           <a:p>
-            <a:pPr marL="0" indent="0">
+            <a:pPr indent="0" marL="0">
               <a:buNone/>
             </a:pPr>
             <a:r>
@@ -2731,13 +2900,6 @@
             <a:prstDash val="solid"/>
           </a:ln>
         </p:spPr>
-        <p:txBody>
-          <a:bodyPr/>
-          <a:lstStyle/>
-          <a:p>
-            <a:endParaRPr lang="en-US"/>
-          </a:p>
-        </p:txBody>
       </p:sp>
       <p:sp>
         <p:nvSpPr>
@@ -2760,7 +2922,7 @@
           <a:bodyPr wrap="square" lIns="0" tIns="0" rIns="0" bIns="0" rtlCol="0" anchor="t"/>
           <a:lstStyle/>
           <a:p>
-            <a:pPr marL="0" indent="0">
+            <a:pPr indent="0" marL="0">
               <a:buNone/>
             </a:pPr>
             <a:r>
@@ -2777,7 +2939,7 @@
             <a:endParaRPr lang="en-US" sz="1250" dirty="0"/>
           </a:p>
           <a:p>
-            <a:pPr marL="0" indent="0">
+            <a:pPr indent="0" marL="0">
               <a:buNone/>
             </a:pPr>
             <a:r>
@@ -2816,7 +2978,7 @@
           <a:bodyPr wrap="square" lIns="0" tIns="0" rIns="0" bIns="0" rtlCol="0" anchor="ctr"/>
           <a:lstStyle/>
           <a:p>
-            <a:pPr marL="0" indent="0">
+            <a:pPr indent="0" marL="0">
               <a:buNone/>
             </a:pPr>
             <a:r>
@@ -2850,7 +3012,6 @@
         <a:solidFill>
           <a:srgbClr val="FFFFFF"/>
         </a:solidFill>
-        <a:effectLst/>
       </p:bgPr>
     </p:bg>
     <p:spTree>
@@ -2888,7 +3049,7 @@
           <a:bodyPr wrap="square" lIns="0" tIns="0" rIns="0" bIns="0" rtlCol="0" anchor="ctr"/>
           <a:lstStyle/>
           <a:p>
-            <a:pPr marL="0" indent="0">
+            <a:pPr indent="0" marL="0">
               <a:buNone/>
             </a:pPr>
             <a:r>
@@ -2927,7 +3088,7 @@
           <a:bodyPr wrap="square" lIns="0" tIns="0" rIns="0" bIns="0" rtlCol="0" anchor="ctr"/>
           <a:lstStyle/>
           <a:p>
-            <a:pPr marL="0" indent="0">
+            <a:pPr indent="0" marL="0">
               <a:buNone/>
             </a:pPr>
             <a:r>
@@ -2939,7 +3100,7 @@
                 <a:ea typeface="Calibri" pitchFamily="34" charset="-122"/>
                 <a:cs typeface="Calibri" pitchFamily="34" charset="-120"/>
               </a:rPr>
-              <a:t>Hyperparameters fixed before any result was seen; nothing tuned on the by-study split</a:t>
+              <a:t>Hyperparameters set in advance and never tuned on either split (no timestamped record exists; stated, not proven)</a:t>
             </a:r>
             <a:endParaRPr lang="en-US" sz="1400" dirty="0"/>
           </a:p>
@@ -2971,13 +3132,6 @@
             <a:prstDash val="solid"/>
           </a:ln>
         </p:spPr>
-        <p:txBody>
-          <a:bodyPr/>
-          <a:lstStyle/>
-          <a:p>
-            <a:endParaRPr lang="en-US"/>
-          </a:p>
-        </p:txBody>
       </p:sp>
       <p:sp>
         <p:nvSpPr>
@@ -3000,7 +3154,7 @@
           <a:bodyPr wrap="square" lIns="0" tIns="0" rIns="0" bIns="0" rtlCol="0" anchor="ctr"/>
           <a:lstStyle/>
           <a:p>
-            <a:pPr marL="0" indent="0">
+            <a:pPr indent="0" marL="0">
               <a:buNone/>
             </a:pPr>
             <a:r>
@@ -3039,7 +3193,7 @@
           <a:bodyPr wrap="square" lIns="0" tIns="0" rIns="0" bIns="0" rtlCol="0" anchor="ctr"/>
           <a:lstStyle/>
           <a:p>
-            <a:pPr marL="0" indent="0">
+            <a:pPr indent="0" marL="0">
               <a:buNone/>
             </a:pPr>
             <a:r>
@@ -3078,7 +3232,7 @@
           <a:bodyPr wrap="square" lIns="0" tIns="0" rIns="0" bIns="0" rtlCol="0" anchor="t"/>
           <a:lstStyle/>
           <a:p>
-            <a:pPr marL="0" indent="0">
+            <a:pPr indent="0" marL="0">
               <a:buNone/>
             </a:pPr>
             <a:r>
@@ -3095,7 +3249,7 @@
             <a:endParaRPr lang="en-US" sz="1200" dirty="0"/>
           </a:p>
           <a:p>
-            <a:pPr marL="0" indent="0">
+            <a:pPr indent="0" marL="0">
               <a:buNone/>
             </a:pPr>
             <a:r>
@@ -3139,13 +3293,6 @@
             <a:prstDash val="solid"/>
           </a:ln>
         </p:spPr>
-        <p:txBody>
-          <a:bodyPr/>
-          <a:lstStyle/>
-          <a:p>
-            <a:endParaRPr lang="en-US"/>
-          </a:p>
-        </p:txBody>
       </p:sp>
       <p:sp>
         <p:nvSpPr>
@@ -3168,7 +3315,7 @@
           <a:bodyPr wrap="square" lIns="0" tIns="0" rIns="0" bIns="0" rtlCol="0" anchor="ctr"/>
           <a:lstStyle/>
           <a:p>
-            <a:pPr marL="0" indent="0">
+            <a:pPr indent="0" marL="0">
               <a:buNone/>
             </a:pPr>
             <a:r>
@@ -3207,7 +3354,7 @@
           <a:bodyPr wrap="square" lIns="0" tIns="0" rIns="0" bIns="0" rtlCol="0" anchor="ctr"/>
           <a:lstStyle/>
           <a:p>
-            <a:pPr marL="0" indent="0">
+            <a:pPr indent="0" marL="0">
               <a:buNone/>
             </a:pPr>
             <a:r>
@@ -3246,7 +3393,7 @@
           <a:bodyPr wrap="square" lIns="0" tIns="0" rIns="0" bIns="0" rtlCol="0" anchor="t"/>
           <a:lstStyle/>
           <a:p>
-            <a:pPr marL="0" indent="0">
+            <a:pPr indent="0" marL="0">
               <a:buNone/>
             </a:pPr>
             <a:r>
@@ -3263,7 +3410,7 @@
             <a:endParaRPr lang="en-US" sz="1200" dirty="0"/>
           </a:p>
           <a:p>
-            <a:pPr marL="0" indent="0">
+            <a:pPr indent="0" marL="0">
               <a:buNone/>
             </a:pPr>
             <a:r>
@@ -3307,13 +3454,6 @@
             <a:prstDash val="solid"/>
           </a:ln>
         </p:spPr>
-        <p:txBody>
-          <a:bodyPr/>
-          <a:lstStyle/>
-          <a:p>
-            <a:endParaRPr lang="en-US"/>
-          </a:p>
-        </p:txBody>
       </p:sp>
       <p:sp>
         <p:nvSpPr>
@@ -3336,7 +3476,7 @@
           <a:bodyPr wrap="square" lIns="0" tIns="0" rIns="0" bIns="0" rtlCol="0" anchor="ctr"/>
           <a:lstStyle/>
           <a:p>
-            <a:pPr marL="0" indent="0">
+            <a:pPr indent="0" marL="0">
               <a:buNone/>
             </a:pPr>
             <a:r>
@@ -3375,7 +3515,7 @@
           <a:bodyPr wrap="square" lIns="0" tIns="0" rIns="0" bIns="0" rtlCol="0" anchor="ctr"/>
           <a:lstStyle/>
           <a:p>
-            <a:pPr marL="0" indent="0">
+            <a:pPr indent="0" marL="0">
               <a:buNone/>
             </a:pPr>
             <a:r>
@@ -3414,7 +3554,7 @@
           <a:bodyPr wrap="square" lIns="0" tIns="0" rIns="0" bIns="0" rtlCol="0" anchor="t"/>
           <a:lstStyle/>
           <a:p>
-            <a:pPr marL="0" indent="0">
+            <a:pPr indent="0" marL="0">
               <a:buNone/>
             </a:pPr>
             <a:r>
@@ -3431,7 +3571,7 @@
             <a:endParaRPr lang="en-US" sz="1200" dirty="0"/>
           </a:p>
           <a:p>
-            <a:pPr marL="0" indent="0">
+            <a:pPr indent="0" marL="0">
               <a:buNone/>
             </a:pPr>
             <a:r>
@@ -3475,13 +3615,6 @@
             <a:prstDash val="solid"/>
           </a:ln>
         </p:spPr>
-        <p:txBody>
-          <a:bodyPr/>
-          <a:lstStyle/>
-          <a:p>
-            <a:endParaRPr lang="en-US"/>
-          </a:p>
-        </p:txBody>
       </p:sp>
       <p:sp>
         <p:nvSpPr>
@@ -3504,7 +3637,7 @@
           <a:bodyPr wrap="square" lIns="0" tIns="0" rIns="0" bIns="0" rtlCol="0" anchor="ctr"/>
           <a:lstStyle/>
           <a:p>
-            <a:pPr marL="0" indent="0">
+            <a:pPr indent="0" marL="0">
               <a:buNone/>
             </a:pPr>
             <a:r>
@@ -3543,7 +3676,7 @@
           <a:bodyPr wrap="square" lIns="0" tIns="0" rIns="0" bIns="0" rtlCol="0" anchor="ctr"/>
           <a:lstStyle/>
           <a:p>
-            <a:pPr marL="0" indent="0">
+            <a:pPr indent="0" marL="0">
               <a:buNone/>
             </a:pPr>
             <a:r>
@@ -3582,7 +3715,7 @@
           <a:bodyPr wrap="square" lIns="0" tIns="0" rIns="0" bIns="0" rtlCol="0" anchor="t"/>
           <a:lstStyle/>
           <a:p>
-            <a:pPr marL="0" indent="0">
+            <a:pPr indent="0" marL="0">
               <a:buNone/>
             </a:pPr>
             <a:r>
@@ -3599,7 +3732,7 @@
             <a:endParaRPr lang="en-US" sz="1200" dirty="0"/>
           </a:p>
           <a:p>
-            <a:pPr marL="0" indent="0">
+            <a:pPr indent="0" marL="0">
               <a:buNone/>
             </a:pPr>
             <a:r>
@@ -3643,13 +3776,6 @@
             <a:prstDash val="solid"/>
           </a:ln>
         </p:spPr>
-        <p:txBody>
-          <a:bodyPr/>
-          <a:lstStyle/>
-          <a:p>
-            <a:endParaRPr lang="en-US"/>
-          </a:p>
-        </p:txBody>
       </p:sp>
       <p:sp>
         <p:nvSpPr>
@@ -3672,7 +3798,7 @@
           <a:bodyPr wrap="square" lIns="0" tIns="0" rIns="0" bIns="0" rtlCol="0" anchor="t"/>
           <a:lstStyle/>
           <a:p>
-            <a:pPr marL="0" indent="0">
+            <a:pPr indent="0" marL="0">
               <a:buNone/>
             </a:pPr>
             <a:r>
@@ -3689,7 +3815,7 @@
             <a:endParaRPr lang="en-US" sz="1400" dirty="0"/>
           </a:p>
           <a:p>
-            <a:pPr marL="0" indent="0">
+            <a:pPr indent="0" marL="0">
               <a:buNone/>
             </a:pPr>
             <a:r>
@@ -3706,7 +3832,7 @@
             <a:endParaRPr lang="en-US" sz="1400" dirty="0"/>
           </a:p>
           <a:p>
-            <a:pPr marL="0" indent="0">
+            <a:pPr indent="0" marL="0">
               <a:buNone/>
             </a:pPr>
             <a:r>
@@ -3723,7 +3849,7 @@
             <a:endParaRPr lang="en-US" sz="1400" dirty="0"/>
           </a:p>
           <a:p>
-            <a:pPr marL="0" indent="0">
+            <a:pPr indent="0" marL="0">
               <a:buNone/>
             </a:pPr>
             <a:r>
@@ -3767,13 +3893,6 @@
             <a:prstDash val="solid"/>
           </a:ln>
         </p:spPr>
-        <p:txBody>
-          <a:bodyPr/>
-          <a:lstStyle/>
-          <a:p>
-            <a:endParaRPr lang="en-US"/>
-          </a:p>
-        </p:txBody>
       </p:sp>
       <p:sp>
         <p:nvSpPr>
@@ -3796,7 +3915,7 @@
           <a:bodyPr wrap="square" lIns="0" tIns="0" rIns="0" bIns="0" rtlCol="0" anchor="t"/>
           <a:lstStyle/>
           <a:p>
-            <a:pPr marL="0" indent="0">
+            <a:pPr indent="0" marL="0">
               <a:buNone/>
             </a:pPr>
             <a:r>
@@ -3813,7 +3932,7 @@
             <a:endParaRPr lang="en-US" sz="1400" dirty="0"/>
           </a:p>
           <a:p>
-            <a:pPr marL="0" indent="0">
+            <a:pPr indent="0" marL="0">
               <a:buNone/>
             </a:pPr>
             <a:r>
@@ -3830,7 +3949,7 @@
             <a:endParaRPr lang="en-US" sz="1400" dirty="0"/>
           </a:p>
           <a:p>
-            <a:pPr marL="0" indent="0">
+            <a:pPr indent="0" marL="0">
               <a:buNone/>
             </a:pPr>
             <a:r>
@@ -3847,7 +3966,7 @@
             <a:endParaRPr lang="en-US" sz="1400" dirty="0"/>
           </a:p>
           <a:p>
-            <a:pPr marL="0" indent="0">
+            <a:pPr indent="0" marL="0">
               <a:buNone/>
             </a:pPr>
             <a:r>
@@ -3864,7 +3983,7 @@
             <a:endParaRPr lang="en-US" sz="1400" dirty="0"/>
           </a:p>
           <a:p>
-            <a:pPr marL="0" indent="0">
+            <a:pPr indent="0" marL="0">
               <a:buNone/>
             </a:pPr>
             <a:r>
@@ -3903,7 +4022,7 @@
           <a:bodyPr wrap="square" lIns="0" tIns="0" rIns="0" bIns="0" rtlCol="0" anchor="ctr"/>
           <a:lstStyle/>
           <a:p>
-            <a:pPr marL="0" indent="0">
+            <a:pPr indent="0" marL="0">
               <a:buNone/>
             </a:pPr>
             <a:r>
@@ -3937,7 +4056,6 @@
         <a:solidFill>
           <a:srgbClr val="FFFFFF"/>
         </a:solidFill>
-        <a:effectLst/>
       </p:bgPr>
     </p:bg>
     <p:spTree>
@@ -3975,7 +4093,7 @@
           <a:bodyPr wrap="square" lIns="0" tIns="0" rIns="0" bIns="0" rtlCol="0" anchor="ctr"/>
           <a:lstStyle/>
           <a:p>
-            <a:pPr marL="0" indent="0">
+            <a:pPr indent="0" marL="0">
               <a:buNone/>
             </a:pPr>
             <a:r>
@@ -4014,7 +4132,7 @@
           <a:bodyPr wrap="square" lIns="0" tIns="0" rIns="0" bIns="0" rtlCol="0" anchor="ctr"/>
           <a:lstStyle/>
           <a:p>
-            <a:pPr marL="0" indent="0">
+            <a:pPr indent="0" marL="0">
               <a:buNone/>
             </a:pPr>
             <a:r>
@@ -4048,62 +4166,20 @@
         </p:nvGraphicFramePr>
         <p:xfrm>
           <a:off x="548640" y="1600200"/>
-          <a:ext cx="6858000" cy="2103120"/>
+          <a:ext cx="6858000" cy="914400"/>
         </p:xfrm>
         <a:graphic>
           <a:graphicData uri="http://schemas.openxmlformats.org/drawingml/2006/table">
             <a:tbl>
               <a:tblPr/>
               <a:tblGrid>
-                <a:gridCol w="1417320">
-                  <a:extLst>
-                    <a:ext uri="{9D8B030D-6E8A-4147-A177-3AD203B41FA5}">
-                      <a16:colId xmlns:a16="http://schemas.microsoft.com/office/drawing/2014/main" val="20000"/>
-                    </a:ext>
-                  </a:extLst>
-                </a:gridCol>
-                <a:gridCol w="777240">
-                  <a:extLst>
-                    <a:ext uri="{9D8B030D-6E8A-4147-A177-3AD203B41FA5}">
-                      <a16:colId xmlns:a16="http://schemas.microsoft.com/office/drawing/2014/main" val="20001"/>
-                    </a:ext>
-                  </a:extLst>
-                </a:gridCol>
-                <a:gridCol w="868680">
-                  <a:extLst>
-                    <a:ext uri="{9D8B030D-6E8A-4147-A177-3AD203B41FA5}">
-                      <a16:colId xmlns:a16="http://schemas.microsoft.com/office/drawing/2014/main" val="20002"/>
-                    </a:ext>
-                  </a:extLst>
-                </a:gridCol>
-                <a:gridCol w="960120">
-                  <a:extLst>
-                    <a:ext uri="{9D8B030D-6E8A-4147-A177-3AD203B41FA5}">
-                      <a16:colId xmlns:a16="http://schemas.microsoft.com/office/drawing/2014/main" val="20003"/>
-                    </a:ext>
-                  </a:extLst>
-                </a:gridCol>
-                <a:gridCol w="960120">
-                  <a:extLst>
-                    <a:ext uri="{9D8B030D-6E8A-4147-A177-3AD203B41FA5}">
-                      <a16:colId xmlns:a16="http://schemas.microsoft.com/office/drawing/2014/main" val="20004"/>
-                    </a:ext>
-                  </a:extLst>
-                </a:gridCol>
-                <a:gridCol w="731520">
-                  <a:extLst>
-                    <a:ext uri="{9D8B030D-6E8A-4147-A177-3AD203B41FA5}">
-                      <a16:colId xmlns:a16="http://schemas.microsoft.com/office/drawing/2014/main" val="20005"/>
-                    </a:ext>
-                  </a:extLst>
-                </a:gridCol>
-                <a:gridCol w="1143000">
-                  <a:extLst>
-                    <a:ext uri="{9D8B030D-6E8A-4147-A177-3AD203B41FA5}">
-                      <a16:colId xmlns:a16="http://schemas.microsoft.com/office/drawing/2014/main" val="20006"/>
-                    </a:ext>
-                  </a:extLst>
-                </a:gridCol>
+                <a:gridCol w="1417320"/>
+                <a:gridCol w="777240"/>
+                <a:gridCol w="868680"/>
+                <a:gridCol w="960120"/>
+                <a:gridCol w="960120"/>
+                <a:gridCol w="731520"/>
+                <a:gridCol w="1143000"/>
               </a:tblGrid>
               <a:tr h="365760">
                 <a:tc>
@@ -4111,7 +4187,7 @@
                     <a:bodyPr/>
                     <a:lstStyle/>
                     <a:p>
-                      <a:pPr marL="0" indent="0" algn="ctr">
+                      <a:pPr algn="ctr" indent="0" marL="0">
                         <a:buNone/>
                       </a:pPr>
                       <a:r>
@@ -4132,7 +4208,7 @@
                       </a:endParaRPr>
                     </a:p>
                   </a:txBody>
-                  <a:tcPr>
+                  <a:tcPr marL="91440" marR="91440" marT="45720" marB="45720">
                     <a:lnL w="9525" cap="flat" cmpd="sng" algn="ctr">
                       <a:solidFill>
                         <a:srgbClr val="D0D7E0"/>
@@ -4179,7 +4255,7 @@
                     <a:bodyPr/>
                     <a:lstStyle/>
                     <a:p>
-                      <a:pPr marL="0" indent="0" algn="ctr">
+                      <a:pPr algn="ctr" indent="0" marL="0">
                         <a:buNone/>
                       </a:pPr>
                       <a:r>
@@ -4200,7 +4276,7 @@
                       </a:endParaRPr>
                     </a:p>
                   </a:txBody>
-                  <a:tcPr>
+                  <a:tcPr marL="91440" marR="91440" marT="45720" marB="45720">
                     <a:lnL w="9525" cap="flat" cmpd="sng" algn="ctr">
                       <a:solidFill>
                         <a:srgbClr val="D0D7E0"/>
@@ -4247,7 +4323,7 @@
                     <a:bodyPr/>
                     <a:lstStyle/>
                     <a:p>
-                      <a:pPr marL="0" indent="0" algn="ctr">
+                      <a:pPr algn="ctr" indent="0" marL="0">
                         <a:buNone/>
                       </a:pPr>
                       <a:r>
@@ -4268,7 +4344,7 @@
                       </a:endParaRPr>
                     </a:p>
                   </a:txBody>
-                  <a:tcPr>
+                  <a:tcPr marL="91440" marR="91440" marT="45720" marB="45720">
                     <a:lnL w="9525" cap="flat" cmpd="sng" algn="ctr">
                       <a:solidFill>
                         <a:srgbClr val="D0D7E0"/>
@@ -4315,7 +4391,7 @@
                     <a:bodyPr/>
                     <a:lstStyle/>
                     <a:p>
-                      <a:pPr marL="0" indent="0" algn="ctr">
+                      <a:pPr algn="ctr" indent="0" marL="0">
                         <a:buNone/>
                       </a:pPr>
                       <a:r>
@@ -4336,7 +4412,7 @@
                       </a:endParaRPr>
                     </a:p>
                   </a:txBody>
-                  <a:tcPr>
+                  <a:tcPr marL="91440" marR="91440" marT="45720" marB="45720">
                     <a:lnL w="9525" cap="flat" cmpd="sng" algn="ctr">
                       <a:solidFill>
                         <a:srgbClr val="D0D7E0"/>
@@ -4383,7 +4459,7 @@
                     <a:bodyPr/>
                     <a:lstStyle/>
                     <a:p>
-                      <a:pPr marL="0" indent="0" algn="ctr">
+                      <a:pPr algn="ctr" indent="0" marL="0">
                         <a:buNone/>
                       </a:pPr>
                       <a:r>
@@ -4404,7 +4480,7 @@
                       </a:endParaRPr>
                     </a:p>
                   </a:txBody>
-                  <a:tcPr>
+                  <a:tcPr marL="91440" marR="91440" marT="45720" marB="45720">
                     <a:lnL w="9525" cap="flat" cmpd="sng" algn="ctr">
                       <a:solidFill>
                         <a:srgbClr val="D0D7E0"/>
@@ -4451,7 +4527,7 @@
                     <a:bodyPr/>
                     <a:lstStyle/>
                     <a:p>
-                      <a:pPr marL="0" indent="0" algn="ctr">
+                      <a:pPr algn="ctr" indent="0" marL="0">
                         <a:buNone/>
                       </a:pPr>
                       <a:r>
@@ -4472,7 +4548,7 @@
                       </a:endParaRPr>
                     </a:p>
                   </a:txBody>
-                  <a:tcPr>
+                  <a:tcPr marL="91440" marR="91440" marT="45720" marB="45720">
                     <a:lnL w="9525" cap="flat" cmpd="sng" algn="ctr">
                       <a:solidFill>
                         <a:srgbClr val="D0D7E0"/>
@@ -4519,7 +4595,7 @@
                     <a:bodyPr/>
                     <a:lstStyle/>
                     <a:p>
-                      <a:pPr marL="0" indent="0" algn="ctr">
+                      <a:pPr algn="ctr" indent="0" marL="0">
                         <a:buNone/>
                       </a:pPr>
                       <a:r>
@@ -4540,7 +4616,7 @@
                       </a:endParaRPr>
                     </a:p>
                   </a:txBody>
-                  <a:tcPr>
+                  <a:tcPr marL="91440" marR="91440" marT="45720" marB="45720">
                     <a:lnL w="9525" cap="flat" cmpd="sng" algn="ctr">
                       <a:solidFill>
                         <a:srgbClr val="D0D7E0"/>
@@ -4582,11 +4658,6 @@
                     </a:solidFill>
                   </a:tcPr>
                 </a:tc>
-                <a:extLst>
-                  <a:ext uri="{0D108BD9-81ED-4DB2-BD59-A6C34878D82A}">
-                    <a16:rowId xmlns:a16="http://schemas.microsoft.com/office/drawing/2014/main" val="10000"/>
-                  </a:ext>
-                </a:extLst>
               </a:tr>
               <a:tr h="365760">
                 <a:tc>
@@ -4594,7 +4665,7 @@
                     <a:bodyPr/>
                     <a:lstStyle/>
                     <a:p>
-                      <a:pPr marL="0" indent="0" algn="l">
+                      <a:pPr algn="l" indent="0" marL="0">
                         <a:buNone/>
                       </a:pPr>
                       <a:r>
@@ -4615,7 +4686,7 @@
                       </a:endParaRPr>
                     </a:p>
                   </a:txBody>
-                  <a:tcPr>
+                  <a:tcPr marL="91440" marR="91440" marT="45720" marB="45720">
                     <a:lnL w="9525" cap="flat" cmpd="sng" algn="ctr">
                       <a:solidFill>
                         <a:srgbClr val="D0D7E0"/>
@@ -4662,7 +4733,7 @@
                     <a:bodyPr/>
                     <a:lstStyle/>
                     <a:p>
-                      <a:pPr marL="0" indent="0" algn="ctr">
+                      <a:pPr algn="ctr" indent="0" marL="0">
                         <a:buNone/>
                       </a:pPr>
                       <a:r>
@@ -4683,7 +4754,7 @@
                       </a:endParaRPr>
                     </a:p>
                   </a:txBody>
-                  <a:tcPr>
+                  <a:tcPr marL="91440" marR="91440" marT="45720" marB="45720">
                     <a:lnL w="9525" cap="flat" cmpd="sng" algn="ctr">
                       <a:solidFill>
                         <a:srgbClr val="D0D7E0"/>
@@ -4730,7 +4801,7 @@
                     <a:bodyPr/>
                     <a:lstStyle/>
                     <a:p>
-                      <a:pPr marL="0" indent="0" algn="ctr">
+                      <a:pPr algn="ctr" indent="0" marL="0">
                         <a:buNone/>
                       </a:pPr>
                       <a:r>
@@ -4751,7 +4822,7 @@
                       </a:endParaRPr>
                     </a:p>
                   </a:txBody>
-                  <a:tcPr>
+                  <a:tcPr marL="91440" marR="91440" marT="45720" marB="45720">
                     <a:lnL w="9525" cap="flat" cmpd="sng" algn="ctr">
                       <a:solidFill>
                         <a:srgbClr val="D0D7E0"/>
@@ -4798,7 +4869,7 @@
                     <a:bodyPr/>
                     <a:lstStyle/>
                     <a:p>
-                      <a:pPr marL="0" indent="0" algn="ctr">
+                      <a:pPr algn="ctr" indent="0" marL="0">
                         <a:buNone/>
                       </a:pPr>
                       <a:r>
@@ -4819,7 +4890,7 @@
                       </a:endParaRPr>
                     </a:p>
                   </a:txBody>
-                  <a:tcPr>
+                  <a:tcPr marL="91440" marR="91440" marT="45720" marB="45720">
                     <a:lnL w="9525" cap="flat" cmpd="sng" algn="ctr">
                       <a:solidFill>
                         <a:srgbClr val="D0D7E0"/>
@@ -4866,7 +4937,7 @@
                     <a:bodyPr/>
                     <a:lstStyle/>
                     <a:p>
-                      <a:pPr marL="0" indent="0" algn="ctr">
+                      <a:pPr algn="ctr" indent="0" marL="0">
                         <a:buNone/>
                       </a:pPr>
                       <a:r>
@@ -4887,7 +4958,7 @@
                       </a:endParaRPr>
                     </a:p>
                   </a:txBody>
-                  <a:tcPr>
+                  <a:tcPr marL="91440" marR="91440" marT="45720" marB="45720">
                     <a:lnL w="9525" cap="flat" cmpd="sng" algn="ctr">
                       <a:solidFill>
                         <a:srgbClr val="D0D7E0"/>
@@ -4934,7 +5005,7 @@
                     <a:bodyPr/>
                     <a:lstStyle/>
                     <a:p>
-                      <a:pPr marL="0" indent="0" algn="ctr">
+                      <a:pPr algn="ctr" indent="0" marL="0">
                         <a:buNone/>
                       </a:pPr>
                       <a:r>
@@ -4955,7 +5026,7 @@
                       </a:endParaRPr>
                     </a:p>
                   </a:txBody>
-                  <a:tcPr>
+                  <a:tcPr marL="91440" marR="91440" marT="45720" marB="45720">
                     <a:lnL w="9525" cap="flat" cmpd="sng" algn="ctr">
                       <a:solidFill>
                         <a:srgbClr val="D0D7E0"/>
@@ -5002,7 +5073,7 @@
                     <a:bodyPr/>
                     <a:lstStyle/>
                     <a:p>
-                      <a:pPr marL="0" indent="0" algn="ctr">
+                      <a:pPr algn="ctr" indent="0" marL="0">
                         <a:buNone/>
                       </a:pPr>
                       <a:r>
@@ -5023,7 +5094,7 @@
                       </a:endParaRPr>
                     </a:p>
                   </a:txBody>
-                  <a:tcPr>
+                  <a:tcPr marL="91440" marR="91440" marT="45720" marB="45720">
                     <a:lnL w="9525" cap="flat" cmpd="sng" algn="ctr">
                       <a:solidFill>
                         <a:srgbClr val="D0D7E0"/>
@@ -5065,11 +5136,6 @@
                     </a:solidFill>
                   </a:tcPr>
                 </a:tc>
-                <a:extLst>
-                  <a:ext uri="{0D108BD9-81ED-4DB2-BD59-A6C34878D82A}">
-                    <a16:rowId xmlns:a16="http://schemas.microsoft.com/office/drawing/2014/main" val="10001"/>
-                  </a:ext>
-                </a:extLst>
               </a:tr>
               <a:tr h="365760">
                 <a:tc>
@@ -5077,7 +5143,7 @@
                     <a:bodyPr/>
                     <a:lstStyle/>
                     <a:p>
-                      <a:pPr marL="0" indent="0" algn="l">
+                      <a:pPr algn="l" indent="0" marL="0">
                         <a:buNone/>
                       </a:pPr>
                       <a:r>
@@ -5098,7 +5164,7 @@
                       </a:endParaRPr>
                     </a:p>
                   </a:txBody>
-                  <a:tcPr>
+                  <a:tcPr marL="91440" marR="91440" marT="45720" marB="45720">
                     <a:lnL w="9525" cap="flat" cmpd="sng" algn="ctr">
                       <a:solidFill>
                         <a:srgbClr val="D0D7E0"/>
@@ -5145,7 +5211,7 @@
                     <a:bodyPr/>
                     <a:lstStyle/>
                     <a:p>
-                      <a:pPr marL="0" indent="0" algn="ctr">
+                      <a:pPr algn="ctr" indent="0" marL="0">
                         <a:buNone/>
                       </a:pPr>
                       <a:r>
@@ -5166,7 +5232,7 @@
                       </a:endParaRPr>
                     </a:p>
                   </a:txBody>
-                  <a:tcPr>
+                  <a:tcPr marL="91440" marR="91440" marT="45720" marB="45720">
                     <a:lnL w="9525" cap="flat" cmpd="sng" algn="ctr">
                       <a:solidFill>
                         <a:srgbClr val="D0D7E0"/>
@@ -5213,7 +5279,7 @@
                     <a:bodyPr/>
                     <a:lstStyle/>
                     <a:p>
-                      <a:pPr marL="0" indent="0" algn="ctr">
+                      <a:pPr algn="ctr" indent="0" marL="0">
                         <a:buNone/>
                       </a:pPr>
                       <a:r>
@@ -5234,7 +5300,7 @@
                       </a:endParaRPr>
                     </a:p>
                   </a:txBody>
-                  <a:tcPr>
+                  <a:tcPr marL="91440" marR="91440" marT="45720" marB="45720">
                     <a:lnL w="9525" cap="flat" cmpd="sng" algn="ctr">
                       <a:solidFill>
                         <a:srgbClr val="D0D7E0"/>
@@ -5281,7 +5347,7 @@
                     <a:bodyPr/>
                     <a:lstStyle/>
                     <a:p>
-                      <a:pPr marL="0" indent="0" algn="ctr">
+                      <a:pPr algn="ctr" indent="0" marL="0">
                         <a:buNone/>
                       </a:pPr>
                       <a:r>
@@ -5302,7 +5368,7 @@
                       </a:endParaRPr>
                     </a:p>
                   </a:txBody>
-                  <a:tcPr>
+                  <a:tcPr marL="91440" marR="91440" marT="45720" marB="45720">
                     <a:lnL w="9525" cap="flat" cmpd="sng" algn="ctr">
                       <a:solidFill>
                         <a:srgbClr val="D0D7E0"/>
@@ -5349,7 +5415,7 @@
                     <a:bodyPr/>
                     <a:lstStyle/>
                     <a:p>
-                      <a:pPr marL="0" indent="0" algn="ctr">
+                      <a:pPr algn="ctr" indent="0" marL="0">
                         <a:buNone/>
                       </a:pPr>
                       <a:r>
@@ -5370,7 +5436,7 @@
                       </a:endParaRPr>
                     </a:p>
                   </a:txBody>
-                  <a:tcPr>
+                  <a:tcPr marL="91440" marR="91440" marT="45720" marB="45720">
                     <a:lnL w="9525" cap="flat" cmpd="sng" algn="ctr">
                       <a:solidFill>
                         <a:srgbClr val="D0D7E0"/>
@@ -5417,7 +5483,7 @@
                     <a:bodyPr/>
                     <a:lstStyle/>
                     <a:p>
-                      <a:pPr marL="0" indent="0" algn="ctr">
+                      <a:pPr algn="ctr" indent="0" marL="0">
                         <a:buNone/>
                       </a:pPr>
                       <a:r>
@@ -5438,7 +5504,7 @@
                       </a:endParaRPr>
                     </a:p>
                   </a:txBody>
-                  <a:tcPr>
+                  <a:tcPr marL="91440" marR="91440" marT="45720" marB="45720">
                     <a:lnL w="9525" cap="flat" cmpd="sng" algn="ctr">
                       <a:solidFill>
                         <a:srgbClr val="D0D7E0"/>
@@ -5485,7 +5551,7 @@
                     <a:bodyPr/>
                     <a:lstStyle/>
                     <a:p>
-                      <a:pPr marL="0" indent="0" algn="ctr">
+                      <a:pPr algn="ctr" indent="0" marL="0">
                         <a:buNone/>
                       </a:pPr>
                       <a:r>
@@ -5506,7 +5572,7 @@
                       </a:endParaRPr>
                     </a:p>
                   </a:txBody>
-                  <a:tcPr>
+                  <a:tcPr marL="91440" marR="91440" marT="45720" marB="45720">
                     <a:lnL w="9525" cap="flat" cmpd="sng" algn="ctr">
                       <a:solidFill>
                         <a:srgbClr val="D0D7E0"/>
@@ -5548,11 +5614,6 @@
                     </a:solidFill>
                   </a:tcPr>
                 </a:tc>
-                <a:extLst>
-                  <a:ext uri="{0D108BD9-81ED-4DB2-BD59-A6C34878D82A}">
-                    <a16:rowId xmlns:a16="http://schemas.microsoft.com/office/drawing/2014/main" val="10002"/>
-                  </a:ext>
-                </a:extLst>
               </a:tr>
               <a:tr h="365760">
                 <a:tc>
@@ -5560,7 +5621,7 @@
                     <a:bodyPr/>
                     <a:lstStyle/>
                     <a:p>
-                      <a:pPr marL="0" indent="0" algn="l">
+                      <a:pPr algn="l" indent="0" marL="0">
                         <a:buNone/>
                       </a:pPr>
                       <a:r>
@@ -5581,7 +5642,7 @@
                       </a:endParaRPr>
                     </a:p>
                   </a:txBody>
-                  <a:tcPr>
+                  <a:tcPr marL="91440" marR="91440" marT="45720" marB="45720">
                     <a:lnL w="9525" cap="flat" cmpd="sng" algn="ctr">
                       <a:solidFill>
                         <a:srgbClr val="D0D7E0"/>
@@ -5628,7 +5689,7 @@
                     <a:bodyPr/>
                     <a:lstStyle/>
                     <a:p>
-                      <a:pPr marL="0" indent="0" algn="ctr">
+                      <a:pPr algn="ctr" indent="0" marL="0">
                         <a:buNone/>
                       </a:pPr>
                       <a:r>
@@ -5649,7 +5710,7 @@
                       </a:endParaRPr>
                     </a:p>
                   </a:txBody>
-                  <a:tcPr>
+                  <a:tcPr marL="91440" marR="91440" marT="45720" marB="45720">
                     <a:lnL w="9525" cap="flat" cmpd="sng" algn="ctr">
                       <a:solidFill>
                         <a:srgbClr val="D0D7E0"/>
@@ -5696,7 +5757,7 @@
                     <a:bodyPr/>
                     <a:lstStyle/>
                     <a:p>
-                      <a:pPr marL="0" indent="0" algn="ctr">
+                      <a:pPr algn="ctr" indent="0" marL="0">
                         <a:buNone/>
                       </a:pPr>
                       <a:r>
@@ -5717,7 +5778,7 @@
                       </a:endParaRPr>
                     </a:p>
                   </a:txBody>
-                  <a:tcPr>
+                  <a:tcPr marL="91440" marR="91440" marT="45720" marB="45720">
                     <a:lnL w="9525" cap="flat" cmpd="sng" algn="ctr">
                       <a:solidFill>
                         <a:srgbClr val="D0D7E0"/>
@@ -5764,7 +5825,7 @@
                     <a:bodyPr/>
                     <a:lstStyle/>
                     <a:p>
-                      <a:pPr marL="0" indent="0" algn="ctr">
+                      <a:pPr algn="ctr" indent="0" marL="0">
                         <a:buNone/>
                       </a:pPr>
                       <a:r>
@@ -5785,7 +5846,7 @@
                       </a:endParaRPr>
                     </a:p>
                   </a:txBody>
-                  <a:tcPr>
+                  <a:tcPr marL="91440" marR="91440" marT="45720" marB="45720">
                     <a:lnL w="9525" cap="flat" cmpd="sng" algn="ctr">
                       <a:solidFill>
                         <a:srgbClr val="D0D7E0"/>
@@ -5832,7 +5893,7 @@
                     <a:bodyPr/>
                     <a:lstStyle/>
                     <a:p>
-                      <a:pPr marL="0" indent="0" algn="ctr">
+                      <a:pPr algn="ctr" indent="0" marL="0">
                         <a:buNone/>
                       </a:pPr>
                       <a:r>
@@ -5853,7 +5914,7 @@
                       </a:endParaRPr>
                     </a:p>
                   </a:txBody>
-                  <a:tcPr>
+                  <a:tcPr marL="91440" marR="91440" marT="45720" marB="45720">
                     <a:lnL w="9525" cap="flat" cmpd="sng" algn="ctr">
                       <a:solidFill>
                         <a:srgbClr val="D0D7E0"/>
@@ -5900,7 +5961,7 @@
                     <a:bodyPr/>
                     <a:lstStyle/>
                     <a:p>
-                      <a:pPr marL="0" indent="0" algn="ctr">
+                      <a:pPr algn="ctr" indent="0" marL="0">
                         <a:buNone/>
                       </a:pPr>
                       <a:r>
@@ -5921,7 +5982,7 @@
                       </a:endParaRPr>
                     </a:p>
                   </a:txBody>
-                  <a:tcPr>
+                  <a:tcPr marL="91440" marR="91440" marT="45720" marB="45720">
                     <a:lnL w="9525" cap="flat" cmpd="sng" algn="ctr">
                       <a:solidFill>
                         <a:srgbClr val="D0D7E0"/>
@@ -5968,7 +6029,7 @@
                     <a:bodyPr/>
                     <a:lstStyle/>
                     <a:p>
-                      <a:pPr marL="0" indent="0" algn="ctr">
+                      <a:pPr algn="ctr" indent="0" marL="0">
                         <a:buNone/>
                       </a:pPr>
                       <a:r>
@@ -5989,7 +6050,7 @@
                       </a:endParaRPr>
                     </a:p>
                   </a:txBody>
-                  <a:tcPr>
+                  <a:tcPr marL="91440" marR="91440" marT="45720" marB="45720">
                     <a:lnL w="9525" cap="flat" cmpd="sng" algn="ctr">
                       <a:solidFill>
                         <a:srgbClr val="D0D7E0"/>
@@ -6031,11 +6092,6 @@
                     </a:solidFill>
                   </a:tcPr>
                 </a:tc>
-                <a:extLst>
-                  <a:ext uri="{0D108BD9-81ED-4DB2-BD59-A6C34878D82A}">
-                    <a16:rowId xmlns:a16="http://schemas.microsoft.com/office/drawing/2014/main" val="10003"/>
-                  </a:ext>
-                </a:extLst>
               </a:tr>
               <a:tr h="365760">
                 <a:tc>
@@ -6043,7 +6099,7 @@
                     <a:bodyPr/>
                     <a:lstStyle/>
                     <a:p>
-                      <a:pPr marL="0" indent="0" algn="l">
+                      <a:pPr algn="l" indent="0" marL="0">
                         <a:buNone/>
                       </a:pPr>
                       <a:r>
@@ -6064,7 +6120,7 @@
                       </a:endParaRPr>
                     </a:p>
                   </a:txBody>
-                  <a:tcPr>
+                  <a:tcPr marL="91440" marR="91440" marT="45720" marB="45720">
                     <a:lnL w="9525" cap="flat" cmpd="sng" algn="ctr">
                       <a:solidFill>
                         <a:srgbClr val="D0D7E0"/>
@@ -6111,7 +6167,7 @@
                     <a:bodyPr/>
                     <a:lstStyle/>
                     <a:p>
-                      <a:pPr marL="0" indent="0" algn="ctr">
+                      <a:pPr algn="ctr" indent="0" marL="0">
                         <a:buNone/>
                       </a:pPr>
                       <a:r>
@@ -6132,7 +6188,7 @@
                       </a:endParaRPr>
                     </a:p>
                   </a:txBody>
-                  <a:tcPr>
+                  <a:tcPr marL="91440" marR="91440" marT="45720" marB="45720">
                     <a:lnL w="9525" cap="flat" cmpd="sng" algn="ctr">
                       <a:solidFill>
                         <a:srgbClr val="D0D7E0"/>
@@ -6179,7 +6235,7 @@
                     <a:bodyPr/>
                     <a:lstStyle/>
                     <a:p>
-                      <a:pPr marL="0" indent="0" algn="ctr">
+                      <a:pPr algn="ctr" indent="0" marL="0">
                         <a:buNone/>
                       </a:pPr>
                       <a:r>
@@ -6200,7 +6256,7 @@
                       </a:endParaRPr>
                     </a:p>
                   </a:txBody>
-                  <a:tcPr>
+                  <a:tcPr marL="91440" marR="91440" marT="45720" marB="45720">
                     <a:lnL w="9525" cap="flat" cmpd="sng" algn="ctr">
                       <a:solidFill>
                         <a:srgbClr val="D0D7E0"/>
@@ -6247,7 +6303,7 @@
                     <a:bodyPr/>
                     <a:lstStyle/>
                     <a:p>
-                      <a:pPr marL="0" indent="0" algn="ctr">
+                      <a:pPr algn="ctr" indent="0" marL="0">
                         <a:buNone/>
                       </a:pPr>
                       <a:r>
@@ -6268,7 +6324,7 @@
                       </a:endParaRPr>
                     </a:p>
                   </a:txBody>
-                  <a:tcPr>
+                  <a:tcPr marL="91440" marR="91440" marT="45720" marB="45720">
                     <a:lnL w="9525" cap="flat" cmpd="sng" algn="ctr">
                       <a:solidFill>
                         <a:srgbClr val="D0D7E0"/>
@@ -6315,7 +6371,7 @@
                     <a:bodyPr/>
                     <a:lstStyle/>
                     <a:p>
-                      <a:pPr marL="0" indent="0" algn="ctr">
+                      <a:pPr algn="ctr" indent="0" marL="0">
                         <a:buNone/>
                       </a:pPr>
                       <a:r>
@@ -6336,7 +6392,7 @@
                       </a:endParaRPr>
                     </a:p>
                   </a:txBody>
-                  <a:tcPr>
+                  <a:tcPr marL="91440" marR="91440" marT="45720" marB="45720">
                     <a:lnL w="9525" cap="flat" cmpd="sng" algn="ctr">
                       <a:solidFill>
                         <a:srgbClr val="D0D7E0"/>
@@ -6383,7 +6439,7 @@
                     <a:bodyPr/>
                     <a:lstStyle/>
                     <a:p>
-                      <a:pPr marL="0" indent="0" algn="ctr">
+                      <a:pPr algn="ctr" indent="0" marL="0">
                         <a:buNone/>
                       </a:pPr>
                       <a:r>
@@ -6404,7 +6460,7 @@
                       </a:endParaRPr>
                     </a:p>
                   </a:txBody>
-                  <a:tcPr>
+                  <a:tcPr marL="91440" marR="91440" marT="45720" marB="45720">
                     <a:lnL w="9525" cap="flat" cmpd="sng" algn="ctr">
                       <a:solidFill>
                         <a:srgbClr val="D0D7E0"/>
@@ -6451,7 +6507,7 @@
                     <a:bodyPr/>
                     <a:lstStyle/>
                     <a:p>
-                      <a:pPr marL="0" indent="0" algn="ctr">
+                      <a:pPr algn="ctr" indent="0" marL="0">
                         <a:buNone/>
                       </a:pPr>
                       <a:r>
@@ -6472,7 +6528,7 @@
                       </a:endParaRPr>
                     </a:p>
                   </a:txBody>
-                  <a:tcPr>
+                  <a:tcPr marL="91440" marR="91440" marT="45720" marB="45720">
                     <a:lnL w="9525" cap="flat" cmpd="sng" algn="ctr">
                       <a:solidFill>
                         <a:srgbClr val="D0D7E0"/>
@@ -6514,11 +6570,6 @@
                     </a:solidFill>
                   </a:tcPr>
                 </a:tc>
-                <a:extLst>
-                  <a:ext uri="{0D108BD9-81ED-4DB2-BD59-A6C34878D82A}">
-                    <a16:rowId xmlns:a16="http://schemas.microsoft.com/office/drawing/2014/main" val="10004"/>
-                  </a:ext>
-                </a:extLst>
               </a:tr>
             </a:tbl>
           </a:graphicData>
@@ -6526,7 +6577,7 @@
       </p:graphicFrame>
       <p:sp>
         <p:nvSpPr>
-          <p:cNvPr id="4" name="Text 2"/>
+          <p:cNvPr id="5" name="Text 2"/>
           <p:cNvSpPr txBox="1"/>
           <p:nvPr/>
         </p:nvSpPr>
@@ -6545,7 +6596,7 @@
           <a:bodyPr wrap="square" lIns="0" tIns="0" rIns="0" bIns="0" rtlCol="0" anchor="ctr"/>
           <a:lstStyle/>
           <a:p>
-            <a:pPr marL="0" indent="0">
+            <a:pPr indent="0" marL="0">
               <a:buNone/>
             </a:pPr>
             <a:r>
@@ -6565,14 +6616,14 @@
       </p:sp>
       <p:pic>
         <p:nvPicPr>
-          <p:cNvPr id="6" name="Image 0" descr="/home/claude/jiang/figures/F3_comparison.png"/>
+          <p:cNvPr id="6" name="Image 0" descr="/home/claude/jiang/figures/F3_comparison.png">    </p:cNvPr>
           <p:cNvPicPr>
             <a:picLocks noChangeAspect="1"/>
           </p:cNvPicPr>
           <p:nvPr/>
         </p:nvPicPr>
         <p:blipFill>
-          <a:blip r:embed="rId3"/>
+          <a:blip r:embed="rId1"/>
           <a:stretch>
             <a:fillRect/>
           </a:stretch>
@@ -6645,7 +6696,7 @@
                 <a:ea typeface="Calibri" pitchFamily="34" charset="-122"/>
                 <a:cs typeface="Calibri" pitchFamily="34" charset="-120"/>
               </a:rPr>
-              <a:t>By-study split: every model falls; the forest to the baseline's level on this fold draw, the MLP below predicting the mean. XGBoost keeps a lead, but at R² 0.16 nobody is predicting a new source well. Re-drawing the folds moves every by-study number by ±0.05–0.1; XGBoost &gt; forest and MLP last hold in every draw.</a:t>
+              <a:t>By-study split: every model falls; the forest to the baseline's level on this fold draw, the MLP below predicting the mean. This draw is a pessimistic one: over eight re-drawn fold assignments (results/ablation_folds.csv) XGBoost scores 0.29 ± 0.06, forest 0.13 ± 0.06, ridge 0.05 ± 0.10, MLP −0.60 ± 0.30 — XGBoost first and MLP last in every draw, forest above ridge in six of eight. Even at 0.29, nobody predicts a new source well.</a:t>
             </a:r>
             <a:endParaRPr lang="en-US" sz="1250" dirty="0"/>
           </a:p>
@@ -6674,14 +6725,14 @@
       </p:sp>
       <p:pic>
         <p:nvPicPr>
-          <p:cNvPr id="8" name="Image 1" descr="/home/claude/jiang/figures/F4_residuals_by_study.png"/>
+          <p:cNvPr id="8" name="Image 1" descr="/home/claude/jiang/figures/F4_residuals_by_study.png">    </p:cNvPr>
           <p:cNvPicPr>
             <a:picLocks noChangeAspect="1"/>
           </p:cNvPicPr>
           <p:nvPr/>
         </p:nvPicPr>
         <p:blipFill>
-          <a:blip r:embed="rId4"/>
+          <a:blip r:embed="rId2"/>
           <a:stretch>
             <a:fillRect/>
           </a:stretch>
@@ -6717,7 +6768,7 @@
           <a:bodyPr wrap="square" lIns="0" tIns="0" rIns="0" bIns="0" rtlCol="0" anchor="ctr"/>
           <a:lstStyle/>
           <a:p>
-            <a:pPr marL="0" indent="0">
+            <a:pPr indent="0" marL="0">
               <a:buNone/>
             </a:pPr>
             <a:r>
@@ -6756,7 +6807,7 @@
           <a:bodyPr wrap="square" lIns="0" tIns="0" rIns="0" bIns="0" rtlCol="0" anchor="ctr"/>
           <a:lstStyle/>
           <a:p>
-            <a:pPr marL="0" indent="0">
+            <a:pPr indent="0" marL="0">
               <a:buNone/>
             </a:pPr>
             <a:r>
@@ -6790,7 +6841,6 @@
         <a:solidFill>
           <a:srgbClr val="FFFFFF"/>
         </a:solidFill>
-        <a:effectLst/>
       </p:bgPr>
     </p:bg>
     <p:spTree>
@@ -6828,7 +6878,7 @@
           <a:bodyPr wrap="square" lIns="0" tIns="0" rIns="0" bIns="0" rtlCol="0" anchor="ctr"/>
           <a:lstStyle/>
           <a:p>
-            <a:pPr marL="0" indent="0">
+            <a:pPr indent="0" marL="0">
               <a:buNone/>
             </a:pPr>
             <a:r>
@@ -6840,7 +6890,7 @@
                 <a:ea typeface="Cambria" pitchFamily="34" charset="-122"/>
                 <a:cs typeface="Cambria" pitchFamily="34" charset="-120"/>
               </a:rPr>
-              <a:t>Why the trees beat the baseline, and what is still open</a:t>
+              <a:t>Why XGBoost won: laboratory memory, then the residual</a:t>
             </a:r>
             <a:endParaRPr lang="en-US" sz="3000" dirty="0"/>
           </a:p>
@@ -6867,7 +6917,7 @@
           <a:bodyPr wrap="square" lIns="0" tIns="0" rIns="0" bIns="0" rtlCol="0" anchor="ctr"/>
           <a:lstStyle/>
           <a:p>
-            <a:pPr marL="0" indent="0">
+            <a:pPr indent="0" marL="0">
               <a:buNone/>
             </a:pPr>
             <a:r>
@@ -6879,7 +6929,7 @@
                 <a:ea typeface="Calibri" pitchFamily="34" charset="-122"/>
                 <a:cs typeface="Calibri" pitchFamily="34" charset="-120"/>
               </a:rPr>
-              <a:t>A data property, a prediction stated in advance, the ablations that tested it, and one honest gap</a:t>
+              <a:t>Two data properties, predictions stated in advance, five ablations</a:t>
             </a:r>
             <a:endParaRPr lang="en-US" sz="1400" dirty="0"/>
           </a:p>
@@ -6911,13 +6961,6 @@
             <a:prstDash val="solid"/>
           </a:ln>
         </p:spPr>
-        <p:txBody>
-          <a:bodyPr/>
-          <a:lstStyle/>
-          <a:p>
-            <a:endParaRPr lang="en-US"/>
-          </a:p>
-        </p:txBody>
       </p:sp>
       <p:sp>
         <p:nvSpPr>
@@ -6927,7 +6970,7 @@
         </p:nvSpPr>
         <p:spPr>
           <a:xfrm>
-            <a:off x="731520" y="1581912"/>
+            <a:off x="731520" y="1572768"/>
             <a:ext cx="5212080" cy="2011680"/>
           </a:xfrm>
           <a:prstGeom prst="rect">
@@ -6940,11 +6983,11 @@
           <a:bodyPr wrap="square" lIns="0" tIns="0" rIns="0" bIns="0" rtlCol="0" anchor="t"/>
           <a:lstStyle/>
           <a:p>
-            <a:pPr marL="0" indent="0">
+            <a:pPr indent="0" marL="0">
               <a:buNone/>
             </a:pPr>
             <a:r>
-              <a:rPr lang="en-US" sz="1100" b="1" dirty="0">
+              <a:rPr lang="en-US" sz="1000" b="1" dirty="0">
                 <a:solidFill>
                   <a:srgbClr val="1B2A4A"/>
                 </a:solidFill>
@@ -6952,10 +6995,13 @@
                 <a:ea typeface="Calibri" pitchFamily="34" charset="-122"/>
                 <a:cs typeface="Calibri" pitchFamily="34" charset="-120"/>
               </a:rPr>
-              <a:t>Data property. </a:t>
-            </a:r>
-            <a:r>
-              <a:rPr lang="en-US" sz="1100" dirty="0">
+              <a:t>Data property 1. </a:t>
+            </a:r>
+            <a:pPr indent="0" marL="0">
+              <a:buNone/>
+            </a:pPr>
+            <a:r>
+              <a:rPr lang="en-US" sz="1000" dirty="0">
                 <a:solidFill>
                   <a:srgbClr val="222222"/>
                 </a:solidFill>
@@ -6963,16 +7009,16 @@
                 <a:ea typeface="Calibri" pitchFamily="34" charset="-122"/>
                 <a:cs typeface="Calibri" pitchFamily="34" charset="-120"/>
               </a:rPr>
-              <a:t>61 % of the variance in strength lies between study blocks. Fly-ash oxides and silicate composition barely vary within a block (chart, right), so on a random split a tree can identify the source and inherit its strength level.</a:t>
-            </a:r>
-            <a:endParaRPr lang="en-US" sz="1100" dirty="0"/>
-          </a:p>
-          <a:p>
-            <a:pPr marL="0" indent="0">
+              <a:t>61 % of the variance in strength lies between study blocks, and fly-ash oxides and silicate composition barely vary within a block (chart), so on a random split a tree can identify the source and inherit its strength level.</a:t>
+            </a:r>
+            <a:endParaRPr lang="en-US" sz="1000" dirty="0"/>
+          </a:p>
+          <a:p>
+            <a:pPr indent="0" marL="0">
               <a:buNone/>
             </a:pPr>
             <a:r>
-              <a:rPr lang="en-US" sz="500" dirty="0">
+              <a:rPr lang="en-US" sz="400" dirty="0">
                 <a:solidFill>
                   <a:srgbClr val="000000"/>
                 </a:solidFill>
@@ -6982,14 +7028,14 @@
               </a:rPr>
               <a:t> </a:t>
             </a:r>
-            <a:endParaRPr lang="en-US" sz="1100" dirty="0"/>
-          </a:p>
-          <a:p>
-            <a:pPr marL="0" indent="0">
+            <a:endParaRPr lang="en-US" sz="1000" dirty="0"/>
+          </a:p>
+          <a:p>
+            <a:pPr indent="0" marL="0">
               <a:buNone/>
             </a:pPr>
             <a:r>
-              <a:rPr lang="en-US" sz="1100" b="1" dirty="0">
+              <a:rPr lang="en-US" sz="1000" b="1" dirty="0">
                 <a:solidFill>
                   <a:srgbClr val="1B2A4A"/>
                 </a:solidFill>
@@ -6997,10 +7043,13 @@
                 <a:ea typeface="Calibri" pitchFamily="34" charset="-122"/>
                 <a:cs typeface="Calibri" pitchFamily="34" charset="-120"/>
               </a:rPr>
-              <a:t>Prediction, stated before running. </a:t>
-            </a:r>
-            <a:r>
-              <a:rPr lang="en-US" sz="1100" dirty="0">
+              <a:t>Prediction 1 (in advance). </a:t>
+            </a:r>
+            <a:pPr indent="0" marL="0">
+              <a:buNone/>
+            </a:pPr>
+            <a:r>
+              <a:rPr lang="en-US" sz="1000" dirty="0">
                 <a:solidFill>
                   <a:srgbClr val="222222"/>
                 </a:solidFill>
@@ -7008,9 +7057,57 @@
                 <a:ea typeface="Calibri" pitchFamily="34" charset="-122"/>
                 <a:cs typeface="Calibri" pitchFamily="34" charset="-120"/>
               </a:rPr>
-              <a:t>If that is where the trees' lead comes from, then (a) holding out whole blocks should bring every model down to the baseline's level, and (b) giving every model the block identity should lift the baseline while the trees barely move.</a:t>
-            </a:r>
-            <a:endParaRPr lang="en-US" sz="1100" dirty="0"/>
+              <a:t>(a) Hold out whole blocks and every model should fall to the baseline's level; (b) give every model the block identity and the baseline should rise while the trees barely move.</a:t>
+            </a:r>
+            <a:endParaRPr lang="en-US" sz="1000" dirty="0"/>
+          </a:p>
+          <a:p>
+            <a:pPr indent="0" marL="0">
+              <a:buNone/>
+            </a:pPr>
+            <a:r>
+              <a:rPr lang="en-US" sz="400" dirty="0">
+                <a:solidFill>
+                  <a:srgbClr val="000000"/>
+                </a:solidFill>
+                <a:latin typeface="Calibri" pitchFamily="34" charset="0"/>
+                <a:ea typeface="Calibri" pitchFamily="34" charset="-122"/>
+                <a:cs typeface="Calibri" pitchFamily="34" charset="-120"/>
+              </a:rPr>
+              <a:t> </a:t>
+            </a:r>
+            <a:endParaRPr lang="en-US" sz="1000" dirty="0"/>
+          </a:p>
+          <a:p>
+            <a:pPr indent="0" marL="0">
+              <a:buNone/>
+            </a:pPr>
+            <a:r>
+              <a:rPr lang="en-US" sz="1000" b="1" dirty="0">
+                <a:solidFill>
+                  <a:srgbClr val="1B2A4A"/>
+                </a:solidFill>
+                <a:latin typeface="Calibri" pitchFamily="34" charset="0"/>
+                <a:ea typeface="Calibri" pitchFamily="34" charset="-122"/>
+                <a:cs typeface="Calibri" pitchFamily="34" charset="-120"/>
+              </a:rPr>
+              <a:t>Result 1. </a:t>
+            </a:r>
+            <a:pPr indent="0" marL="0">
+              <a:buNone/>
+            </a:pPr>
+            <a:r>
+              <a:rPr lang="en-US" sz="1000" dirty="0">
+                <a:solidFill>
+                  <a:srgbClr val="222222"/>
+                </a:solidFill>
+                <a:latin typeface="Calibri" pitchFamily="34" charset="0"/>
+                <a:ea typeface="Calibri" pitchFamily="34" charset="-122"/>
+                <a:cs typeface="Calibri" pitchFamily="34" charset="-120"/>
+              </a:rPr>
+              <a:t>(b) held: ridge 0.47 → 0.70, trees ±0.01; block mean alone 0.53 &gt; ridge 0.47. (a) held for the MLP, is within fold-draw noise for the forest (0.13 ± 0.06 vs ridge 0.05 ± 0.10), and failed for XGBoost (0.29 ± 0.06, first in 8 of 8 draws). So the laboratory property explains the trees' lead over ridge, not XGBoost's margin over the forest.</a:t>
+            </a:r>
+            <a:endParaRPr lang="en-US" sz="1000" dirty="0"/>
           </a:p>
         </p:txBody>
       </p:sp>
@@ -7029,7 +7126,7 @@
           </p:nvPr>
         </p:nvGraphicFramePr>
         <p:xfrm>
-          <a:off x="548640" y="3749040"/>
+          <a:off x="548640" y="3675888"/>
           <a:ext cx="5577840" cy="914400"/>
         </p:xfrm>
         <a:graphic>
@@ -7037,53 +7134,23 @@
             <a:tbl>
               <a:tblPr/>
               <a:tblGrid>
-                <a:gridCol w="2651760">
-                  <a:extLst>
-                    <a:ext uri="{9D8B030D-6E8A-4147-A177-3AD203B41FA5}">
-                      <a16:colId xmlns:a16="http://schemas.microsoft.com/office/drawing/2014/main" val="20000"/>
-                    </a:ext>
-                  </a:extLst>
-                </a:gridCol>
-                <a:gridCol w="731520">
-                  <a:extLst>
-                    <a:ext uri="{9D8B030D-6E8A-4147-A177-3AD203B41FA5}">
-                      <a16:colId xmlns:a16="http://schemas.microsoft.com/office/drawing/2014/main" val="20001"/>
-                    </a:ext>
-                  </a:extLst>
-                </a:gridCol>
-                <a:gridCol w="822960">
-                  <a:extLst>
-                    <a:ext uri="{9D8B030D-6E8A-4147-A177-3AD203B41FA5}">
-                      <a16:colId xmlns:a16="http://schemas.microsoft.com/office/drawing/2014/main" val="20002"/>
-                    </a:ext>
-                  </a:extLst>
-                </a:gridCol>
-                <a:gridCol w="731520">
-                  <a:extLst>
-                    <a:ext uri="{9D8B030D-6E8A-4147-A177-3AD203B41FA5}">
-                      <a16:colId xmlns:a16="http://schemas.microsoft.com/office/drawing/2014/main" val="20003"/>
-                    </a:ext>
-                  </a:extLst>
-                </a:gridCol>
-                <a:gridCol w="640080">
-                  <a:extLst>
-                    <a:ext uri="{9D8B030D-6E8A-4147-A177-3AD203B41FA5}">
-                      <a16:colId xmlns:a16="http://schemas.microsoft.com/office/drawing/2014/main" val="20004"/>
-                    </a:ext>
-                  </a:extLst>
-                </a:gridCol>
+                <a:gridCol w="1920240"/>
+                <a:gridCol w="868680"/>
+                <a:gridCol w="914400"/>
+                <a:gridCol w="868680"/>
+                <a:gridCol w="1005840"/>
               </a:tblGrid>
-              <a:tr h="246888">
+              <a:tr h="237744">
                 <a:tc>
                   <a:txBody>
                     <a:bodyPr/>
                     <a:lstStyle/>
                     <a:p>
-                      <a:pPr marL="0" indent="0" algn="ctr">
+                      <a:pPr algn="ctr" indent="0" marL="0">
                         <a:buNone/>
                       </a:pPr>
                       <a:r>
-                        <a:rPr lang="en-US" sz="1050" b="1" dirty="0">
+                        <a:rPr lang="en-US" sz="950" b="1" dirty="0">
                           <a:solidFill>
                             <a:srgbClr val="FFFFFF"/>
                           </a:solidFill>
@@ -7091,16 +7158,16 @@
                           <a:ea typeface="Calibri" pitchFamily="34" charset="-122"/>
                           <a:cs typeface="Calibri" pitchFamily="34" charset="-120"/>
                         </a:rPr>
-                        <a:t>R², seed 42</a:t>
+                        <a:t>R², seed 42: random / held out</a:t>
                       </a:r>
-                      <a:endParaRPr lang="en-US" sz="1050" dirty="0">
+                      <a:endParaRPr lang="en-US" sz="950" dirty="0">
                         <a:latin typeface="Calibri" charset="0"/>
                         <a:ea typeface="Calibri" charset="0"/>
                         <a:cs typeface="Calibri" charset="0"/>
                       </a:endParaRPr>
                     </a:p>
                   </a:txBody>
-                  <a:tcPr>
+                  <a:tcPr marL="91440" marR="91440" marT="45720" marB="45720">
                     <a:lnL w="9525" cap="flat" cmpd="sng" algn="ctr">
                       <a:solidFill>
                         <a:srgbClr val="D0D7E0"/>
@@ -7147,11 +7214,11 @@
                     <a:bodyPr/>
                     <a:lstStyle/>
                     <a:p>
-                      <a:pPr marL="0" indent="0" algn="ctr">
+                      <a:pPr algn="ctr" indent="0" marL="0">
                         <a:buNone/>
                       </a:pPr>
                       <a:r>
-                        <a:rPr lang="en-US" sz="1050" b="1" dirty="0">
+                        <a:rPr lang="en-US" sz="950" b="1" dirty="0">
                           <a:solidFill>
                             <a:srgbClr val="FFFFFF"/>
                           </a:solidFill>
@@ -7161,14 +7228,14 @@
                         </a:rPr>
                         <a:t>Ridge</a:t>
                       </a:r>
-                      <a:endParaRPr lang="en-US" sz="1050" dirty="0">
+                      <a:endParaRPr lang="en-US" sz="950" dirty="0">
                         <a:latin typeface="Calibri" charset="0"/>
                         <a:ea typeface="Calibri" charset="0"/>
                         <a:cs typeface="Calibri" charset="0"/>
                       </a:endParaRPr>
                     </a:p>
                   </a:txBody>
-                  <a:tcPr>
+                  <a:tcPr marL="91440" marR="91440" marT="45720" marB="45720">
                     <a:lnL w="9525" cap="flat" cmpd="sng" algn="ctr">
                       <a:solidFill>
                         <a:srgbClr val="D0D7E0"/>
@@ -7215,11 +7282,11 @@
                     <a:bodyPr/>
                     <a:lstStyle/>
                     <a:p>
-                      <a:pPr marL="0" indent="0" algn="ctr">
+                      <a:pPr algn="ctr" indent="0" marL="0">
                         <a:buNone/>
                       </a:pPr>
                       <a:r>
-                        <a:rPr lang="en-US" sz="1050" b="1" dirty="0">
+                        <a:rPr lang="en-US" sz="950" b="1" dirty="0">
                           <a:solidFill>
                             <a:srgbClr val="FFFFFF"/>
                           </a:solidFill>
@@ -7229,14 +7296,14 @@
                         </a:rPr>
                         <a:t>Forest</a:t>
                       </a:r>
-                      <a:endParaRPr lang="en-US" sz="1050" dirty="0">
+                      <a:endParaRPr lang="en-US" sz="950" dirty="0">
                         <a:latin typeface="Calibri" charset="0"/>
                         <a:ea typeface="Calibri" charset="0"/>
                         <a:cs typeface="Calibri" charset="0"/>
                       </a:endParaRPr>
                     </a:p>
                   </a:txBody>
-                  <a:tcPr>
+                  <a:tcPr marL="91440" marR="91440" marT="45720" marB="45720">
                     <a:lnL w="9525" cap="flat" cmpd="sng" algn="ctr">
                       <a:solidFill>
                         <a:srgbClr val="D0D7E0"/>
@@ -7283,11 +7350,11 @@
                     <a:bodyPr/>
                     <a:lstStyle/>
                     <a:p>
-                      <a:pPr marL="0" indent="0" algn="ctr">
+                      <a:pPr algn="ctr" indent="0" marL="0">
                         <a:buNone/>
                       </a:pPr>
                       <a:r>
-                        <a:rPr lang="en-US" sz="1050" b="1" dirty="0">
+                        <a:rPr lang="en-US" sz="950" b="1" dirty="0">
                           <a:solidFill>
                             <a:srgbClr val="FFFFFF"/>
                           </a:solidFill>
@@ -7297,14 +7364,14 @@
                         </a:rPr>
                         <a:t>XGBoost</a:t>
                       </a:r>
-                      <a:endParaRPr lang="en-US" sz="1050" dirty="0">
+                      <a:endParaRPr lang="en-US" sz="950" dirty="0">
                         <a:latin typeface="Calibri" charset="0"/>
                         <a:ea typeface="Calibri" charset="0"/>
                         <a:cs typeface="Calibri" charset="0"/>
                       </a:endParaRPr>
                     </a:p>
                   </a:txBody>
-                  <a:tcPr>
+                  <a:tcPr marL="91440" marR="91440" marT="45720" marB="45720">
                     <a:lnL w="9525" cap="flat" cmpd="sng" algn="ctr">
                       <a:solidFill>
                         <a:srgbClr val="D0D7E0"/>
@@ -7351,11 +7418,11 @@
                     <a:bodyPr/>
                     <a:lstStyle/>
                     <a:p>
-                      <a:pPr marL="0" indent="0" algn="ctr">
+                      <a:pPr algn="ctr" indent="0" marL="0">
                         <a:buNone/>
                       </a:pPr>
                       <a:r>
-                        <a:rPr lang="en-US" sz="1050" b="1" dirty="0">
+                        <a:rPr lang="en-US" sz="950" b="1" dirty="0">
                           <a:solidFill>
                             <a:srgbClr val="FFFFFF"/>
                           </a:solidFill>
@@ -7365,14 +7432,14 @@
                         </a:rPr>
                         <a:t>MLP</a:t>
                       </a:r>
-                      <a:endParaRPr lang="en-US" sz="1050" dirty="0">
+                      <a:endParaRPr lang="en-US" sz="950" dirty="0">
                         <a:latin typeface="Calibri" charset="0"/>
                         <a:ea typeface="Calibri" charset="0"/>
                         <a:cs typeface="Calibri" charset="0"/>
                       </a:endParaRPr>
                     </a:p>
                   </a:txBody>
-                  <a:tcPr>
+                  <a:tcPr marL="91440" marR="91440" marT="45720" marB="45720">
                     <a:lnL w="9525" cap="flat" cmpd="sng" algn="ctr">
                       <a:solidFill>
                         <a:srgbClr val="D0D7E0"/>
@@ -7414,23 +7481,18 @@
                     </a:solidFill>
                   </a:tcPr>
                 </a:tc>
-                <a:extLst>
-                  <a:ext uri="{0D108BD9-81ED-4DB2-BD59-A6C34878D82A}">
-                    <a16:rowId xmlns:a16="http://schemas.microsoft.com/office/drawing/2014/main" val="10000"/>
-                  </a:ext>
-                </a:extLst>
               </a:tr>
-              <a:tr h="246888">
+              <a:tr h="237744">
                 <a:tc>
                   <a:txBody>
                     <a:bodyPr/>
                     <a:lstStyle/>
                     <a:p>
-                      <a:pPr marL="0" indent="0" algn="l">
+                      <a:pPr algn="l" indent="0" marL="0">
                         <a:buNone/>
                       </a:pPr>
                       <a:r>
-                        <a:rPr lang="en-US" sz="1050" dirty="0">
+                        <a:rPr lang="en-US" sz="950" dirty="0">
                           <a:solidFill>
                             <a:srgbClr val="222222"/>
                           </a:solidFill>
@@ -7438,16 +7500,16 @@
                           <a:ea typeface="Calibri" pitchFamily="34" charset="-122"/>
                           <a:cs typeface="Calibri" pitchFamily="34" charset="-120"/>
                         </a:rPr>
-                        <a:t>Mix variables, random split</a:t>
+                        <a:t>Mix variables</a:t>
                       </a:r>
-                      <a:endParaRPr lang="en-US" sz="1050" dirty="0">
+                      <a:endParaRPr lang="en-US" sz="950" dirty="0">
                         <a:latin typeface="Calibri" charset="0"/>
                         <a:ea typeface="Calibri" charset="0"/>
                         <a:cs typeface="Calibri" charset="0"/>
                       </a:endParaRPr>
                     </a:p>
                   </a:txBody>
-                  <a:tcPr>
+                  <a:tcPr marL="91440" marR="91440" marT="45720" marB="45720">
                     <a:lnL w="9525" cap="flat" cmpd="sng" algn="ctr">
                       <a:solidFill>
                         <a:srgbClr val="D0D7E0"/>
@@ -7491,11 +7553,11 @@
                     <a:bodyPr/>
                     <a:lstStyle/>
                     <a:p>
-                      <a:pPr marL="0" indent="0" algn="ctr">
+                      <a:pPr algn="ctr" indent="0" marL="0">
                         <a:buNone/>
                       </a:pPr>
                       <a:r>
-                        <a:rPr lang="en-US" sz="1050" dirty="0">
+                        <a:rPr lang="en-US" sz="950" dirty="0">
                           <a:solidFill>
                             <a:srgbClr val="222222"/>
                           </a:solidFill>
@@ -7503,16 +7565,16 @@
                           <a:ea typeface="Calibri" pitchFamily="34" charset="-122"/>
                           <a:cs typeface="Calibri" pitchFamily="34" charset="-120"/>
                         </a:rPr>
-                        <a:t>0.47</a:t>
+                        <a:t>0.47 / 0.05</a:t>
                       </a:r>
-                      <a:endParaRPr lang="en-US" sz="1050" dirty="0">
+                      <a:endParaRPr lang="en-US" sz="950" dirty="0">
                         <a:latin typeface="Calibri" charset="0"/>
                         <a:ea typeface="Calibri" charset="0"/>
                         <a:cs typeface="Calibri" charset="0"/>
                       </a:endParaRPr>
                     </a:p>
                   </a:txBody>
-                  <a:tcPr>
+                  <a:tcPr marL="91440" marR="91440" marT="45720" marB="45720">
                     <a:lnL w="9525" cap="flat" cmpd="sng" algn="ctr">
                       <a:solidFill>
                         <a:srgbClr val="D0D7E0"/>
@@ -7556,11 +7618,468 @@
                     <a:bodyPr/>
                     <a:lstStyle/>
                     <a:p>
-                      <a:pPr marL="0" indent="0" algn="ctr">
+                      <a:pPr algn="ctr" indent="0" marL="0">
                         <a:buNone/>
                       </a:pPr>
                       <a:r>
-                        <a:rPr lang="en-US" sz="1050" dirty="0">
+                        <a:rPr lang="en-US" sz="950" dirty="0">
+                          <a:solidFill>
+                            <a:srgbClr val="222222"/>
+                          </a:solidFill>
+                          <a:latin typeface="Calibri" pitchFamily="34" charset="0"/>
+                          <a:ea typeface="Calibri" pitchFamily="34" charset="-122"/>
+                          <a:cs typeface="Calibri" pitchFamily="34" charset="-120"/>
+                        </a:rPr>
+                        <a:t>0.80 / 0.05</a:t>
+                      </a:r>
+                      <a:endParaRPr lang="en-US" sz="950" dirty="0">
+                        <a:latin typeface="Calibri" charset="0"/>
+                        <a:ea typeface="Calibri" charset="0"/>
+                        <a:cs typeface="Calibri" charset="0"/>
+                      </a:endParaRPr>
+                    </a:p>
+                  </a:txBody>
+                  <a:tcPr marL="91440" marR="91440" marT="45720" marB="45720">
+                    <a:lnL w="9525" cap="flat" cmpd="sng" algn="ctr">
+                      <a:solidFill>
+                        <a:srgbClr val="D0D7E0"/>
+                      </a:solidFill>
+                      <a:prstDash val="solid"/>
+                      <a:round/>
+                      <a:headEnd type="none" w="med" len="med"/>
+                      <a:tailEnd type="none" w="med" len="med"/>
+                    </a:lnL>
+                    <a:lnR w="9525" cap="flat" cmpd="sng" algn="ctr">
+                      <a:solidFill>
+                        <a:srgbClr val="D0D7E0"/>
+                      </a:solidFill>
+                      <a:prstDash val="solid"/>
+                      <a:round/>
+                      <a:headEnd type="none" w="med" len="med"/>
+                      <a:tailEnd type="none" w="med" len="med"/>
+                    </a:lnR>
+                    <a:lnT w="9525" cap="flat" cmpd="sng" algn="ctr">
+                      <a:solidFill>
+                        <a:srgbClr val="D0D7E0"/>
+                      </a:solidFill>
+                      <a:prstDash val="solid"/>
+                      <a:round/>
+                      <a:headEnd type="none" w="med" len="med"/>
+                      <a:tailEnd type="none" w="med" len="med"/>
+                    </a:lnT>
+                    <a:lnB w="9525" cap="flat" cmpd="sng" algn="ctr">
+                      <a:solidFill>
+                        <a:srgbClr val="D0D7E0"/>
+                      </a:solidFill>
+                      <a:prstDash val="solid"/>
+                      <a:round/>
+                      <a:headEnd type="none" w="med" len="med"/>
+                      <a:tailEnd type="none" w="med" len="med"/>
+                    </a:lnB>
+                  </a:tcPr>
+                </a:tc>
+                <a:tc>
+                  <a:txBody>
+                    <a:bodyPr/>
+                    <a:lstStyle/>
+                    <a:p>
+                      <a:pPr algn="ctr" indent="0" marL="0">
+                        <a:buNone/>
+                      </a:pPr>
+                      <a:r>
+                        <a:rPr lang="en-US" sz="950" dirty="0">
+                          <a:solidFill>
+                            <a:srgbClr val="222222"/>
+                          </a:solidFill>
+                          <a:latin typeface="Calibri" pitchFamily="34" charset="0"/>
+                          <a:ea typeface="Calibri" pitchFamily="34" charset="-122"/>
+                          <a:cs typeface="Calibri" pitchFamily="34" charset="-120"/>
+                        </a:rPr>
+                        <a:t>0.85 / 0.16</a:t>
+                      </a:r>
+                      <a:endParaRPr lang="en-US" sz="950" dirty="0">
+                        <a:latin typeface="Calibri" charset="0"/>
+                        <a:ea typeface="Calibri" charset="0"/>
+                        <a:cs typeface="Calibri" charset="0"/>
+                      </a:endParaRPr>
+                    </a:p>
+                  </a:txBody>
+                  <a:tcPr marL="91440" marR="91440" marT="45720" marB="45720">
+                    <a:lnL w="9525" cap="flat" cmpd="sng" algn="ctr">
+                      <a:solidFill>
+                        <a:srgbClr val="D0D7E0"/>
+                      </a:solidFill>
+                      <a:prstDash val="solid"/>
+                      <a:round/>
+                      <a:headEnd type="none" w="med" len="med"/>
+                      <a:tailEnd type="none" w="med" len="med"/>
+                    </a:lnL>
+                    <a:lnR w="9525" cap="flat" cmpd="sng" algn="ctr">
+                      <a:solidFill>
+                        <a:srgbClr val="D0D7E0"/>
+                      </a:solidFill>
+                      <a:prstDash val="solid"/>
+                      <a:round/>
+                      <a:headEnd type="none" w="med" len="med"/>
+                      <a:tailEnd type="none" w="med" len="med"/>
+                    </a:lnR>
+                    <a:lnT w="9525" cap="flat" cmpd="sng" algn="ctr">
+                      <a:solidFill>
+                        <a:srgbClr val="D0D7E0"/>
+                      </a:solidFill>
+                      <a:prstDash val="solid"/>
+                      <a:round/>
+                      <a:headEnd type="none" w="med" len="med"/>
+                      <a:tailEnd type="none" w="med" len="med"/>
+                    </a:lnT>
+                    <a:lnB w="9525" cap="flat" cmpd="sng" algn="ctr">
+                      <a:solidFill>
+                        <a:srgbClr val="D0D7E0"/>
+                      </a:solidFill>
+                      <a:prstDash val="solid"/>
+                      <a:round/>
+                      <a:headEnd type="none" w="med" len="med"/>
+                      <a:tailEnd type="none" w="med" len="med"/>
+                    </a:lnB>
+                  </a:tcPr>
+                </a:tc>
+                <a:tc>
+                  <a:txBody>
+                    <a:bodyPr/>
+                    <a:lstStyle/>
+                    <a:p>
+                      <a:pPr algn="ctr" indent="0" marL="0">
+                        <a:buNone/>
+                      </a:pPr>
+                      <a:r>
+                        <a:rPr lang="en-US" sz="950" dirty="0">
+                          <a:solidFill>
+                            <a:srgbClr val="222222"/>
+                          </a:solidFill>
+                          <a:latin typeface="Calibri" pitchFamily="34" charset="0"/>
+                          <a:ea typeface="Calibri" pitchFamily="34" charset="-122"/>
+                          <a:cs typeface="Calibri" pitchFamily="34" charset="-120"/>
+                        </a:rPr>
+                        <a:t>0.80 / −0.86</a:t>
+                      </a:r>
+                      <a:endParaRPr lang="en-US" sz="950" dirty="0">
+                        <a:latin typeface="Calibri" charset="0"/>
+                        <a:ea typeface="Calibri" charset="0"/>
+                        <a:cs typeface="Calibri" charset="0"/>
+                      </a:endParaRPr>
+                    </a:p>
+                  </a:txBody>
+                  <a:tcPr marL="91440" marR="91440" marT="45720" marB="45720">
+                    <a:lnL w="9525" cap="flat" cmpd="sng" algn="ctr">
+                      <a:solidFill>
+                        <a:srgbClr val="D0D7E0"/>
+                      </a:solidFill>
+                      <a:prstDash val="solid"/>
+                      <a:round/>
+                      <a:headEnd type="none" w="med" len="med"/>
+                      <a:tailEnd type="none" w="med" len="med"/>
+                    </a:lnL>
+                    <a:lnR w="9525" cap="flat" cmpd="sng" algn="ctr">
+                      <a:solidFill>
+                        <a:srgbClr val="D0D7E0"/>
+                      </a:solidFill>
+                      <a:prstDash val="solid"/>
+                      <a:round/>
+                      <a:headEnd type="none" w="med" len="med"/>
+                      <a:tailEnd type="none" w="med" len="med"/>
+                    </a:lnR>
+                    <a:lnT w="9525" cap="flat" cmpd="sng" algn="ctr">
+                      <a:solidFill>
+                        <a:srgbClr val="D0D7E0"/>
+                      </a:solidFill>
+                      <a:prstDash val="solid"/>
+                      <a:round/>
+                      <a:headEnd type="none" w="med" len="med"/>
+                      <a:tailEnd type="none" w="med" len="med"/>
+                    </a:lnT>
+                    <a:lnB w="9525" cap="flat" cmpd="sng" algn="ctr">
+                      <a:solidFill>
+                        <a:srgbClr val="D0D7E0"/>
+                      </a:solidFill>
+                      <a:prstDash val="solid"/>
+                      <a:round/>
+                      <a:headEnd type="none" w="med" len="med"/>
+                      <a:tailEnd type="none" w="med" len="med"/>
+                    </a:lnB>
+                  </a:tcPr>
+                </a:tc>
+              </a:tr>
+              <a:tr h="237744">
+                <a:tc>
+                  <a:txBody>
+                    <a:bodyPr/>
+                    <a:lstStyle/>
+                    <a:p>
+                      <a:pPr algn="l" indent="0" marL="0">
+                        <a:buNone/>
+                      </a:pPr>
+                      <a:r>
+                        <a:rPr lang="en-US" sz="950" dirty="0">
+                          <a:solidFill>
+                            <a:srgbClr val="222222"/>
+                          </a:solidFill>
+                          <a:latin typeface="Calibri" pitchFamily="34" charset="0"/>
+                          <a:ea typeface="Calibri" pitchFamily="34" charset="-122"/>
+                          <a:cs typeface="Calibri" pitchFamily="34" charset="-120"/>
+                        </a:rPr>
+                        <a:t>+ block identity (random only)</a:t>
+                      </a:r>
+                      <a:endParaRPr lang="en-US" sz="950" dirty="0">
+                        <a:latin typeface="Calibri" charset="0"/>
+                        <a:ea typeface="Calibri" charset="0"/>
+                        <a:cs typeface="Calibri" charset="0"/>
+                      </a:endParaRPr>
+                    </a:p>
+                  </a:txBody>
+                  <a:tcPr marL="91440" marR="91440" marT="45720" marB="45720">
+                    <a:lnL w="9525" cap="flat" cmpd="sng" algn="ctr">
+                      <a:solidFill>
+                        <a:srgbClr val="D0D7E0"/>
+                      </a:solidFill>
+                      <a:prstDash val="solid"/>
+                      <a:round/>
+                      <a:headEnd type="none" w="med" len="med"/>
+                      <a:tailEnd type="none" w="med" len="med"/>
+                    </a:lnL>
+                    <a:lnR w="9525" cap="flat" cmpd="sng" algn="ctr">
+                      <a:solidFill>
+                        <a:srgbClr val="D0D7E0"/>
+                      </a:solidFill>
+                      <a:prstDash val="solid"/>
+                      <a:round/>
+                      <a:headEnd type="none" w="med" len="med"/>
+                      <a:tailEnd type="none" w="med" len="med"/>
+                    </a:lnR>
+                    <a:lnT w="9525" cap="flat" cmpd="sng" algn="ctr">
+                      <a:solidFill>
+                        <a:srgbClr val="D0D7E0"/>
+                      </a:solidFill>
+                      <a:prstDash val="solid"/>
+                      <a:round/>
+                      <a:headEnd type="none" w="med" len="med"/>
+                      <a:tailEnd type="none" w="med" len="med"/>
+                    </a:lnT>
+                    <a:lnB w="9525" cap="flat" cmpd="sng" algn="ctr">
+                      <a:solidFill>
+                        <a:srgbClr val="D0D7E0"/>
+                      </a:solidFill>
+                      <a:prstDash val="solid"/>
+                      <a:round/>
+                      <a:headEnd type="none" w="med" len="med"/>
+                      <a:tailEnd type="none" w="med" len="med"/>
+                    </a:lnB>
+                  </a:tcPr>
+                </a:tc>
+                <a:tc>
+                  <a:txBody>
+                    <a:bodyPr/>
+                    <a:lstStyle/>
+                    <a:p>
+                      <a:pPr algn="ctr" indent="0" marL="0">
+                        <a:buNone/>
+                      </a:pPr>
+                      <a:r>
+                        <a:rPr lang="en-US" sz="950" b="1" dirty="0">
+                          <a:solidFill>
+                            <a:srgbClr val="222222"/>
+                          </a:solidFill>
+                          <a:latin typeface="Calibri" pitchFamily="34" charset="0"/>
+                          <a:ea typeface="Calibri" pitchFamily="34" charset="-122"/>
+                          <a:cs typeface="Calibri" pitchFamily="34" charset="-120"/>
+                        </a:rPr>
+                        <a:t>0.70</a:t>
+                      </a:r>
+                      <a:endParaRPr lang="en-US" sz="950" dirty="0">
+                        <a:latin typeface="Calibri" charset="0"/>
+                        <a:ea typeface="Calibri" charset="0"/>
+                        <a:cs typeface="Calibri" charset="0"/>
+                      </a:endParaRPr>
+                    </a:p>
+                  </a:txBody>
+                  <a:tcPr marL="91440" marR="91440" marT="45720" marB="45720">
+                    <a:lnL w="9525" cap="flat" cmpd="sng" algn="ctr">
+                      <a:solidFill>
+                        <a:srgbClr val="D0D7E0"/>
+                      </a:solidFill>
+                      <a:prstDash val="solid"/>
+                      <a:round/>
+                      <a:headEnd type="none" w="med" len="med"/>
+                      <a:tailEnd type="none" w="med" len="med"/>
+                    </a:lnL>
+                    <a:lnR w="9525" cap="flat" cmpd="sng" algn="ctr">
+                      <a:solidFill>
+                        <a:srgbClr val="D0D7E0"/>
+                      </a:solidFill>
+                      <a:prstDash val="solid"/>
+                      <a:round/>
+                      <a:headEnd type="none" w="med" len="med"/>
+                      <a:tailEnd type="none" w="med" len="med"/>
+                    </a:lnR>
+                    <a:lnT w="9525" cap="flat" cmpd="sng" algn="ctr">
+                      <a:solidFill>
+                        <a:srgbClr val="D0D7E0"/>
+                      </a:solidFill>
+                      <a:prstDash val="solid"/>
+                      <a:round/>
+                      <a:headEnd type="none" w="med" len="med"/>
+                      <a:tailEnd type="none" w="med" len="med"/>
+                    </a:lnT>
+                    <a:lnB w="9525" cap="flat" cmpd="sng" algn="ctr">
+                      <a:solidFill>
+                        <a:srgbClr val="D0D7E0"/>
+                      </a:solidFill>
+                      <a:prstDash val="solid"/>
+                      <a:round/>
+                      <a:headEnd type="none" w="med" len="med"/>
+                      <a:tailEnd type="none" w="med" len="med"/>
+                    </a:lnB>
+                  </a:tcPr>
+                </a:tc>
+                <a:tc>
+                  <a:txBody>
+                    <a:bodyPr/>
+                    <a:lstStyle/>
+                    <a:p>
+                      <a:pPr algn="ctr" indent="0" marL="0">
+                        <a:buNone/>
+                      </a:pPr>
+                      <a:r>
+                        <a:rPr lang="en-US" sz="950" dirty="0">
+                          <a:solidFill>
+                            <a:srgbClr val="222222"/>
+                          </a:solidFill>
+                          <a:latin typeface="Calibri" pitchFamily="34" charset="0"/>
+                          <a:ea typeface="Calibri" pitchFamily="34" charset="-122"/>
+                          <a:cs typeface="Calibri" pitchFamily="34" charset="-120"/>
+                        </a:rPr>
+                        <a:t>0.81</a:t>
+                      </a:r>
+                      <a:endParaRPr lang="en-US" sz="950" dirty="0">
+                        <a:latin typeface="Calibri" charset="0"/>
+                        <a:ea typeface="Calibri" charset="0"/>
+                        <a:cs typeface="Calibri" charset="0"/>
+                      </a:endParaRPr>
+                    </a:p>
+                  </a:txBody>
+                  <a:tcPr marL="91440" marR="91440" marT="45720" marB="45720">
+                    <a:lnL w="9525" cap="flat" cmpd="sng" algn="ctr">
+                      <a:solidFill>
+                        <a:srgbClr val="D0D7E0"/>
+                      </a:solidFill>
+                      <a:prstDash val="solid"/>
+                      <a:round/>
+                      <a:headEnd type="none" w="med" len="med"/>
+                      <a:tailEnd type="none" w="med" len="med"/>
+                    </a:lnL>
+                    <a:lnR w="9525" cap="flat" cmpd="sng" algn="ctr">
+                      <a:solidFill>
+                        <a:srgbClr val="D0D7E0"/>
+                      </a:solidFill>
+                      <a:prstDash val="solid"/>
+                      <a:round/>
+                      <a:headEnd type="none" w="med" len="med"/>
+                      <a:tailEnd type="none" w="med" len="med"/>
+                    </a:lnR>
+                    <a:lnT w="9525" cap="flat" cmpd="sng" algn="ctr">
+                      <a:solidFill>
+                        <a:srgbClr val="D0D7E0"/>
+                      </a:solidFill>
+                      <a:prstDash val="solid"/>
+                      <a:round/>
+                      <a:headEnd type="none" w="med" len="med"/>
+                      <a:tailEnd type="none" w="med" len="med"/>
+                    </a:lnT>
+                    <a:lnB w="9525" cap="flat" cmpd="sng" algn="ctr">
+                      <a:solidFill>
+                        <a:srgbClr val="D0D7E0"/>
+                      </a:solidFill>
+                      <a:prstDash val="solid"/>
+                      <a:round/>
+                      <a:headEnd type="none" w="med" len="med"/>
+                      <a:tailEnd type="none" w="med" len="med"/>
+                    </a:lnB>
+                  </a:tcPr>
+                </a:tc>
+                <a:tc>
+                  <a:txBody>
+                    <a:bodyPr/>
+                    <a:lstStyle/>
+                    <a:p>
+                      <a:pPr algn="ctr" indent="0" marL="0">
+                        <a:buNone/>
+                      </a:pPr>
+                      <a:r>
+                        <a:rPr lang="en-US" sz="950" dirty="0">
+                          <a:solidFill>
+                            <a:srgbClr val="222222"/>
+                          </a:solidFill>
+                          <a:latin typeface="Calibri" pitchFamily="34" charset="0"/>
+                          <a:ea typeface="Calibri" pitchFamily="34" charset="-122"/>
+                          <a:cs typeface="Calibri" pitchFamily="34" charset="-120"/>
+                        </a:rPr>
+                        <a:t>0.84</a:t>
+                      </a:r>
+                      <a:endParaRPr lang="en-US" sz="950" dirty="0">
+                        <a:latin typeface="Calibri" charset="0"/>
+                        <a:ea typeface="Calibri" charset="0"/>
+                        <a:cs typeface="Calibri" charset="0"/>
+                      </a:endParaRPr>
+                    </a:p>
+                  </a:txBody>
+                  <a:tcPr marL="91440" marR="91440" marT="45720" marB="45720">
+                    <a:lnL w="9525" cap="flat" cmpd="sng" algn="ctr">
+                      <a:solidFill>
+                        <a:srgbClr val="D0D7E0"/>
+                      </a:solidFill>
+                      <a:prstDash val="solid"/>
+                      <a:round/>
+                      <a:headEnd type="none" w="med" len="med"/>
+                      <a:tailEnd type="none" w="med" len="med"/>
+                    </a:lnL>
+                    <a:lnR w="9525" cap="flat" cmpd="sng" algn="ctr">
+                      <a:solidFill>
+                        <a:srgbClr val="D0D7E0"/>
+                      </a:solidFill>
+                      <a:prstDash val="solid"/>
+                      <a:round/>
+                      <a:headEnd type="none" w="med" len="med"/>
+                      <a:tailEnd type="none" w="med" len="med"/>
+                    </a:lnR>
+                    <a:lnT w="9525" cap="flat" cmpd="sng" algn="ctr">
+                      <a:solidFill>
+                        <a:srgbClr val="D0D7E0"/>
+                      </a:solidFill>
+                      <a:prstDash val="solid"/>
+                      <a:round/>
+                      <a:headEnd type="none" w="med" len="med"/>
+                      <a:tailEnd type="none" w="med" len="med"/>
+                    </a:lnT>
+                    <a:lnB w="9525" cap="flat" cmpd="sng" algn="ctr">
+                      <a:solidFill>
+                        <a:srgbClr val="D0D7E0"/>
+                      </a:solidFill>
+                      <a:prstDash val="solid"/>
+                      <a:round/>
+                      <a:headEnd type="none" w="med" len="med"/>
+                      <a:tailEnd type="none" w="med" len="med"/>
+                    </a:lnB>
+                  </a:tcPr>
+                </a:tc>
+                <a:tc>
+                  <a:txBody>
+                    <a:bodyPr/>
+                    <a:lstStyle/>
+                    <a:p>
+                      <a:pPr algn="ctr" indent="0" marL="0">
+                        <a:buNone/>
+                      </a:pPr>
+                      <a:r>
+                        <a:rPr lang="en-US" sz="950" dirty="0">
                           <a:solidFill>
                             <a:srgbClr val="222222"/>
                           </a:solidFill>
@@ -7570,14 +8089,14 @@
                         </a:rPr>
                         <a:t>0.80</a:t>
                       </a:r>
-                      <a:endParaRPr lang="en-US" sz="1050" dirty="0">
+                      <a:endParaRPr lang="en-US" sz="950" dirty="0">
                         <a:latin typeface="Calibri" charset="0"/>
                         <a:ea typeface="Calibri" charset="0"/>
                         <a:cs typeface="Calibri" charset="0"/>
                       </a:endParaRPr>
                     </a:p>
                   </a:txBody>
-                  <a:tcPr>
+                  <a:tcPr marL="91440" marR="91440" marT="45720" marB="45720">
                     <a:lnL w="9525" cap="flat" cmpd="sng" algn="ctr">
                       <a:solidFill>
                         <a:srgbClr val="D0D7E0"/>
@@ -7616,817 +8135,18 @@
                     </a:lnB>
                   </a:tcPr>
                 </a:tc>
+              </a:tr>
+              <a:tr h="237744">
                 <a:tc>
                   <a:txBody>
                     <a:bodyPr/>
                     <a:lstStyle/>
                     <a:p>
-                      <a:pPr marL="0" indent="0" algn="ctr">
+                      <a:pPr algn="l" indent="0" marL="0">
                         <a:buNone/>
                       </a:pPr>
                       <a:r>
-                        <a:rPr lang="en-US" sz="1050" dirty="0">
-                          <a:solidFill>
-                            <a:srgbClr val="222222"/>
-                          </a:solidFill>
-                          <a:latin typeface="Calibri" pitchFamily="34" charset="0"/>
-                          <a:ea typeface="Calibri" pitchFamily="34" charset="-122"/>
-                          <a:cs typeface="Calibri" pitchFamily="34" charset="-120"/>
-                        </a:rPr>
-                        <a:t>0.85</a:t>
-                      </a:r>
-                      <a:endParaRPr lang="en-US" sz="1050" dirty="0">
-                        <a:latin typeface="Calibri" charset="0"/>
-                        <a:ea typeface="Calibri" charset="0"/>
-                        <a:cs typeface="Calibri" charset="0"/>
-                      </a:endParaRPr>
-                    </a:p>
-                  </a:txBody>
-                  <a:tcPr>
-                    <a:lnL w="9525" cap="flat" cmpd="sng" algn="ctr">
-                      <a:solidFill>
-                        <a:srgbClr val="D0D7E0"/>
-                      </a:solidFill>
-                      <a:prstDash val="solid"/>
-                      <a:round/>
-                      <a:headEnd type="none" w="med" len="med"/>
-                      <a:tailEnd type="none" w="med" len="med"/>
-                    </a:lnL>
-                    <a:lnR w="9525" cap="flat" cmpd="sng" algn="ctr">
-                      <a:solidFill>
-                        <a:srgbClr val="D0D7E0"/>
-                      </a:solidFill>
-                      <a:prstDash val="solid"/>
-                      <a:round/>
-                      <a:headEnd type="none" w="med" len="med"/>
-                      <a:tailEnd type="none" w="med" len="med"/>
-                    </a:lnR>
-                    <a:lnT w="9525" cap="flat" cmpd="sng" algn="ctr">
-                      <a:solidFill>
-                        <a:srgbClr val="D0D7E0"/>
-                      </a:solidFill>
-                      <a:prstDash val="solid"/>
-                      <a:round/>
-                      <a:headEnd type="none" w="med" len="med"/>
-                      <a:tailEnd type="none" w="med" len="med"/>
-                    </a:lnT>
-                    <a:lnB w="9525" cap="flat" cmpd="sng" algn="ctr">
-                      <a:solidFill>
-                        <a:srgbClr val="D0D7E0"/>
-                      </a:solidFill>
-                      <a:prstDash val="solid"/>
-                      <a:round/>
-                      <a:headEnd type="none" w="med" len="med"/>
-                      <a:tailEnd type="none" w="med" len="med"/>
-                    </a:lnB>
-                  </a:tcPr>
-                </a:tc>
-                <a:tc>
-                  <a:txBody>
-                    <a:bodyPr/>
-                    <a:lstStyle/>
-                    <a:p>
-                      <a:pPr marL="0" indent="0" algn="ctr">
-                        <a:buNone/>
-                      </a:pPr>
-                      <a:r>
-                        <a:rPr lang="en-US" sz="1050" dirty="0">
-                          <a:solidFill>
-                            <a:srgbClr val="222222"/>
-                          </a:solidFill>
-                          <a:latin typeface="Calibri" pitchFamily="34" charset="0"/>
-                          <a:ea typeface="Calibri" pitchFamily="34" charset="-122"/>
-                          <a:cs typeface="Calibri" pitchFamily="34" charset="-120"/>
-                        </a:rPr>
-                        <a:t>0.80</a:t>
-                      </a:r>
-                      <a:endParaRPr lang="en-US" sz="1050" dirty="0">
-                        <a:latin typeface="Calibri" charset="0"/>
-                        <a:ea typeface="Calibri" charset="0"/>
-                        <a:cs typeface="Calibri" charset="0"/>
-                      </a:endParaRPr>
-                    </a:p>
-                  </a:txBody>
-                  <a:tcPr>
-                    <a:lnL w="9525" cap="flat" cmpd="sng" algn="ctr">
-                      <a:solidFill>
-                        <a:srgbClr val="D0D7E0"/>
-                      </a:solidFill>
-                      <a:prstDash val="solid"/>
-                      <a:round/>
-                      <a:headEnd type="none" w="med" len="med"/>
-                      <a:tailEnd type="none" w="med" len="med"/>
-                    </a:lnL>
-                    <a:lnR w="9525" cap="flat" cmpd="sng" algn="ctr">
-                      <a:solidFill>
-                        <a:srgbClr val="D0D7E0"/>
-                      </a:solidFill>
-                      <a:prstDash val="solid"/>
-                      <a:round/>
-                      <a:headEnd type="none" w="med" len="med"/>
-                      <a:tailEnd type="none" w="med" len="med"/>
-                    </a:lnR>
-                    <a:lnT w="9525" cap="flat" cmpd="sng" algn="ctr">
-                      <a:solidFill>
-                        <a:srgbClr val="D0D7E0"/>
-                      </a:solidFill>
-                      <a:prstDash val="solid"/>
-                      <a:round/>
-                      <a:headEnd type="none" w="med" len="med"/>
-                      <a:tailEnd type="none" w="med" len="med"/>
-                    </a:lnT>
-                    <a:lnB w="9525" cap="flat" cmpd="sng" algn="ctr">
-                      <a:solidFill>
-                        <a:srgbClr val="D0D7E0"/>
-                      </a:solidFill>
-                      <a:prstDash val="solid"/>
-                      <a:round/>
-                      <a:headEnd type="none" w="med" len="med"/>
-                      <a:tailEnd type="none" w="med" len="med"/>
-                    </a:lnB>
-                  </a:tcPr>
-                </a:tc>
-                <a:extLst>
-                  <a:ext uri="{0D108BD9-81ED-4DB2-BD59-A6C34878D82A}">
-                    <a16:rowId xmlns:a16="http://schemas.microsoft.com/office/drawing/2014/main" val="10001"/>
-                  </a:ext>
-                </a:extLst>
-              </a:tr>
-              <a:tr h="246888">
-                <a:tc>
-                  <a:txBody>
-                    <a:bodyPr/>
-                    <a:lstStyle/>
-                    <a:p>
-                      <a:pPr marL="0" indent="0" algn="l">
-                        <a:buNone/>
-                      </a:pPr>
-                      <a:r>
-                        <a:rPr lang="en-US" sz="1050" dirty="0">
-                          <a:solidFill>
-                            <a:srgbClr val="222222"/>
-                          </a:solidFill>
-                          <a:latin typeface="Calibri" pitchFamily="34" charset="0"/>
-                          <a:ea typeface="Calibri" pitchFamily="34" charset="-122"/>
-                          <a:cs typeface="Calibri" pitchFamily="34" charset="-120"/>
-                        </a:rPr>
-                        <a:t>Mix variables, whole blocks held out</a:t>
-                      </a:r>
-                      <a:endParaRPr lang="en-US" sz="1050" dirty="0">
-                        <a:latin typeface="Calibri" charset="0"/>
-                        <a:ea typeface="Calibri" charset="0"/>
-                        <a:cs typeface="Calibri" charset="0"/>
-                      </a:endParaRPr>
-                    </a:p>
-                  </a:txBody>
-                  <a:tcPr>
-                    <a:lnL w="9525" cap="flat" cmpd="sng" algn="ctr">
-                      <a:solidFill>
-                        <a:srgbClr val="D0D7E0"/>
-                      </a:solidFill>
-                      <a:prstDash val="solid"/>
-                      <a:round/>
-                      <a:headEnd type="none" w="med" len="med"/>
-                      <a:tailEnd type="none" w="med" len="med"/>
-                    </a:lnL>
-                    <a:lnR w="9525" cap="flat" cmpd="sng" algn="ctr">
-                      <a:solidFill>
-                        <a:srgbClr val="D0D7E0"/>
-                      </a:solidFill>
-                      <a:prstDash val="solid"/>
-                      <a:round/>
-                      <a:headEnd type="none" w="med" len="med"/>
-                      <a:tailEnd type="none" w="med" len="med"/>
-                    </a:lnR>
-                    <a:lnT w="9525" cap="flat" cmpd="sng" algn="ctr">
-                      <a:solidFill>
-                        <a:srgbClr val="D0D7E0"/>
-                      </a:solidFill>
-                      <a:prstDash val="solid"/>
-                      <a:round/>
-                      <a:headEnd type="none" w="med" len="med"/>
-                      <a:tailEnd type="none" w="med" len="med"/>
-                    </a:lnT>
-                    <a:lnB w="9525" cap="flat" cmpd="sng" algn="ctr">
-                      <a:solidFill>
-                        <a:srgbClr val="D0D7E0"/>
-                      </a:solidFill>
-                      <a:prstDash val="solid"/>
-                      <a:round/>
-                      <a:headEnd type="none" w="med" len="med"/>
-                      <a:tailEnd type="none" w="med" len="med"/>
-                    </a:lnB>
-                  </a:tcPr>
-                </a:tc>
-                <a:tc>
-                  <a:txBody>
-                    <a:bodyPr/>
-                    <a:lstStyle/>
-                    <a:p>
-                      <a:pPr marL="0" indent="0" algn="ctr">
-                        <a:buNone/>
-                      </a:pPr>
-                      <a:r>
-                        <a:rPr lang="en-US" sz="1050" dirty="0">
-                          <a:solidFill>
-                            <a:srgbClr val="222222"/>
-                          </a:solidFill>
-                          <a:latin typeface="Calibri" pitchFamily="34" charset="0"/>
-                          <a:ea typeface="Calibri" pitchFamily="34" charset="-122"/>
-                          <a:cs typeface="Calibri" pitchFamily="34" charset="-120"/>
-                        </a:rPr>
-                        <a:t>0.05</a:t>
-                      </a:r>
-                      <a:endParaRPr lang="en-US" sz="1050" dirty="0">
-                        <a:latin typeface="Calibri" charset="0"/>
-                        <a:ea typeface="Calibri" charset="0"/>
-                        <a:cs typeface="Calibri" charset="0"/>
-                      </a:endParaRPr>
-                    </a:p>
-                  </a:txBody>
-                  <a:tcPr>
-                    <a:lnL w="9525" cap="flat" cmpd="sng" algn="ctr">
-                      <a:solidFill>
-                        <a:srgbClr val="D0D7E0"/>
-                      </a:solidFill>
-                      <a:prstDash val="solid"/>
-                      <a:round/>
-                      <a:headEnd type="none" w="med" len="med"/>
-                      <a:tailEnd type="none" w="med" len="med"/>
-                    </a:lnL>
-                    <a:lnR w="9525" cap="flat" cmpd="sng" algn="ctr">
-                      <a:solidFill>
-                        <a:srgbClr val="D0D7E0"/>
-                      </a:solidFill>
-                      <a:prstDash val="solid"/>
-                      <a:round/>
-                      <a:headEnd type="none" w="med" len="med"/>
-                      <a:tailEnd type="none" w="med" len="med"/>
-                    </a:lnR>
-                    <a:lnT w="9525" cap="flat" cmpd="sng" algn="ctr">
-                      <a:solidFill>
-                        <a:srgbClr val="D0D7E0"/>
-                      </a:solidFill>
-                      <a:prstDash val="solid"/>
-                      <a:round/>
-                      <a:headEnd type="none" w="med" len="med"/>
-                      <a:tailEnd type="none" w="med" len="med"/>
-                    </a:lnT>
-                    <a:lnB w="9525" cap="flat" cmpd="sng" algn="ctr">
-                      <a:solidFill>
-                        <a:srgbClr val="D0D7E0"/>
-                      </a:solidFill>
-                      <a:prstDash val="solid"/>
-                      <a:round/>
-                      <a:headEnd type="none" w="med" len="med"/>
-                      <a:tailEnd type="none" w="med" len="med"/>
-                    </a:lnB>
-                  </a:tcPr>
-                </a:tc>
-                <a:tc>
-                  <a:txBody>
-                    <a:bodyPr/>
-                    <a:lstStyle/>
-                    <a:p>
-                      <a:pPr marL="0" indent="0" algn="ctr">
-                        <a:buNone/>
-                      </a:pPr>
-                      <a:r>
-                        <a:rPr lang="en-US" sz="1050" dirty="0">
-                          <a:solidFill>
-                            <a:srgbClr val="222222"/>
-                          </a:solidFill>
-                          <a:latin typeface="Calibri" pitchFamily="34" charset="0"/>
-                          <a:ea typeface="Calibri" pitchFamily="34" charset="-122"/>
-                          <a:cs typeface="Calibri" pitchFamily="34" charset="-120"/>
-                        </a:rPr>
-                        <a:t>0.05</a:t>
-                      </a:r>
-                      <a:endParaRPr lang="en-US" sz="1050" dirty="0">
-                        <a:latin typeface="Calibri" charset="0"/>
-                        <a:ea typeface="Calibri" charset="0"/>
-                        <a:cs typeface="Calibri" charset="0"/>
-                      </a:endParaRPr>
-                    </a:p>
-                  </a:txBody>
-                  <a:tcPr>
-                    <a:lnL w="9525" cap="flat" cmpd="sng" algn="ctr">
-                      <a:solidFill>
-                        <a:srgbClr val="D0D7E0"/>
-                      </a:solidFill>
-                      <a:prstDash val="solid"/>
-                      <a:round/>
-                      <a:headEnd type="none" w="med" len="med"/>
-                      <a:tailEnd type="none" w="med" len="med"/>
-                    </a:lnL>
-                    <a:lnR w="9525" cap="flat" cmpd="sng" algn="ctr">
-                      <a:solidFill>
-                        <a:srgbClr val="D0D7E0"/>
-                      </a:solidFill>
-                      <a:prstDash val="solid"/>
-                      <a:round/>
-                      <a:headEnd type="none" w="med" len="med"/>
-                      <a:tailEnd type="none" w="med" len="med"/>
-                    </a:lnR>
-                    <a:lnT w="9525" cap="flat" cmpd="sng" algn="ctr">
-                      <a:solidFill>
-                        <a:srgbClr val="D0D7E0"/>
-                      </a:solidFill>
-                      <a:prstDash val="solid"/>
-                      <a:round/>
-                      <a:headEnd type="none" w="med" len="med"/>
-                      <a:tailEnd type="none" w="med" len="med"/>
-                    </a:lnT>
-                    <a:lnB w="9525" cap="flat" cmpd="sng" algn="ctr">
-                      <a:solidFill>
-                        <a:srgbClr val="D0D7E0"/>
-                      </a:solidFill>
-                      <a:prstDash val="solid"/>
-                      <a:round/>
-                      <a:headEnd type="none" w="med" len="med"/>
-                      <a:tailEnd type="none" w="med" len="med"/>
-                    </a:lnB>
-                  </a:tcPr>
-                </a:tc>
-                <a:tc>
-                  <a:txBody>
-                    <a:bodyPr/>
-                    <a:lstStyle/>
-                    <a:p>
-                      <a:pPr marL="0" indent="0" algn="ctr">
-                        <a:buNone/>
-                      </a:pPr>
-                      <a:r>
-                        <a:rPr lang="en-US" sz="1050" dirty="0">
-                          <a:solidFill>
-                            <a:srgbClr val="222222"/>
-                          </a:solidFill>
-                          <a:latin typeface="Calibri" pitchFamily="34" charset="0"/>
-                          <a:ea typeface="Calibri" pitchFamily="34" charset="-122"/>
-                          <a:cs typeface="Calibri" pitchFamily="34" charset="-120"/>
-                        </a:rPr>
-                        <a:t>0.16</a:t>
-                      </a:r>
-                      <a:endParaRPr lang="en-US" sz="1050" dirty="0">
-                        <a:latin typeface="Calibri" charset="0"/>
-                        <a:ea typeface="Calibri" charset="0"/>
-                        <a:cs typeface="Calibri" charset="0"/>
-                      </a:endParaRPr>
-                    </a:p>
-                  </a:txBody>
-                  <a:tcPr>
-                    <a:lnL w="9525" cap="flat" cmpd="sng" algn="ctr">
-                      <a:solidFill>
-                        <a:srgbClr val="D0D7E0"/>
-                      </a:solidFill>
-                      <a:prstDash val="solid"/>
-                      <a:round/>
-                      <a:headEnd type="none" w="med" len="med"/>
-                      <a:tailEnd type="none" w="med" len="med"/>
-                    </a:lnL>
-                    <a:lnR w="9525" cap="flat" cmpd="sng" algn="ctr">
-                      <a:solidFill>
-                        <a:srgbClr val="D0D7E0"/>
-                      </a:solidFill>
-                      <a:prstDash val="solid"/>
-                      <a:round/>
-                      <a:headEnd type="none" w="med" len="med"/>
-                      <a:tailEnd type="none" w="med" len="med"/>
-                    </a:lnR>
-                    <a:lnT w="9525" cap="flat" cmpd="sng" algn="ctr">
-                      <a:solidFill>
-                        <a:srgbClr val="D0D7E0"/>
-                      </a:solidFill>
-                      <a:prstDash val="solid"/>
-                      <a:round/>
-                      <a:headEnd type="none" w="med" len="med"/>
-                      <a:tailEnd type="none" w="med" len="med"/>
-                    </a:lnT>
-                    <a:lnB w="9525" cap="flat" cmpd="sng" algn="ctr">
-                      <a:solidFill>
-                        <a:srgbClr val="D0D7E0"/>
-                      </a:solidFill>
-                      <a:prstDash val="solid"/>
-                      <a:round/>
-                      <a:headEnd type="none" w="med" len="med"/>
-                      <a:tailEnd type="none" w="med" len="med"/>
-                    </a:lnB>
-                  </a:tcPr>
-                </a:tc>
-                <a:tc>
-                  <a:txBody>
-                    <a:bodyPr/>
-                    <a:lstStyle/>
-                    <a:p>
-                      <a:pPr marL="0" indent="0" algn="ctr">
-                        <a:buNone/>
-                      </a:pPr>
-                      <a:r>
-                        <a:rPr lang="en-US" sz="1050" dirty="0">
-                          <a:solidFill>
-                            <a:srgbClr val="222222"/>
-                          </a:solidFill>
-                          <a:latin typeface="Calibri" pitchFamily="34" charset="0"/>
-                          <a:ea typeface="Calibri" pitchFamily="34" charset="-122"/>
-                          <a:cs typeface="Calibri" pitchFamily="34" charset="-120"/>
-                        </a:rPr>
-                        <a:t>−0.86</a:t>
-                      </a:r>
-                      <a:endParaRPr lang="en-US" sz="1050" dirty="0">
-                        <a:latin typeface="Calibri" charset="0"/>
-                        <a:ea typeface="Calibri" charset="0"/>
-                        <a:cs typeface="Calibri" charset="0"/>
-                      </a:endParaRPr>
-                    </a:p>
-                  </a:txBody>
-                  <a:tcPr>
-                    <a:lnL w="9525" cap="flat" cmpd="sng" algn="ctr">
-                      <a:solidFill>
-                        <a:srgbClr val="D0D7E0"/>
-                      </a:solidFill>
-                      <a:prstDash val="solid"/>
-                      <a:round/>
-                      <a:headEnd type="none" w="med" len="med"/>
-                      <a:tailEnd type="none" w="med" len="med"/>
-                    </a:lnL>
-                    <a:lnR w="9525" cap="flat" cmpd="sng" algn="ctr">
-                      <a:solidFill>
-                        <a:srgbClr val="D0D7E0"/>
-                      </a:solidFill>
-                      <a:prstDash val="solid"/>
-                      <a:round/>
-                      <a:headEnd type="none" w="med" len="med"/>
-                      <a:tailEnd type="none" w="med" len="med"/>
-                    </a:lnR>
-                    <a:lnT w="9525" cap="flat" cmpd="sng" algn="ctr">
-                      <a:solidFill>
-                        <a:srgbClr val="D0D7E0"/>
-                      </a:solidFill>
-                      <a:prstDash val="solid"/>
-                      <a:round/>
-                      <a:headEnd type="none" w="med" len="med"/>
-                      <a:tailEnd type="none" w="med" len="med"/>
-                    </a:lnT>
-                    <a:lnB w="9525" cap="flat" cmpd="sng" algn="ctr">
-                      <a:solidFill>
-                        <a:srgbClr val="D0D7E0"/>
-                      </a:solidFill>
-                      <a:prstDash val="solid"/>
-                      <a:round/>
-                      <a:headEnd type="none" w="med" len="med"/>
-                      <a:tailEnd type="none" w="med" len="med"/>
-                    </a:lnB>
-                  </a:tcPr>
-                </a:tc>
-                <a:extLst>
-                  <a:ext uri="{0D108BD9-81ED-4DB2-BD59-A6C34878D82A}">
-                    <a16:rowId xmlns:a16="http://schemas.microsoft.com/office/drawing/2014/main" val="10002"/>
-                  </a:ext>
-                </a:extLst>
-              </a:tr>
-              <a:tr h="246888">
-                <a:tc>
-                  <a:txBody>
-                    <a:bodyPr/>
-                    <a:lstStyle/>
-                    <a:p>
-                      <a:pPr marL="0" indent="0" algn="l">
-                        <a:buNone/>
-                      </a:pPr>
-                      <a:r>
-                        <a:rPr lang="en-US" sz="1050" dirty="0">
-                          <a:solidFill>
-                            <a:srgbClr val="222222"/>
-                          </a:solidFill>
-                          <a:latin typeface="Calibri" pitchFamily="34" charset="0"/>
-                          <a:ea typeface="Calibri" pitchFamily="34" charset="-122"/>
-                          <a:cs typeface="Calibri" pitchFamily="34" charset="-120"/>
-                        </a:rPr>
-                        <a:t>+ block identity, random split</a:t>
-                      </a:r>
-                      <a:endParaRPr lang="en-US" sz="1050" dirty="0">
-                        <a:latin typeface="Calibri" charset="0"/>
-                        <a:ea typeface="Calibri" charset="0"/>
-                        <a:cs typeface="Calibri" charset="0"/>
-                      </a:endParaRPr>
-                    </a:p>
-                  </a:txBody>
-                  <a:tcPr>
-                    <a:lnL w="9525" cap="flat" cmpd="sng" algn="ctr">
-                      <a:solidFill>
-                        <a:srgbClr val="D0D7E0"/>
-                      </a:solidFill>
-                      <a:prstDash val="solid"/>
-                      <a:round/>
-                      <a:headEnd type="none" w="med" len="med"/>
-                      <a:tailEnd type="none" w="med" len="med"/>
-                    </a:lnL>
-                    <a:lnR w="9525" cap="flat" cmpd="sng" algn="ctr">
-                      <a:solidFill>
-                        <a:srgbClr val="D0D7E0"/>
-                      </a:solidFill>
-                      <a:prstDash val="solid"/>
-                      <a:round/>
-                      <a:headEnd type="none" w="med" len="med"/>
-                      <a:tailEnd type="none" w="med" len="med"/>
-                    </a:lnR>
-                    <a:lnT w="9525" cap="flat" cmpd="sng" algn="ctr">
-                      <a:solidFill>
-                        <a:srgbClr val="D0D7E0"/>
-                      </a:solidFill>
-                      <a:prstDash val="solid"/>
-                      <a:round/>
-                      <a:headEnd type="none" w="med" len="med"/>
-                      <a:tailEnd type="none" w="med" len="med"/>
-                    </a:lnT>
-                    <a:lnB w="9525" cap="flat" cmpd="sng" algn="ctr">
-                      <a:solidFill>
-                        <a:srgbClr val="D0D7E0"/>
-                      </a:solidFill>
-                      <a:prstDash val="solid"/>
-                      <a:round/>
-                      <a:headEnd type="none" w="med" len="med"/>
-                      <a:tailEnd type="none" w="med" len="med"/>
-                    </a:lnB>
-                  </a:tcPr>
-                </a:tc>
-                <a:tc>
-                  <a:txBody>
-                    <a:bodyPr/>
-                    <a:lstStyle/>
-                    <a:p>
-                      <a:pPr marL="0" indent="0" algn="ctr">
-                        <a:buNone/>
-                      </a:pPr>
-                      <a:r>
-                        <a:rPr lang="en-US" sz="1050" b="1" dirty="0">
-                          <a:solidFill>
-                            <a:srgbClr val="222222"/>
-                          </a:solidFill>
-                          <a:latin typeface="Calibri" pitchFamily="34" charset="0"/>
-                          <a:ea typeface="Calibri" pitchFamily="34" charset="-122"/>
-                          <a:cs typeface="Calibri" pitchFamily="34" charset="-120"/>
-                        </a:rPr>
-                        <a:t>0.70</a:t>
-                      </a:r>
-                      <a:endParaRPr lang="en-US" sz="1050" dirty="0">
-                        <a:latin typeface="Calibri" charset="0"/>
-                        <a:ea typeface="Calibri" charset="0"/>
-                        <a:cs typeface="Calibri" charset="0"/>
-                      </a:endParaRPr>
-                    </a:p>
-                  </a:txBody>
-                  <a:tcPr>
-                    <a:lnL w="9525" cap="flat" cmpd="sng" algn="ctr">
-                      <a:solidFill>
-                        <a:srgbClr val="D0D7E0"/>
-                      </a:solidFill>
-                      <a:prstDash val="solid"/>
-                      <a:round/>
-                      <a:headEnd type="none" w="med" len="med"/>
-                      <a:tailEnd type="none" w="med" len="med"/>
-                    </a:lnL>
-                    <a:lnR w="9525" cap="flat" cmpd="sng" algn="ctr">
-                      <a:solidFill>
-                        <a:srgbClr val="D0D7E0"/>
-                      </a:solidFill>
-                      <a:prstDash val="solid"/>
-                      <a:round/>
-                      <a:headEnd type="none" w="med" len="med"/>
-                      <a:tailEnd type="none" w="med" len="med"/>
-                    </a:lnR>
-                    <a:lnT w="9525" cap="flat" cmpd="sng" algn="ctr">
-                      <a:solidFill>
-                        <a:srgbClr val="D0D7E0"/>
-                      </a:solidFill>
-                      <a:prstDash val="solid"/>
-                      <a:round/>
-                      <a:headEnd type="none" w="med" len="med"/>
-                      <a:tailEnd type="none" w="med" len="med"/>
-                    </a:lnT>
-                    <a:lnB w="9525" cap="flat" cmpd="sng" algn="ctr">
-                      <a:solidFill>
-                        <a:srgbClr val="D0D7E0"/>
-                      </a:solidFill>
-                      <a:prstDash val="solid"/>
-                      <a:round/>
-                      <a:headEnd type="none" w="med" len="med"/>
-                      <a:tailEnd type="none" w="med" len="med"/>
-                    </a:lnB>
-                  </a:tcPr>
-                </a:tc>
-                <a:tc>
-                  <a:txBody>
-                    <a:bodyPr/>
-                    <a:lstStyle/>
-                    <a:p>
-                      <a:pPr marL="0" indent="0" algn="ctr">
-                        <a:buNone/>
-                      </a:pPr>
-                      <a:r>
-                        <a:rPr lang="en-US" sz="1050" dirty="0">
-                          <a:solidFill>
-                            <a:srgbClr val="222222"/>
-                          </a:solidFill>
-                          <a:latin typeface="Calibri" pitchFamily="34" charset="0"/>
-                          <a:ea typeface="Calibri" pitchFamily="34" charset="-122"/>
-                          <a:cs typeface="Calibri" pitchFamily="34" charset="-120"/>
-                        </a:rPr>
-                        <a:t>0.81</a:t>
-                      </a:r>
-                      <a:endParaRPr lang="en-US" sz="1050" dirty="0">
-                        <a:latin typeface="Calibri" charset="0"/>
-                        <a:ea typeface="Calibri" charset="0"/>
-                        <a:cs typeface="Calibri" charset="0"/>
-                      </a:endParaRPr>
-                    </a:p>
-                  </a:txBody>
-                  <a:tcPr>
-                    <a:lnL w="9525" cap="flat" cmpd="sng" algn="ctr">
-                      <a:solidFill>
-                        <a:srgbClr val="D0D7E0"/>
-                      </a:solidFill>
-                      <a:prstDash val="solid"/>
-                      <a:round/>
-                      <a:headEnd type="none" w="med" len="med"/>
-                      <a:tailEnd type="none" w="med" len="med"/>
-                    </a:lnL>
-                    <a:lnR w="9525" cap="flat" cmpd="sng" algn="ctr">
-                      <a:solidFill>
-                        <a:srgbClr val="D0D7E0"/>
-                      </a:solidFill>
-                      <a:prstDash val="solid"/>
-                      <a:round/>
-                      <a:headEnd type="none" w="med" len="med"/>
-                      <a:tailEnd type="none" w="med" len="med"/>
-                    </a:lnR>
-                    <a:lnT w="9525" cap="flat" cmpd="sng" algn="ctr">
-                      <a:solidFill>
-                        <a:srgbClr val="D0D7E0"/>
-                      </a:solidFill>
-                      <a:prstDash val="solid"/>
-                      <a:round/>
-                      <a:headEnd type="none" w="med" len="med"/>
-                      <a:tailEnd type="none" w="med" len="med"/>
-                    </a:lnT>
-                    <a:lnB w="9525" cap="flat" cmpd="sng" algn="ctr">
-                      <a:solidFill>
-                        <a:srgbClr val="D0D7E0"/>
-                      </a:solidFill>
-                      <a:prstDash val="solid"/>
-                      <a:round/>
-                      <a:headEnd type="none" w="med" len="med"/>
-                      <a:tailEnd type="none" w="med" len="med"/>
-                    </a:lnB>
-                  </a:tcPr>
-                </a:tc>
-                <a:tc>
-                  <a:txBody>
-                    <a:bodyPr/>
-                    <a:lstStyle/>
-                    <a:p>
-                      <a:pPr marL="0" indent="0" algn="ctr">
-                        <a:buNone/>
-                      </a:pPr>
-                      <a:r>
-                        <a:rPr lang="en-US" sz="1050" dirty="0">
-                          <a:solidFill>
-                            <a:srgbClr val="222222"/>
-                          </a:solidFill>
-                          <a:latin typeface="Calibri" pitchFamily="34" charset="0"/>
-                          <a:ea typeface="Calibri" pitchFamily="34" charset="-122"/>
-                          <a:cs typeface="Calibri" pitchFamily="34" charset="-120"/>
-                        </a:rPr>
-                        <a:t>0.84</a:t>
-                      </a:r>
-                      <a:endParaRPr lang="en-US" sz="1050" dirty="0">
-                        <a:latin typeface="Calibri" charset="0"/>
-                        <a:ea typeface="Calibri" charset="0"/>
-                        <a:cs typeface="Calibri" charset="0"/>
-                      </a:endParaRPr>
-                    </a:p>
-                  </a:txBody>
-                  <a:tcPr>
-                    <a:lnL w="9525" cap="flat" cmpd="sng" algn="ctr">
-                      <a:solidFill>
-                        <a:srgbClr val="D0D7E0"/>
-                      </a:solidFill>
-                      <a:prstDash val="solid"/>
-                      <a:round/>
-                      <a:headEnd type="none" w="med" len="med"/>
-                      <a:tailEnd type="none" w="med" len="med"/>
-                    </a:lnL>
-                    <a:lnR w="9525" cap="flat" cmpd="sng" algn="ctr">
-                      <a:solidFill>
-                        <a:srgbClr val="D0D7E0"/>
-                      </a:solidFill>
-                      <a:prstDash val="solid"/>
-                      <a:round/>
-                      <a:headEnd type="none" w="med" len="med"/>
-                      <a:tailEnd type="none" w="med" len="med"/>
-                    </a:lnR>
-                    <a:lnT w="9525" cap="flat" cmpd="sng" algn="ctr">
-                      <a:solidFill>
-                        <a:srgbClr val="D0D7E0"/>
-                      </a:solidFill>
-                      <a:prstDash val="solid"/>
-                      <a:round/>
-                      <a:headEnd type="none" w="med" len="med"/>
-                      <a:tailEnd type="none" w="med" len="med"/>
-                    </a:lnT>
-                    <a:lnB w="9525" cap="flat" cmpd="sng" algn="ctr">
-                      <a:solidFill>
-                        <a:srgbClr val="D0D7E0"/>
-                      </a:solidFill>
-                      <a:prstDash val="solid"/>
-                      <a:round/>
-                      <a:headEnd type="none" w="med" len="med"/>
-                      <a:tailEnd type="none" w="med" len="med"/>
-                    </a:lnB>
-                  </a:tcPr>
-                </a:tc>
-                <a:tc>
-                  <a:txBody>
-                    <a:bodyPr/>
-                    <a:lstStyle/>
-                    <a:p>
-                      <a:pPr marL="0" indent="0" algn="ctr">
-                        <a:buNone/>
-                      </a:pPr>
-                      <a:r>
-                        <a:rPr lang="en-US" sz="1050" dirty="0">
-                          <a:solidFill>
-                            <a:srgbClr val="222222"/>
-                          </a:solidFill>
-                          <a:latin typeface="Calibri" pitchFamily="34" charset="0"/>
-                          <a:ea typeface="Calibri" pitchFamily="34" charset="-122"/>
-                          <a:cs typeface="Calibri" pitchFamily="34" charset="-120"/>
-                        </a:rPr>
-                        <a:t>0.80</a:t>
-                      </a:r>
-                      <a:endParaRPr lang="en-US" sz="1050" dirty="0">
-                        <a:latin typeface="Calibri" charset="0"/>
-                        <a:ea typeface="Calibri" charset="0"/>
-                        <a:cs typeface="Calibri" charset="0"/>
-                      </a:endParaRPr>
-                    </a:p>
-                  </a:txBody>
-                  <a:tcPr>
-                    <a:lnL w="9525" cap="flat" cmpd="sng" algn="ctr">
-                      <a:solidFill>
-                        <a:srgbClr val="D0D7E0"/>
-                      </a:solidFill>
-                      <a:prstDash val="solid"/>
-                      <a:round/>
-                      <a:headEnd type="none" w="med" len="med"/>
-                      <a:tailEnd type="none" w="med" len="med"/>
-                    </a:lnL>
-                    <a:lnR w="9525" cap="flat" cmpd="sng" algn="ctr">
-                      <a:solidFill>
-                        <a:srgbClr val="D0D7E0"/>
-                      </a:solidFill>
-                      <a:prstDash val="solid"/>
-                      <a:round/>
-                      <a:headEnd type="none" w="med" len="med"/>
-                      <a:tailEnd type="none" w="med" len="med"/>
-                    </a:lnR>
-                    <a:lnT w="9525" cap="flat" cmpd="sng" algn="ctr">
-                      <a:solidFill>
-                        <a:srgbClr val="D0D7E0"/>
-                      </a:solidFill>
-                      <a:prstDash val="solid"/>
-                      <a:round/>
-                      <a:headEnd type="none" w="med" len="med"/>
-                      <a:tailEnd type="none" w="med" len="med"/>
-                    </a:lnT>
-                    <a:lnB w="9525" cap="flat" cmpd="sng" algn="ctr">
-                      <a:solidFill>
-                        <a:srgbClr val="D0D7E0"/>
-                      </a:solidFill>
-                      <a:prstDash val="solid"/>
-                      <a:round/>
-                      <a:headEnd type="none" w="med" len="med"/>
-                      <a:tailEnd type="none" w="med" len="med"/>
-                    </a:lnB>
-                  </a:tcPr>
-                </a:tc>
-                <a:extLst>
-                  <a:ext uri="{0D108BD9-81ED-4DB2-BD59-A6C34878D82A}">
-                    <a16:rowId xmlns:a16="http://schemas.microsoft.com/office/drawing/2014/main" val="10003"/>
-                  </a:ext>
-                </a:extLst>
-              </a:tr>
-              <a:tr h="246888">
-                <a:tc>
-                  <a:txBody>
-                    <a:bodyPr/>
-                    <a:lstStyle/>
-                    <a:p>
-                      <a:pPr marL="0" indent="0" algn="l">
-                        <a:buNone/>
-                      </a:pPr>
-                      <a:r>
-                        <a:rPr lang="en-US" sz="1050" dirty="0">
+                        <a:rPr lang="en-US" sz="950" dirty="0">
                           <a:solidFill>
                             <a:srgbClr val="222222"/>
                           </a:solidFill>
@@ -8436,14 +8156,14 @@
                         </a:rPr>
                         <a:t>Block mean only, no mix variables</a:t>
                       </a:r>
-                      <a:endParaRPr lang="en-US" sz="1050" dirty="0">
+                      <a:endParaRPr lang="en-US" sz="950" dirty="0">
                         <a:latin typeface="Calibri" charset="0"/>
                         <a:ea typeface="Calibri" charset="0"/>
                         <a:cs typeface="Calibri" charset="0"/>
                       </a:endParaRPr>
                     </a:p>
                   </a:txBody>
-                  <a:tcPr>
+                  <a:tcPr marL="91440" marR="91440" marT="45720" marB="45720">
                     <a:lnL w="9525" cap="flat" cmpd="sng" algn="ctr">
                       <a:solidFill>
                         <a:srgbClr val="D0D7E0"/>
@@ -8487,11 +8207,11 @@
                     <a:bodyPr/>
                     <a:lstStyle/>
                     <a:p>
-                      <a:pPr marL="0" indent="0" algn="ctr">
+                      <a:pPr algn="ctr" indent="0" marL="0">
                         <a:buNone/>
                       </a:pPr>
                       <a:r>
-                        <a:rPr lang="en-US" sz="1050" b="1" dirty="0">
+                        <a:rPr lang="en-US" sz="950" b="1" dirty="0">
                           <a:solidFill>
                             <a:srgbClr val="222222"/>
                           </a:solidFill>
@@ -8501,14 +8221,14 @@
                         </a:rPr>
                         <a:t>0.53</a:t>
                       </a:r>
-                      <a:endParaRPr lang="en-US" sz="1050" dirty="0">
+                      <a:endParaRPr lang="en-US" sz="950" dirty="0">
                         <a:latin typeface="Calibri" charset="0"/>
                         <a:ea typeface="Calibri" charset="0"/>
                         <a:cs typeface="Calibri" charset="0"/>
                       </a:endParaRPr>
                     </a:p>
                   </a:txBody>
-                  <a:tcPr>
+                  <a:tcPr marL="91440" marR="91440" marT="45720" marB="45720">
                     <a:lnL w="9525" cap="flat" cmpd="sng" algn="ctr">
                       <a:solidFill>
                         <a:srgbClr val="D0D7E0"/>
@@ -8552,11 +8272,11 @@
                     <a:bodyPr/>
                     <a:lstStyle/>
                     <a:p>
-                      <a:pPr marL="0" indent="0" algn="ctr">
+                      <a:pPr algn="ctr" indent="0" marL="0">
                         <a:buNone/>
                       </a:pPr>
                       <a:r>
-                        <a:rPr lang="en-US" sz="1050" dirty="0">
+                        <a:rPr lang="en-US" sz="950" dirty="0">
                           <a:solidFill>
                             <a:srgbClr val="222222"/>
                           </a:solidFill>
@@ -8566,14 +8286,14 @@
                         </a:rPr>
                         <a:t>—</a:t>
                       </a:r>
-                      <a:endParaRPr lang="en-US" sz="1050" dirty="0">
+                      <a:endParaRPr lang="en-US" sz="950" dirty="0">
                         <a:latin typeface="Calibri" charset="0"/>
                         <a:ea typeface="Calibri" charset="0"/>
                         <a:cs typeface="Calibri" charset="0"/>
                       </a:endParaRPr>
                     </a:p>
                   </a:txBody>
-                  <a:tcPr>
+                  <a:tcPr marL="91440" marR="91440" marT="45720" marB="45720">
                     <a:lnL w="9525" cap="flat" cmpd="sng" algn="ctr">
                       <a:solidFill>
                         <a:srgbClr val="D0D7E0"/>
@@ -8617,11 +8337,11 @@
                     <a:bodyPr/>
                     <a:lstStyle/>
                     <a:p>
-                      <a:pPr marL="0" indent="0" algn="ctr">
+                      <a:pPr algn="ctr" indent="0" marL="0">
                         <a:buNone/>
                       </a:pPr>
                       <a:r>
-                        <a:rPr lang="en-US" sz="1050" dirty="0">
+                        <a:rPr lang="en-US" sz="950" dirty="0">
                           <a:solidFill>
                             <a:srgbClr val="222222"/>
                           </a:solidFill>
@@ -8631,14 +8351,14 @@
                         </a:rPr>
                         <a:t>—</a:t>
                       </a:r>
-                      <a:endParaRPr lang="en-US" sz="1050" dirty="0">
+                      <a:endParaRPr lang="en-US" sz="950" dirty="0">
                         <a:latin typeface="Calibri" charset="0"/>
                         <a:ea typeface="Calibri" charset="0"/>
                         <a:cs typeface="Calibri" charset="0"/>
                       </a:endParaRPr>
                     </a:p>
                   </a:txBody>
-                  <a:tcPr>
+                  <a:tcPr marL="91440" marR="91440" marT="45720" marB="45720">
                     <a:lnL w="9525" cap="flat" cmpd="sng" algn="ctr">
                       <a:solidFill>
                         <a:srgbClr val="D0D7E0"/>
@@ -8682,11 +8402,11 @@
                     <a:bodyPr/>
                     <a:lstStyle/>
                     <a:p>
-                      <a:pPr marL="0" indent="0" algn="ctr">
+                      <a:pPr algn="ctr" indent="0" marL="0">
                         <a:buNone/>
                       </a:pPr>
                       <a:r>
-                        <a:rPr lang="en-US" sz="1050" dirty="0">
+                        <a:rPr lang="en-US" sz="950" dirty="0">
                           <a:solidFill>
                             <a:srgbClr val="222222"/>
                           </a:solidFill>
@@ -8696,14 +8416,14 @@
                         </a:rPr>
                         <a:t>—</a:t>
                       </a:r>
-                      <a:endParaRPr lang="en-US" sz="1050" dirty="0">
+                      <a:endParaRPr lang="en-US" sz="950" dirty="0">
                         <a:latin typeface="Calibri" charset="0"/>
                         <a:ea typeface="Calibri" charset="0"/>
                         <a:cs typeface="Calibri" charset="0"/>
                       </a:endParaRPr>
                     </a:p>
                   </a:txBody>
-                  <a:tcPr>
+                  <a:tcPr marL="91440" marR="91440" marT="45720" marB="45720">
                     <a:lnL w="9525" cap="flat" cmpd="sng" algn="ctr">
                       <a:solidFill>
                         <a:srgbClr val="D0D7E0"/>
@@ -8742,23 +8462,18 @@
                     </a:lnB>
                   </a:tcPr>
                 </a:tc>
-                <a:extLst>
-                  <a:ext uri="{0D108BD9-81ED-4DB2-BD59-A6C34878D82A}">
-                    <a16:rowId xmlns:a16="http://schemas.microsoft.com/office/drawing/2014/main" val="10004"/>
-                  </a:ext>
-                </a:extLst>
               </a:tr>
-              <a:tr h="246888">
+              <a:tr h="237744">
                 <a:tc>
                   <a:txBody>
                     <a:bodyPr/>
                     <a:lstStyle/>
                     <a:p>
-                      <a:pPr marL="0" indent="0" algn="l">
+                      <a:pPr algn="l" indent="0" marL="0">
                         <a:buNone/>
                       </a:pPr>
                       <a:r>
-                        <a:rPr lang="en-US" sz="1050" dirty="0">
+                        <a:rPr lang="en-US" sz="950" dirty="0">
                           <a:solidFill>
                             <a:srgbClr val="222222"/>
                           </a:solidFill>
@@ -8766,16 +8481,16 @@
                           <a:ea typeface="Calibri" pitchFamily="34" charset="-122"/>
                           <a:cs typeface="Calibri" pitchFamily="34" charset="-120"/>
                         </a:rPr>
-                        <a:t>Forest at depth 4, blocks held out / random</a:t>
+                        <a:t>Forest limited to depth 4</a:t>
                       </a:r>
-                      <a:endParaRPr lang="en-US" sz="1050" dirty="0">
+                      <a:endParaRPr lang="en-US" sz="950" dirty="0">
                         <a:latin typeface="Calibri" charset="0"/>
                         <a:ea typeface="Calibri" charset="0"/>
                         <a:cs typeface="Calibri" charset="0"/>
                       </a:endParaRPr>
                     </a:p>
                   </a:txBody>
-                  <a:tcPr>
+                  <a:tcPr marL="91440" marR="91440" marT="45720" marB="45720">
                     <a:lnL w="9525" cap="flat" cmpd="sng" algn="ctr">
                       <a:solidFill>
                         <a:srgbClr val="D0D7E0"/>
@@ -8819,11 +8534,11 @@
                     <a:bodyPr/>
                     <a:lstStyle/>
                     <a:p>
-                      <a:pPr marL="0" indent="0" algn="ctr">
+                      <a:pPr algn="ctr" indent="0" marL="0">
                         <a:buNone/>
                       </a:pPr>
                       <a:r>
-                        <a:rPr lang="en-US" sz="1050" dirty="0">
+                        <a:rPr lang="en-US" sz="950" dirty="0">
                           <a:solidFill>
                             <a:srgbClr val="222222"/>
                           </a:solidFill>
@@ -8833,14 +8548,14 @@
                         </a:rPr>
                         <a:t>—</a:t>
                       </a:r>
-                      <a:endParaRPr lang="en-US" sz="1050" dirty="0">
+                      <a:endParaRPr lang="en-US" sz="950" dirty="0">
                         <a:latin typeface="Calibri" charset="0"/>
                         <a:ea typeface="Calibri" charset="0"/>
                         <a:cs typeface="Calibri" charset="0"/>
                       </a:endParaRPr>
                     </a:p>
                   </a:txBody>
-                  <a:tcPr>
+                  <a:tcPr marL="91440" marR="91440" marT="45720" marB="45720">
                     <a:lnL w="9525" cap="flat" cmpd="sng" algn="ctr">
                       <a:solidFill>
                         <a:srgbClr val="D0D7E0"/>
@@ -8884,11 +8599,11 @@
                     <a:bodyPr/>
                     <a:lstStyle/>
                     <a:p>
-                      <a:pPr marL="0" indent="0" algn="ctr">
+                      <a:pPr algn="ctr" indent="0" marL="0">
                         <a:buNone/>
                       </a:pPr>
                       <a:r>
-                        <a:rPr lang="en-US" sz="1050" dirty="0">
+                        <a:rPr lang="en-US" sz="950" dirty="0">
                           <a:solidFill>
                             <a:srgbClr val="222222"/>
                           </a:solidFill>
@@ -8896,16 +8611,16 @@
                           <a:ea typeface="Calibri" pitchFamily="34" charset="-122"/>
                           <a:cs typeface="Calibri" pitchFamily="34" charset="-120"/>
                         </a:rPr>
-                        <a:t>0.02 / 0.58</a:t>
+                        <a:t>0.58 / 0.02</a:t>
                       </a:r>
-                      <a:endParaRPr lang="en-US" sz="1050" dirty="0">
+                      <a:endParaRPr lang="en-US" sz="950" dirty="0">
                         <a:latin typeface="Calibri" charset="0"/>
                         <a:ea typeface="Calibri" charset="0"/>
                         <a:cs typeface="Calibri" charset="0"/>
                       </a:endParaRPr>
                     </a:p>
                   </a:txBody>
-                  <a:tcPr>
+                  <a:tcPr marL="91440" marR="91440" marT="45720" marB="45720">
                     <a:lnL w="9525" cap="flat" cmpd="sng" algn="ctr">
                       <a:solidFill>
                         <a:srgbClr val="D0D7E0"/>
@@ -8949,11 +8664,11 @@
                     <a:bodyPr/>
                     <a:lstStyle/>
                     <a:p>
-                      <a:pPr marL="0" indent="0" algn="ctr">
+                      <a:pPr algn="ctr" indent="0" marL="0">
                         <a:buNone/>
                       </a:pPr>
                       <a:r>
-                        <a:rPr lang="en-US" sz="1050" dirty="0">
+                        <a:rPr lang="en-US" sz="950" dirty="0">
                           <a:solidFill>
                             <a:srgbClr val="222222"/>
                           </a:solidFill>
@@ -8963,14 +8678,14 @@
                         </a:rPr>
                         <a:t>—</a:t>
                       </a:r>
-                      <a:endParaRPr lang="en-US" sz="1050" dirty="0">
+                      <a:endParaRPr lang="en-US" sz="950" dirty="0">
                         <a:latin typeface="Calibri" charset="0"/>
                         <a:ea typeface="Calibri" charset="0"/>
                         <a:cs typeface="Calibri" charset="0"/>
                       </a:endParaRPr>
                     </a:p>
                   </a:txBody>
-                  <a:tcPr>
+                  <a:tcPr marL="91440" marR="91440" marT="45720" marB="45720">
                     <a:lnL w="9525" cap="flat" cmpd="sng" algn="ctr">
                       <a:solidFill>
                         <a:srgbClr val="D0D7E0"/>
@@ -9014,11 +8729,11 @@
                     <a:bodyPr/>
                     <a:lstStyle/>
                     <a:p>
-                      <a:pPr marL="0" indent="0" algn="ctr">
+                      <a:pPr algn="ctr" indent="0" marL="0">
                         <a:buNone/>
                       </a:pPr>
                       <a:r>
-                        <a:rPr lang="en-US" sz="1050" dirty="0">
+                        <a:rPr lang="en-US" sz="950" dirty="0">
                           <a:solidFill>
                             <a:srgbClr val="222222"/>
                           </a:solidFill>
@@ -9028,14 +8743,14 @@
                         </a:rPr>
                         <a:t>—</a:t>
                       </a:r>
-                      <a:endParaRPr lang="en-US" sz="1050" dirty="0">
+                      <a:endParaRPr lang="en-US" sz="950" dirty="0">
                         <a:latin typeface="Calibri" charset="0"/>
                         <a:ea typeface="Calibri" charset="0"/>
                         <a:cs typeface="Calibri" charset="0"/>
                       </a:endParaRPr>
                     </a:p>
                   </a:txBody>
-                  <a:tcPr>
+                  <a:tcPr marL="91440" marR="91440" marT="45720" marB="45720">
                     <a:lnL w="9525" cap="flat" cmpd="sng" algn="ctr">
                       <a:solidFill>
                         <a:srgbClr val="D0D7E0"/>
@@ -9074,11 +8789,660 @@
                     </a:lnB>
                   </a:tcPr>
                 </a:tc>
-                <a:extLst>
-                  <a:ext uri="{0D108BD9-81ED-4DB2-BD59-A6C34878D82A}">
-                    <a16:rowId xmlns:a16="http://schemas.microsoft.com/office/drawing/2014/main" val="10005"/>
-                  </a:ext>
-                </a:extLst>
+              </a:tr>
+              <a:tr h="237744">
+                <a:tc>
+                  <a:txBody>
+                    <a:bodyPr/>
+                    <a:lstStyle/>
+                    <a:p>
+                      <a:pPr algn="l" indent="0" marL="0">
+                        <a:buNone/>
+                      </a:pPr>
+                      <a:r>
+                        <a:rPr lang="en-US" sz="950" dirty="0">
+                          <a:solidFill>
+                            <a:srgbClr val="222222"/>
+                          </a:solidFill>
+                          <a:latin typeface="Calibri" pitchFamily="34" charset="0"/>
+                          <a:ea typeface="Calibri" pitchFamily="34" charset="-122"/>
+                          <a:cs typeface="Calibri" pitchFamily="34" charset="-120"/>
+                        </a:rPr>
+                        <a:t>Bagged vs boosted trees, depth 4</a:t>
+                      </a:r>
+                      <a:endParaRPr lang="en-US" sz="950" dirty="0">
+                        <a:latin typeface="Calibri" charset="0"/>
+                        <a:ea typeface="Calibri" charset="0"/>
+                        <a:cs typeface="Calibri" charset="0"/>
+                      </a:endParaRPr>
+                    </a:p>
+                  </a:txBody>
+                  <a:tcPr marL="91440" marR="91440" marT="45720" marB="45720">
+                    <a:lnL w="9525" cap="flat" cmpd="sng" algn="ctr">
+                      <a:solidFill>
+                        <a:srgbClr val="D0D7E0"/>
+                      </a:solidFill>
+                      <a:prstDash val="solid"/>
+                      <a:round/>
+                      <a:headEnd type="none" w="med" len="med"/>
+                      <a:tailEnd type="none" w="med" len="med"/>
+                    </a:lnL>
+                    <a:lnR w="9525" cap="flat" cmpd="sng" algn="ctr">
+                      <a:solidFill>
+                        <a:srgbClr val="D0D7E0"/>
+                      </a:solidFill>
+                      <a:prstDash val="solid"/>
+                      <a:round/>
+                      <a:headEnd type="none" w="med" len="med"/>
+                      <a:tailEnd type="none" w="med" len="med"/>
+                    </a:lnR>
+                    <a:lnT w="9525" cap="flat" cmpd="sng" algn="ctr">
+                      <a:solidFill>
+                        <a:srgbClr val="D0D7E0"/>
+                      </a:solidFill>
+                      <a:prstDash val="solid"/>
+                      <a:round/>
+                      <a:headEnd type="none" w="med" len="med"/>
+                      <a:tailEnd type="none" w="med" len="med"/>
+                    </a:lnT>
+                    <a:lnB w="9525" cap="flat" cmpd="sng" algn="ctr">
+                      <a:solidFill>
+                        <a:srgbClr val="D0D7E0"/>
+                      </a:solidFill>
+                      <a:prstDash val="solid"/>
+                      <a:round/>
+                      <a:headEnd type="none" w="med" len="med"/>
+                      <a:tailEnd type="none" w="med" len="med"/>
+                    </a:lnB>
+                  </a:tcPr>
+                </a:tc>
+                <a:tc>
+                  <a:txBody>
+                    <a:bodyPr/>
+                    <a:lstStyle/>
+                    <a:p>
+                      <a:pPr algn="ctr" indent="0" marL="0">
+                        <a:buNone/>
+                      </a:pPr>
+                      <a:r>
+                        <a:rPr lang="en-US" sz="950" dirty="0">
+                          <a:solidFill>
+                            <a:srgbClr val="222222"/>
+                          </a:solidFill>
+                          <a:latin typeface="Calibri" pitchFamily="34" charset="0"/>
+                          <a:ea typeface="Calibri" pitchFamily="34" charset="-122"/>
+                          <a:cs typeface="Calibri" pitchFamily="34" charset="-120"/>
+                        </a:rPr>
+                        <a:t>—</a:t>
+                      </a:r>
+                      <a:endParaRPr lang="en-US" sz="950" dirty="0">
+                        <a:latin typeface="Calibri" charset="0"/>
+                        <a:ea typeface="Calibri" charset="0"/>
+                        <a:cs typeface="Calibri" charset="0"/>
+                      </a:endParaRPr>
+                    </a:p>
+                  </a:txBody>
+                  <a:tcPr marL="91440" marR="91440" marT="45720" marB="45720">
+                    <a:lnL w="9525" cap="flat" cmpd="sng" algn="ctr">
+                      <a:solidFill>
+                        <a:srgbClr val="D0D7E0"/>
+                      </a:solidFill>
+                      <a:prstDash val="solid"/>
+                      <a:round/>
+                      <a:headEnd type="none" w="med" len="med"/>
+                      <a:tailEnd type="none" w="med" len="med"/>
+                    </a:lnL>
+                    <a:lnR w="9525" cap="flat" cmpd="sng" algn="ctr">
+                      <a:solidFill>
+                        <a:srgbClr val="D0D7E0"/>
+                      </a:solidFill>
+                      <a:prstDash val="solid"/>
+                      <a:round/>
+                      <a:headEnd type="none" w="med" len="med"/>
+                      <a:tailEnd type="none" w="med" len="med"/>
+                    </a:lnR>
+                    <a:lnT w="9525" cap="flat" cmpd="sng" algn="ctr">
+                      <a:solidFill>
+                        <a:srgbClr val="D0D7E0"/>
+                      </a:solidFill>
+                      <a:prstDash val="solid"/>
+                      <a:round/>
+                      <a:headEnd type="none" w="med" len="med"/>
+                      <a:tailEnd type="none" w="med" len="med"/>
+                    </a:lnT>
+                    <a:lnB w="9525" cap="flat" cmpd="sng" algn="ctr">
+                      <a:solidFill>
+                        <a:srgbClr val="D0D7E0"/>
+                      </a:solidFill>
+                      <a:prstDash val="solid"/>
+                      <a:round/>
+                      <a:headEnd type="none" w="med" len="med"/>
+                      <a:tailEnd type="none" w="med" len="med"/>
+                    </a:lnB>
+                  </a:tcPr>
+                </a:tc>
+                <a:tc>
+                  <a:txBody>
+                    <a:bodyPr/>
+                    <a:lstStyle/>
+                    <a:p>
+                      <a:pPr algn="ctr" indent="0" marL="0">
+                        <a:buNone/>
+                      </a:pPr>
+                      <a:r>
+                        <a:rPr lang="en-US" sz="950" dirty="0">
+                          <a:solidFill>
+                            <a:srgbClr val="222222"/>
+                          </a:solidFill>
+                          <a:latin typeface="Calibri" pitchFamily="34" charset="0"/>
+                          <a:ea typeface="Calibri" pitchFamily="34" charset="-122"/>
+                          <a:cs typeface="Calibri" pitchFamily="34" charset="-120"/>
+                        </a:rPr>
+                        <a:t>0.57 / −0.03</a:t>
+                      </a:r>
+                      <a:endParaRPr lang="en-US" sz="950" dirty="0">
+                        <a:latin typeface="Calibri" charset="0"/>
+                        <a:ea typeface="Calibri" charset="0"/>
+                        <a:cs typeface="Calibri" charset="0"/>
+                      </a:endParaRPr>
+                    </a:p>
+                  </a:txBody>
+                  <a:tcPr marL="91440" marR="91440" marT="45720" marB="45720">
+                    <a:lnL w="9525" cap="flat" cmpd="sng" algn="ctr">
+                      <a:solidFill>
+                        <a:srgbClr val="D0D7E0"/>
+                      </a:solidFill>
+                      <a:prstDash val="solid"/>
+                      <a:round/>
+                      <a:headEnd type="none" w="med" len="med"/>
+                      <a:tailEnd type="none" w="med" len="med"/>
+                    </a:lnL>
+                    <a:lnR w="9525" cap="flat" cmpd="sng" algn="ctr">
+                      <a:solidFill>
+                        <a:srgbClr val="D0D7E0"/>
+                      </a:solidFill>
+                      <a:prstDash val="solid"/>
+                      <a:round/>
+                      <a:headEnd type="none" w="med" len="med"/>
+                      <a:tailEnd type="none" w="med" len="med"/>
+                    </a:lnR>
+                    <a:lnT w="9525" cap="flat" cmpd="sng" algn="ctr">
+                      <a:solidFill>
+                        <a:srgbClr val="D0D7E0"/>
+                      </a:solidFill>
+                      <a:prstDash val="solid"/>
+                      <a:round/>
+                      <a:headEnd type="none" w="med" len="med"/>
+                      <a:tailEnd type="none" w="med" len="med"/>
+                    </a:lnT>
+                    <a:lnB w="9525" cap="flat" cmpd="sng" algn="ctr">
+                      <a:solidFill>
+                        <a:srgbClr val="D0D7E0"/>
+                      </a:solidFill>
+                      <a:prstDash val="solid"/>
+                      <a:round/>
+                      <a:headEnd type="none" w="med" len="med"/>
+                      <a:tailEnd type="none" w="med" len="med"/>
+                    </a:lnB>
+                  </a:tcPr>
+                </a:tc>
+                <a:tc>
+                  <a:txBody>
+                    <a:bodyPr/>
+                    <a:lstStyle/>
+                    <a:p>
+                      <a:pPr algn="ctr" indent="0" marL="0">
+                        <a:buNone/>
+                      </a:pPr>
+                      <a:r>
+                        <a:rPr lang="en-US" sz="950" b="1" dirty="0">
+                          <a:solidFill>
+                            <a:srgbClr val="222222"/>
+                          </a:solidFill>
+                          <a:latin typeface="Calibri" pitchFamily="34" charset="0"/>
+                          <a:ea typeface="Calibri" pitchFamily="34" charset="-122"/>
+                          <a:cs typeface="Calibri" pitchFamily="34" charset="-120"/>
+                        </a:rPr>
+                        <a:t>0.85 / 0.16</a:t>
+                      </a:r>
+                      <a:endParaRPr lang="en-US" sz="950" dirty="0">
+                        <a:latin typeface="Calibri" charset="0"/>
+                        <a:ea typeface="Calibri" charset="0"/>
+                        <a:cs typeface="Calibri" charset="0"/>
+                      </a:endParaRPr>
+                    </a:p>
+                  </a:txBody>
+                  <a:tcPr marL="91440" marR="91440" marT="45720" marB="45720">
+                    <a:lnL w="9525" cap="flat" cmpd="sng" algn="ctr">
+                      <a:solidFill>
+                        <a:srgbClr val="D0D7E0"/>
+                      </a:solidFill>
+                      <a:prstDash val="solid"/>
+                      <a:round/>
+                      <a:headEnd type="none" w="med" len="med"/>
+                      <a:tailEnd type="none" w="med" len="med"/>
+                    </a:lnL>
+                    <a:lnR w="9525" cap="flat" cmpd="sng" algn="ctr">
+                      <a:solidFill>
+                        <a:srgbClr val="D0D7E0"/>
+                      </a:solidFill>
+                      <a:prstDash val="solid"/>
+                      <a:round/>
+                      <a:headEnd type="none" w="med" len="med"/>
+                      <a:tailEnd type="none" w="med" len="med"/>
+                    </a:lnR>
+                    <a:lnT w="9525" cap="flat" cmpd="sng" algn="ctr">
+                      <a:solidFill>
+                        <a:srgbClr val="D0D7E0"/>
+                      </a:solidFill>
+                      <a:prstDash val="solid"/>
+                      <a:round/>
+                      <a:headEnd type="none" w="med" len="med"/>
+                      <a:tailEnd type="none" w="med" len="med"/>
+                    </a:lnT>
+                    <a:lnB w="9525" cap="flat" cmpd="sng" algn="ctr">
+                      <a:solidFill>
+                        <a:srgbClr val="D0D7E0"/>
+                      </a:solidFill>
+                      <a:prstDash val="solid"/>
+                      <a:round/>
+                      <a:headEnd type="none" w="med" len="med"/>
+                      <a:tailEnd type="none" w="med" len="med"/>
+                    </a:lnB>
+                  </a:tcPr>
+                </a:tc>
+                <a:tc>
+                  <a:txBody>
+                    <a:bodyPr/>
+                    <a:lstStyle/>
+                    <a:p>
+                      <a:pPr algn="ctr" indent="0" marL="0">
+                        <a:buNone/>
+                      </a:pPr>
+                      <a:r>
+                        <a:rPr lang="en-US" sz="950" dirty="0">
+                          <a:solidFill>
+                            <a:srgbClr val="222222"/>
+                          </a:solidFill>
+                          <a:latin typeface="Calibri" pitchFamily="34" charset="0"/>
+                          <a:ea typeface="Calibri" pitchFamily="34" charset="-122"/>
+                          <a:cs typeface="Calibri" pitchFamily="34" charset="-120"/>
+                        </a:rPr>
+                        <a:t>—</a:t>
+                      </a:r>
+                      <a:endParaRPr lang="en-US" sz="950" dirty="0">
+                        <a:latin typeface="Calibri" charset="0"/>
+                        <a:ea typeface="Calibri" charset="0"/>
+                        <a:cs typeface="Calibri" charset="0"/>
+                      </a:endParaRPr>
+                    </a:p>
+                  </a:txBody>
+                  <a:tcPr marL="91440" marR="91440" marT="45720" marB="45720">
+                    <a:lnL w="9525" cap="flat" cmpd="sng" algn="ctr">
+                      <a:solidFill>
+                        <a:srgbClr val="D0D7E0"/>
+                      </a:solidFill>
+                      <a:prstDash val="solid"/>
+                      <a:round/>
+                      <a:headEnd type="none" w="med" len="med"/>
+                      <a:tailEnd type="none" w="med" len="med"/>
+                    </a:lnL>
+                    <a:lnR w="9525" cap="flat" cmpd="sng" algn="ctr">
+                      <a:solidFill>
+                        <a:srgbClr val="D0D7E0"/>
+                      </a:solidFill>
+                      <a:prstDash val="solid"/>
+                      <a:round/>
+                      <a:headEnd type="none" w="med" len="med"/>
+                      <a:tailEnd type="none" w="med" len="med"/>
+                    </a:lnR>
+                    <a:lnT w="9525" cap="flat" cmpd="sng" algn="ctr">
+                      <a:solidFill>
+                        <a:srgbClr val="D0D7E0"/>
+                      </a:solidFill>
+                      <a:prstDash val="solid"/>
+                      <a:round/>
+                      <a:headEnd type="none" w="med" len="med"/>
+                      <a:tailEnd type="none" w="med" len="med"/>
+                    </a:lnT>
+                    <a:lnB w="9525" cap="flat" cmpd="sng" algn="ctr">
+                      <a:solidFill>
+                        <a:srgbClr val="D0D7E0"/>
+                      </a:solidFill>
+                      <a:prstDash val="solid"/>
+                      <a:round/>
+                      <a:headEnd type="none" w="med" len="med"/>
+                      <a:tailEnd type="none" w="med" len="med"/>
+                    </a:lnB>
+                  </a:tcPr>
+                </a:tc>
+              </a:tr>
+              <a:tr h="237744">
+                <a:tc>
+                  <a:txBody>
+                    <a:bodyPr/>
+                    <a:lstStyle/>
+                    <a:p>
+                      <a:pPr algn="l" indent="0" marL="0">
+                        <a:buNone/>
+                      </a:pPr>
+                      <a:r>
+                        <a:rPr lang="en-US" sz="950" dirty="0">
+                          <a:solidFill>
+                            <a:srgbClr val="222222"/>
+                          </a:solidFill>
+                          <a:latin typeface="Calibri" pitchFamily="34" charset="0"/>
+                          <a:ea typeface="Calibri" pitchFamily="34" charset="-122"/>
+                          <a:cs typeface="Calibri" pitchFamily="34" charset="-120"/>
+                        </a:rPr>
+                        <a:t>8 fold draws, held out, mean ± sd</a:t>
+                      </a:r>
+                      <a:endParaRPr lang="en-US" sz="950" dirty="0">
+                        <a:latin typeface="Calibri" charset="0"/>
+                        <a:ea typeface="Calibri" charset="0"/>
+                        <a:cs typeface="Calibri" charset="0"/>
+                      </a:endParaRPr>
+                    </a:p>
+                  </a:txBody>
+                  <a:tcPr marL="91440" marR="91440" marT="45720" marB="45720">
+                    <a:lnL w="9525" cap="flat" cmpd="sng" algn="ctr">
+                      <a:solidFill>
+                        <a:srgbClr val="D0D7E0"/>
+                      </a:solidFill>
+                      <a:prstDash val="solid"/>
+                      <a:round/>
+                      <a:headEnd type="none" w="med" len="med"/>
+                      <a:tailEnd type="none" w="med" len="med"/>
+                    </a:lnL>
+                    <a:lnR w="9525" cap="flat" cmpd="sng" algn="ctr">
+                      <a:solidFill>
+                        <a:srgbClr val="D0D7E0"/>
+                      </a:solidFill>
+                      <a:prstDash val="solid"/>
+                      <a:round/>
+                      <a:headEnd type="none" w="med" len="med"/>
+                      <a:tailEnd type="none" w="med" len="med"/>
+                    </a:lnR>
+                    <a:lnT w="9525" cap="flat" cmpd="sng" algn="ctr">
+                      <a:solidFill>
+                        <a:srgbClr val="D0D7E0"/>
+                      </a:solidFill>
+                      <a:prstDash val="solid"/>
+                      <a:round/>
+                      <a:headEnd type="none" w="med" len="med"/>
+                      <a:tailEnd type="none" w="med" len="med"/>
+                    </a:lnT>
+                    <a:lnB w="9525" cap="flat" cmpd="sng" algn="ctr">
+                      <a:solidFill>
+                        <a:srgbClr val="D0D7E0"/>
+                      </a:solidFill>
+                      <a:prstDash val="solid"/>
+                      <a:round/>
+                      <a:headEnd type="none" w="med" len="med"/>
+                      <a:tailEnd type="none" w="med" len="med"/>
+                    </a:lnB>
+                  </a:tcPr>
+                </a:tc>
+                <a:tc>
+                  <a:txBody>
+                    <a:bodyPr/>
+                    <a:lstStyle/>
+                    <a:p>
+                      <a:pPr algn="ctr" indent="0" marL="0">
+                        <a:buNone/>
+                      </a:pPr>
+                      <a:r>
+                        <a:rPr lang="en-US" sz="950" dirty="0">
+                          <a:solidFill>
+                            <a:srgbClr val="222222"/>
+                          </a:solidFill>
+                          <a:latin typeface="Calibri" pitchFamily="34" charset="0"/>
+                          <a:ea typeface="Calibri" pitchFamily="34" charset="-122"/>
+                          <a:cs typeface="Calibri" pitchFamily="34" charset="-120"/>
+                        </a:rPr>
+                        <a:t>0.05 ± 0.10</a:t>
+                      </a:r>
+                      <a:endParaRPr lang="en-US" sz="950" dirty="0">
+                        <a:latin typeface="Calibri" charset="0"/>
+                        <a:ea typeface="Calibri" charset="0"/>
+                        <a:cs typeface="Calibri" charset="0"/>
+                      </a:endParaRPr>
+                    </a:p>
+                  </a:txBody>
+                  <a:tcPr marL="91440" marR="91440" marT="45720" marB="45720">
+                    <a:lnL w="9525" cap="flat" cmpd="sng" algn="ctr">
+                      <a:solidFill>
+                        <a:srgbClr val="D0D7E0"/>
+                      </a:solidFill>
+                      <a:prstDash val="solid"/>
+                      <a:round/>
+                      <a:headEnd type="none" w="med" len="med"/>
+                      <a:tailEnd type="none" w="med" len="med"/>
+                    </a:lnL>
+                    <a:lnR w="9525" cap="flat" cmpd="sng" algn="ctr">
+                      <a:solidFill>
+                        <a:srgbClr val="D0D7E0"/>
+                      </a:solidFill>
+                      <a:prstDash val="solid"/>
+                      <a:round/>
+                      <a:headEnd type="none" w="med" len="med"/>
+                      <a:tailEnd type="none" w="med" len="med"/>
+                    </a:lnR>
+                    <a:lnT w="9525" cap="flat" cmpd="sng" algn="ctr">
+                      <a:solidFill>
+                        <a:srgbClr val="D0D7E0"/>
+                      </a:solidFill>
+                      <a:prstDash val="solid"/>
+                      <a:round/>
+                      <a:headEnd type="none" w="med" len="med"/>
+                      <a:tailEnd type="none" w="med" len="med"/>
+                    </a:lnT>
+                    <a:lnB w="9525" cap="flat" cmpd="sng" algn="ctr">
+                      <a:solidFill>
+                        <a:srgbClr val="D0D7E0"/>
+                      </a:solidFill>
+                      <a:prstDash val="solid"/>
+                      <a:round/>
+                      <a:headEnd type="none" w="med" len="med"/>
+                      <a:tailEnd type="none" w="med" len="med"/>
+                    </a:lnB>
+                  </a:tcPr>
+                </a:tc>
+                <a:tc>
+                  <a:txBody>
+                    <a:bodyPr/>
+                    <a:lstStyle/>
+                    <a:p>
+                      <a:pPr algn="ctr" indent="0" marL="0">
+                        <a:buNone/>
+                      </a:pPr>
+                      <a:r>
+                        <a:rPr lang="en-US" sz="950" dirty="0">
+                          <a:solidFill>
+                            <a:srgbClr val="222222"/>
+                          </a:solidFill>
+                          <a:latin typeface="Calibri" pitchFamily="34" charset="0"/>
+                          <a:ea typeface="Calibri" pitchFamily="34" charset="-122"/>
+                          <a:cs typeface="Calibri" pitchFamily="34" charset="-120"/>
+                        </a:rPr>
+                        <a:t>0.13 ± 0.06</a:t>
+                      </a:r>
+                      <a:endParaRPr lang="en-US" sz="950" dirty="0">
+                        <a:latin typeface="Calibri" charset="0"/>
+                        <a:ea typeface="Calibri" charset="0"/>
+                        <a:cs typeface="Calibri" charset="0"/>
+                      </a:endParaRPr>
+                    </a:p>
+                  </a:txBody>
+                  <a:tcPr marL="91440" marR="91440" marT="45720" marB="45720">
+                    <a:lnL w="9525" cap="flat" cmpd="sng" algn="ctr">
+                      <a:solidFill>
+                        <a:srgbClr val="D0D7E0"/>
+                      </a:solidFill>
+                      <a:prstDash val="solid"/>
+                      <a:round/>
+                      <a:headEnd type="none" w="med" len="med"/>
+                      <a:tailEnd type="none" w="med" len="med"/>
+                    </a:lnL>
+                    <a:lnR w="9525" cap="flat" cmpd="sng" algn="ctr">
+                      <a:solidFill>
+                        <a:srgbClr val="D0D7E0"/>
+                      </a:solidFill>
+                      <a:prstDash val="solid"/>
+                      <a:round/>
+                      <a:headEnd type="none" w="med" len="med"/>
+                      <a:tailEnd type="none" w="med" len="med"/>
+                    </a:lnR>
+                    <a:lnT w="9525" cap="flat" cmpd="sng" algn="ctr">
+                      <a:solidFill>
+                        <a:srgbClr val="D0D7E0"/>
+                      </a:solidFill>
+                      <a:prstDash val="solid"/>
+                      <a:round/>
+                      <a:headEnd type="none" w="med" len="med"/>
+                      <a:tailEnd type="none" w="med" len="med"/>
+                    </a:lnT>
+                    <a:lnB w="9525" cap="flat" cmpd="sng" algn="ctr">
+                      <a:solidFill>
+                        <a:srgbClr val="D0D7E0"/>
+                      </a:solidFill>
+                      <a:prstDash val="solid"/>
+                      <a:round/>
+                      <a:headEnd type="none" w="med" len="med"/>
+                      <a:tailEnd type="none" w="med" len="med"/>
+                    </a:lnB>
+                  </a:tcPr>
+                </a:tc>
+                <a:tc>
+                  <a:txBody>
+                    <a:bodyPr/>
+                    <a:lstStyle/>
+                    <a:p>
+                      <a:pPr algn="ctr" indent="0" marL="0">
+                        <a:buNone/>
+                      </a:pPr>
+                      <a:r>
+                        <a:rPr lang="en-US" sz="950" b="1" dirty="0">
+                          <a:solidFill>
+                            <a:srgbClr val="222222"/>
+                          </a:solidFill>
+                          <a:latin typeface="Calibri" pitchFamily="34" charset="0"/>
+                          <a:ea typeface="Calibri" pitchFamily="34" charset="-122"/>
+                          <a:cs typeface="Calibri" pitchFamily="34" charset="-120"/>
+                        </a:rPr>
+                        <a:t>0.29 ± 0.06</a:t>
+                      </a:r>
+                      <a:endParaRPr lang="en-US" sz="950" dirty="0">
+                        <a:latin typeface="Calibri" charset="0"/>
+                        <a:ea typeface="Calibri" charset="0"/>
+                        <a:cs typeface="Calibri" charset="0"/>
+                      </a:endParaRPr>
+                    </a:p>
+                  </a:txBody>
+                  <a:tcPr marL="91440" marR="91440" marT="45720" marB="45720">
+                    <a:lnL w="9525" cap="flat" cmpd="sng" algn="ctr">
+                      <a:solidFill>
+                        <a:srgbClr val="D0D7E0"/>
+                      </a:solidFill>
+                      <a:prstDash val="solid"/>
+                      <a:round/>
+                      <a:headEnd type="none" w="med" len="med"/>
+                      <a:tailEnd type="none" w="med" len="med"/>
+                    </a:lnL>
+                    <a:lnR w="9525" cap="flat" cmpd="sng" algn="ctr">
+                      <a:solidFill>
+                        <a:srgbClr val="D0D7E0"/>
+                      </a:solidFill>
+                      <a:prstDash val="solid"/>
+                      <a:round/>
+                      <a:headEnd type="none" w="med" len="med"/>
+                      <a:tailEnd type="none" w="med" len="med"/>
+                    </a:lnR>
+                    <a:lnT w="9525" cap="flat" cmpd="sng" algn="ctr">
+                      <a:solidFill>
+                        <a:srgbClr val="D0D7E0"/>
+                      </a:solidFill>
+                      <a:prstDash val="solid"/>
+                      <a:round/>
+                      <a:headEnd type="none" w="med" len="med"/>
+                      <a:tailEnd type="none" w="med" len="med"/>
+                    </a:lnT>
+                    <a:lnB w="9525" cap="flat" cmpd="sng" algn="ctr">
+                      <a:solidFill>
+                        <a:srgbClr val="D0D7E0"/>
+                      </a:solidFill>
+                      <a:prstDash val="solid"/>
+                      <a:round/>
+                      <a:headEnd type="none" w="med" len="med"/>
+                      <a:tailEnd type="none" w="med" len="med"/>
+                    </a:lnB>
+                  </a:tcPr>
+                </a:tc>
+                <a:tc>
+                  <a:txBody>
+                    <a:bodyPr/>
+                    <a:lstStyle/>
+                    <a:p>
+                      <a:pPr algn="ctr" indent="0" marL="0">
+                        <a:buNone/>
+                      </a:pPr>
+                      <a:r>
+                        <a:rPr lang="en-US" sz="950" dirty="0">
+                          <a:solidFill>
+                            <a:srgbClr val="222222"/>
+                          </a:solidFill>
+                          <a:latin typeface="Calibri" pitchFamily="34" charset="0"/>
+                          <a:ea typeface="Calibri" pitchFamily="34" charset="-122"/>
+                          <a:cs typeface="Calibri" pitchFamily="34" charset="-120"/>
+                        </a:rPr>
+                        <a:t>−0.60 ± 0.30</a:t>
+                      </a:r>
+                      <a:endParaRPr lang="en-US" sz="950" dirty="0">
+                        <a:latin typeface="Calibri" charset="0"/>
+                        <a:ea typeface="Calibri" charset="0"/>
+                        <a:cs typeface="Calibri" charset="0"/>
+                      </a:endParaRPr>
+                    </a:p>
+                  </a:txBody>
+                  <a:tcPr marL="91440" marR="91440" marT="45720" marB="45720">
+                    <a:lnL w="9525" cap="flat" cmpd="sng" algn="ctr">
+                      <a:solidFill>
+                        <a:srgbClr val="D0D7E0"/>
+                      </a:solidFill>
+                      <a:prstDash val="solid"/>
+                      <a:round/>
+                      <a:headEnd type="none" w="med" len="med"/>
+                      <a:tailEnd type="none" w="med" len="med"/>
+                    </a:lnL>
+                    <a:lnR w="9525" cap="flat" cmpd="sng" algn="ctr">
+                      <a:solidFill>
+                        <a:srgbClr val="D0D7E0"/>
+                      </a:solidFill>
+                      <a:prstDash val="solid"/>
+                      <a:round/>
+                      <a:headEnd type="none" w="med" len="med"/>
+                      <a:tailEnd type="none" w="med" len="med"/>
+                    </a:lnR>
+                    <a:lnT w="9525" cap="flat" cmpd="sng" algn="ctr">
+                      <a:solidFill>
+                        <a:srgbClr val="D0D7E0"/>
+                      </a:solidFill>
+                      <a:prstDash val="solid"/>
+                      <a:round/>
+                      <a:headEnd type="none" w="med" len="med"/>
+                      <a:tailEnd type="none" w="med" len="med"/>
+                    </a:lnT>
+                    <a:lnB w="9525" cap="flat" cmpd="sng" algn="ctr">
+                      <a:solidFill>
+                        <a:srgbClr val="D0D7E0"/>
+                      </a:solidFill>
+                      <a:prstDash val="solid"/>
+                      <a:round/>
+                      <a:headEnd type="none" w="med" len="med"/>
+                      <a:tailEnd type="none" w="med" len="med"/>
+                    </a:lnB>
+                  </a:tcPr>
+                </a:tc>
               </a:tr>
             </a:tbl>
           </a:graphicData>
@@ -9092,8 +9456,8 @@
         </p:nvSpPr>
         <p:spPr>
           <a:xfrm>
-            <a:off x="548640" y="5303520"/>
-            <a:ext cx="5577840" cy="1005840"/>
+            <a:off x="548640" y="5669280"/>
+            <a:ext cx="5577840" cy="685800"/>
           </a:xfrm>
           <a:prstGeom prst="rect">
             <a:avLst/>
@@ -9105,11 +9469,11 @@
           <a:bodyPr wrap="square" lIns="0" tIns="0" rIns="0" bIns="0" rtlCol="0" anchor="t"/>
           <a:lstStyle/>
           <a:p>
-            <a:pPr marL="0" indent="0">
+            <a:pPr indent="0" marL="0">
               <a:buNone/>
             </a:pPr>
             <a:r>
-              <a:rPr lang="en-US" sz="1000" b="1" dirty="0">
+              <a:rPr lang="en-US" sz="850" b="1" dirty="0">
                 <a:solidFill>
                   <a:srgbClr val="1B2A4A"/>
                 </a:solidFill>
@@ -9117,10 +9481,13 @@
                 <a:ea typeface="Calibri" pitchFamily="34" charset="-122"/>
                 <a:cs typeface="Calibri" pitchFamily="34" charset="-120"/>
               </a:rPr>
-              <a:t>Result. </a:t>
-            </a:r>
-            <a:r>
-              <a:rPr lang="en-US" sz="1000" dirty="0">
+              <a:t>Limits. </a:t>
+            </a:r>
+            <a:pPr indent="0" marL="0">
+              <a:buNone/>
+            </a:pPr>
+            <a:r>
+              <a:rPr lang="en-US" sz="850" dirty="0">
                 <a:solidFill>
                   <a:srgbClr val="222222"/>
                 </a:solidFill>
@@ -9128,22 +9495,22 @@
                 <a:ea typeface="Calibri" pitchFamily="34" charset="-122"/>
                 <a:cs typeface="Calibri" pitchFamily="34" charset="-120"/>
               </a:rPr>
-              <a:t>(a) held: the forest fell to the baseline's level and the MLP below it. (b) held: the baseline rose 0.47 → 0.70 while the trees moved by 0.01 (the gap closed; the ranking did not change). Knowing only the block (0.53) beats the chemistry baseline (0.47). What (a) did not predict: XGBoost kept 0.16. Across re-drawn fold assignments every by-study number moves by up to ±0.1, but XGBoost &gt; forest and MLP last hold in every draw.</a:t>
-            </a:r>
-            <a:endParaRPr lang="en-US" sz="1000" dirty="0"/>
+              <a:t>The depth test could not separate depth from capacity (the depth-4 forest underfits the random split too). Blocks are not laboratories: 15 % of held-out rows share a fly-ash fingerprint with training, so every by-study score is an upper bound. Implication for my thesis: R² above 0.9 on a random split of a compiled database is memorisation; WP3 validates by held-out study.</a:t>
+            </a:r>
+            <a:endParaRPr lang="en-US" sz="850" dirty="0"/>
           </a:p>
         </p:txBody>
       </p:sp>
       <p:pic>
         <p:nvPicPr>
-          <p:cNvPr id="8" name="Image 0" descr="/home/claude/jiang/figures/F2_fingerprint.png"/>
+          <p:cNvPr id="8" name="Image 0" descr="/home/claude/jiang/figures/F2_fingerprint.png">    </p:cNvPr>
           <p:cNvPicPr>
             <a:picLocks noChangeAspect="1"/>
           </p:cNvPicPr>
           <p:nvPr/>
         </p:nvPicPr>
         <p:blipFill>
-          <a:blip r:embed="rId3"/>
+          <a:blip r:embed="rId1"/>
           <a:stretch>
             <a:fillRect/>
           </a:stretch>
@@ -9167,7 +9534,7 @@
         <p:spPr>
           <a:xfrm>
             <a:off x="6400800" y="4343400"/>
-            <a:ext cx="5212080" cy="320040"/>
+            <a:ext cx="5212080" cy="274320"/>
           </a:xfrm>
           <a:prstGeom prst="rect">
             <a:avLst/>
@@ -9179,11 +9546,11 @@
           <a:bodyPr wrap="square" lIns="0" tIns="0" rIns="0" bIns="0" rtlCol="0" anchor="ctr"/>
           <a:lstStyle/>
           <a:p>
-            <a:pPr marL="0" indent="0">
+            <a:pPr indent="0" marL="0">
               <a:buNone/>
             </a:pPr>
             <a:r>
-              <a:rPr lang="en-US" sz="1000" dirty="0">
+              <a:rPr lang="en-US" sz="950" dirty="0">
                 <a:solidFill>
                   <a:srgbClr val="666666"/>
                 </a:solidFill>
@@ -9193,7 +9560,7 @@
               </a:rPr>
               <a:t>Within-block spread of each feature as a fraction of its overall spread. Near zero = a source fingerprint.</a:t>
             </a:r>
-            <a:endParaRPr lang="en-US" sz="1000" dirty="0"/>
+            <a:endParaRPr lang="en-US" sz="950" dirty="0"/>
           </a:p>
         </p:txBody>
       </p:sp>
@@ -9205,12 +9572,12 @@
         </p:nvSpPr>
         <p:spPr>
           <a:xfrm>
-            <a:off x="6400800" y="4663440"/>
-            <a:ext cx="5212080" cy="1691640"/>
+            <a:off x="6400800" y="4617720"/>
+            <a:ext cx="5212080" cy="1737360"/>
           </a:xfrm>
           <a:prstGeom prst="roundRect">
             <a:avLst>
-              <a:gd name="adj" fmla="val 5405"/>
+              <a:gd name="adj" fmla="val 5263"/>
             </a:avLst>
           </a:prstGeom>
           <a:solidFill>
@@ -9223,13 +9590,6 @@
             <a:prstDash val="solid"/>
           </a:ln>
         </p:spPr>
-        <p:txBody>
-          <a:bodyPr/>
-          <a:lstStyle/>
-          <a:p>
-            <a:endParaRPr lang="en-US"/>
-          </a:p>
-        </p:txBody>
       </p:sp>
       <p:sp>
         <p:nvSpPr>
@@ -9239,8 +9599,8 @@
         </p:nvSpPr>
         <p:spPr>
           <a:xfrm>
-            <a:off x="6537960" y="4709160"/>
-            <a:ext cx="4937760" cy="1627632"/>
+            <a:off x="6537960" y="4663440"/>
+            <a:ext cx="4937760" cy="1673352"/>
           </a:xfrm>
           <a:prstGeom prst="rect">
             <a:avLst/>
@@ -9252,7 +9612,7 @@
           <a:bodyPr wrap="square" lIns="0" tIns="0" rIns="0" bIns="0" rtlCol="0" anchor="t"/>
           <a:lstStyle/>
           <a:p>
-            <a:pPr marL="0" indent="0">
+            <a:pPr indent="0" marL="0">
               <a:buNone/>
             </a:pPr>
             <a:r>
@@ -9264,8 +9624,11 @@
                 <a:ea typeface="Calibri" pitchFamily="34" charset="-122"/>
                 <a:cs typeface="Calibri" pitchFamily="34" charset="-120"/>
               </a:rPr>
-              <a:t>The open gap: why XGBoost beats the forest. </a:t>
-            </a:r>
+              <a:t>Data property 2, and the test that closed the gap. </a:t>
+            </a:r>
+            <a:pPr indent="0" marL="0">
+              <a:buNone/>
+            </a:pPr>
             <a:r>
               <a:rPr lang="en-US" sz="950" dirty="0">
                 <a:solidFill>
@@ -9275,7 +9638,7 @@
                 <a:ea typeface="Calibri" pitchFamily="34" charset="-122"/>
                 <a:cs typeface="Calibri" pitchFamily="34" charset="-120"/>
               </a:rPr>
-              <a:t>The laboratory property explains the trees' lead over ridge, not XGBoost's margin over the forest. I tested one candidate, depth: a forest limited to depth 4 fell to 0.02 across blocks, but also to 0.58 on the random split, so it underfits everywhere and the test cannot separate depth from capacity. The margin is real (every fold draw) and its cause is untested. Candidates for a next test: boosting on residuals versus bagging at equal depth; and the MLP's negative score pointing to unbounded extrapolation on unseen sources. Implication for my thesis: R² above 0.9 on a random split of a compiled database is memorisation, so WP3 validates by held-out study.</a:t>
+              <a:t>Strength here is a large between-laboratory offset plus a small within-laboratory signal (curing, molarity). Prediction 2 (in advance): if fitting residuals is what lets XGBoost keep a margin, then boosted trees should beat bagged trees from the same library at the same depth 4 and the same sampling when blocks are held out — removing depth and capacity from the comparison. Result: boosted 0.16 vs bagged −0.03 by block (0.85 vs 0.57 random). Averaging independent trees re-fits the offset in every tree; boosting absorbs the offset in the first trees and then fits the residual, which is the only part that transfers to a new source.</a:t>
             </a:r>
             <a:endParaRPr lang="en-US" sz="950" dirty="0"/>
           </a:p>
@@ -9302,7 +9665,7 @@
           <a:bodyPr wrap="square" lIns="0" tIns="0" rIns="0" bIns="0" rtlCol="0" anchor="ctr"/>
           <a:lstStyle/>
           <a:p>
-            <a:pPr marL="0" indent="0">
+            <a:pPr indent="0" marL="0">
               <a:buNone/>
             </a:pPr>
             <a:r>
@@ -9621,319 +9984,4 @@
     </a:ext>
   </a:extLst>
 </a:theme>
-</file>
-
-<file path=ppt/theme/theme2.xml><?xml version="1.0" encoding="utf-8"?>
-<a:theme xmlns:a="http://schemas.openxmlformats.org/drawingml/2006/main" name="Office Theme">
-  <a:themeElements>
-    <a:clrScheme name="Office">
-      <a:dk1>
-        <a:sysClr val="windowText" lastClr="000000"/>
-      </a:dk1>
-      <a:lt1>
-        <a:sysClr val="window" lastClr="FFFFFF"/>
-      </a:lt1>
-      <a:dk2>
-        <a:srgbClr val="0E2841"/>
-      </a:dk2>
-      <a:lt2>
-        <a:srgbClr val="E8E8E8"/>
-      </a:lt2>
-      <a:accent1>
-        <a:srgbClr val="156082"/>
-      </a:accent1>
-      <a:accent2>
-        <a:srgbClr val="E97132"/>
-      </a:accent2>
-      <a:accent3>
-        <a:srgbClr val="196B24"/>
-      </a:accent3>
-      <a:accent4>
-        <a:srgbClr val="0F9ED5"/>
-      </a:accent4>
-      <a:accent5>
-        <a:srgbClr val="A02B93"/>
-      </a:accent5>
-      <a:accent6>
-        <a:srgbClr val="4EA72E"/>
-      </a:accent6>
-      <a:hlink>
-        <a:srgbClr val="467886"/>
-      </a:hlink>
-      <a:folHlink>
-        <a:srgbClr val="96607D"/>
-      </a:folHlink>
-    </a:clrScheme>
-    <a:fontScheme name="Office">
-      <a:majorFont>
-        <a:latin typeface="Aptos Display" panose="02110004020202020204"/>
-        <a:ea typeface=""/>
-        <a:cs typeface=""/>
-        <a:font script="Jpan" typeface="游ゴシック Light"/>
-        <a:font script="Hang" typeface="맑은 고딕"/>
-        <a:font script="Hans" typeface="等线 Light"/>
-        <a:font script="Hant" typeface="新細明體"/>
-        <a:font script="Arab" typeface="Times New Roman"/>
-        <a:font script="Hebr" typeface="Times New Roman"/>
-        <a:font script="Thai" typeface="Angsana New"/>
-        <a:font script="Ethi" typeface="Nyala"/>
-        <a:font script="Beng" typeface="Vrinda"/>
-        <a:font script="Gujr" typeface="Shruti"/>
-        <a:font script="Khmr" typeface="MoolBoran"/>
-        <a:font script="Knda" typeface="Tunga"/>
-        <a:font script="Guru" typeface="Raavi"/>
-        <a:font script="Cans" typeface="Euphemia"/>
-        <a:font script="Cher" typeface="Plantagenet Cherokee"/>
-        <a:font script="Yiii" typeface="Microsoft Yi Baiti"/>
-        <a:font script="Tibt" typeface="Microsoft Himalaya"/>
-        <a:font script="Thaa" typeface="MV Boli"/>
-        <a:font script="Deva" typeface="Mangal"/>
-        <a:font script="Telu" typeface="Gautami"/>
-        <a:font script="Taml" typeface="Latha"/>
-        <a:font script="Syrc" typeface="Estrangelo Edessa"/>
-        <a:font script="Orya" typeface="Kalinga"/>
-        <a:font script="Mlym" typeface="Kartika"/>
-        <a:font script="Laoo" typeface="DokChampa"/>
-        <a:font script="Sinh" typeface="Iskoola Pota"/>
-        <a:font script="Mong" typeface="Mongolian Baiti"/>
-        <a:font script="Viet" typeface="Times New Roman"/>
-        <a:font script="Uigh" typeface="Microsoft Uighur"/>
-        <a:font script="Geor" typeface="Sylfaen"/>
-        <a:font script="Armn" typeface="Arial"/>
-        <a:font script="Bugi" typeface="Leelawadee UI"/>
-        <a:font script="Bopo" typeface="Microsoft JhengHei"/>
-        <a:font script="Java" typeface="Javanese Text"/>
-        <a:font script="Lisu" typeface="Segoe UI"/>
-        <a:font script="Mymr" typeface="Myanmar Text"/>
-        <a:font script="Nkoo" typeface="Ebrima"/>
-        <a:font script="Olck" typeface="Nirmala UI"/>
-        <a:font script="Osma" typeface="Ebrima"/>
-        <a:font script="Phag" typeface="Phagspa"/>
-        <a:font script="Syrn" typeface="Estrangelo Edessa"/>
-        <a:font script="Syrj" typeface="Estrangelo Edessa"/>
-        <a:font script="Syre" typeface="Estrangelo Edessa"/>
-        <a:font script="Sora" typeface="Nirmala UI"/>
-        <a:font script="Tale" typeface="Microsoft Tai Le"/>
-        <a:font script="Talu" typeface="Microsoft New Tai Lue"/>
-        <a:font script="Tfng" typeface="Ebrima"/>
-      </a:majorFont>
-      <a:minorFont>
-        <a:latin typeface="Aptos" panose="02110004020202020204"/>
-        <a:ea typeface=""/>
-        <a:cs typeface=""/>
-        <a:font script="Jpan" typeface="游ゴシック"/>
-        <a:font script="Hang" typeface="맑은 고딕"/>
-        <a:font script="Hans" typeface="等线"/>
-        <a:font script="Hant" typeface="新細明體"/>
-        <a:font script="Arab" typeface="Arial"/>
-        <a:font script="Hebr" typeface="Arial"/>
-        <a:font script="Thai" typeface="Cordia New"/>
-        <a:font script="Ethi" typeface="Nyala"/>
-        <a:font script="Beng" typeface="Vrinda"/>
-        <a:font script="Gujr" typeface="Shruti"/>
-        <a:font script="Khmr" typeface="DaunPenh"/>
-        <a:font script="Knda" typeface="Tunga"/>
-        <a:font script="Guru" typeface="Raavi"/>
-        <a:font script="Cans" typeface="Euphemia"/>
-        <a:font script="Cher" typeface="Plantagenet Cherokee"/>
-        <a:font script="Yiii" typeface="Microsoft Yi Baiti"/>
-        <a:font script="Tibt" typeface="Microsoft Himalaya"/>
-        <a:font script="Thaa" typeface="MV Boli"/>
-        <a:font script="Deva" typeface="Mangal"/>
-        <a:font script="Telu" typeface="Gautami"/>
-        <a:font script="Taml" typeface="Latha"/>
-        <a:font script="Syrc" typeface="Estrangelo Edessa"/>
-        <a:font script="Orya" typeface="Kalinga"/>
-        <a:font script="Mlym" typeface="Kartika"/>
-        <a:font script="Laoo" typeface="DokChampa"/>
-        <a:font script="Sinh" typeface="Iskoola Pota"/>
-        <a:font script="Mong" typeface="Mongolian Baiti"/>
-        <a:font script="Viet" typeface="Arial"/>
-        <a:font script="Uigh" typeface="Microsoft Uighur"/>
-        <a:font script="Geor" typeface="Sylfaen"/>
-        <a:font script="Armn" typeface="Arial"/>
-        <a:font script="Bugi" typeface="Leelawadee UI"/>
-        <a:font script="Bopo" typeface="Microsoft JhengHei"/>
-        <a:font script="Java" typeface="Javanese Text"/>
-        <a:font script="Lisu" typeface="Segoe UI"/>
-        <a:font script="Mymr" typeface="Myanmar Text"/>
-        <a:font script="Nkoo" typeface="Ebrima"/>
-        <a:font script="Olck" typeface="Nirmala UI"/>
-        <a:font script="Osma" typeface="Ebrima"/>
-        <a:font script="Phag" typeface="Phagspa"/>
-        <a:font script="Syrn" typeface="Estrangelo Edessa"/>
-        <a:font script="Syrj" typeface="Estrangelo Edessa"/>
-        <a:font script="Syre" typeface="Estrangelo Edessa"/>
-        <a:font script="Sora" typeface="Nirmala UI"/>
-        <a:font script="Tale" typeface="Microsoft Tai Le"/>
-        <a:font script="Talu" typeface="Microsoft New Tai Lue"/>
-        <a:font script="Tfng" typeface="Ebrima"/>
-      </a:minorFont>
-    </a:fontScheme>
-    <a:fmtScheme name="Office">
-      <a:fillStyleLst>
-        <a:solidFill>
-          <a:schemeClr val="phClr"/>
-        </a:solidFill>
-        <a:gradFill rotWithShape="1">
-          <a:gsLst>
-            <a:gs pos="0">
-              <a:schemeClr val="phClr">
-                <a:lumMod val="110000"/>
-                <a:satMod val="105000"/>
-                <a:tint val="67000"/>
-              </a:schemeClr>
-            </a:gs>
-            <a:gs pos="50000">
-              <a:schemeClr val="phClr">
-                <a:lumMod val="105000"/>
-                <a:satMod val="103000"/>
-                <a:tint val="73000"/>
-              </a:schemeClr>
-            </a:gs>
-            <a:gs pos="100000">
-              <a:schemeClr val="phClr">
-                <a:lumMod val="105000"/>
-                <a:satMod val="109000"/>
-                <a:tint val="81000"/>
-              </a:schemeClr>
-            </a:gs>
-          </a:gsLst>
-          <a:lin ang="5400000" scaled="0"/>
-        </a:gradFill>
-        <a:gradFill rotWithShape="1">
-          <a:gsLst>
-            <a:gs pos="0">
-              <a:schemeClr val="phClr">
-                <a:satMod val="103000"/>
-                <a:lumMod val="102000"/>
-                <a:tint val="94000"/>
-              </a:schemeClr>
-            </a:gs>
-            <a:gs pos="50000">
-              <a:schemeClr val="phClr">
-                <a:satMod val="110000"/>
-                <a:lumMod val="100000"/>
-                <a:shade val="100000"/>
-              </a:schemeClr>
-            </a:gs>
-            <a:gs pos="100000">
-              <a:schemeClr val="phClr">
-                <a:lumMod val="99000"/>
-                <a:satMod val="120000"/>
-                <a:shade val="78000"/>
-              </a:schemeClr>
-            </a:gs>
-          </a:gsLst>
-          <a:lin ang="5400000" scaled="0"/>
-        </a:gradFill>
-      </a:fillStyleLst>
-      <a:lnStyleLst>
-        <a:ln w="12700" cap="flat" cmpd="sng" algn="ctr">
-          <a:solidFill>
-            <a:schemeClr val="phClr"/>
-          </a:solidFill>
-          <a:prstDash val="solid"/>
-          <a:miter lim="800000"/>
-        </a:ln>
-        <a:ln w="19050" cap="flat" cmpd="sng" algn="ctr">
-          <a:solidFill>
-            <a:schemeClr val="phClr"/>
-          </a:solidFill>
-          <a:prstDash val="solid"/>
-          <a:miter lim="800000"/>
-        </a:ln>
-        <a:ln w="25400" cap="flat" cmpd="sng" algn="ctr">
-          <a:solidFill>
-            <a:schemeClr val="phClr"/>
-          </a:solidFill>
-          <a:prstDash val="solid"/>
-          <a:miter lim="800000"/>
-        </a:ln>
-      </a:lnStyleLst>
-      <a:effectStyleLst>
-        <a:effectStyle>
-          <a:effectLst/>
-        </a:effectStyle>
-        <a:effectStyle>
-          <a:effectLst/>
-        </a:effectStyle>
-        <a:effectStyle>
-          <a:effectLst>
-            <a:outerShdw blurRad="57150" dist="19050" dir="5400000" algn="ctr" rotWithShape="0">
-              <a:srgbClr val="000000">
-                <a:alpha val="63000"/>
-              </a:srgbClr>
-            </a:outerShdw>
-          </a:effectLst>
-        </a:effectStyle>
-      </a:effectStyleLst>
-      <a:bgFillStyleLst>
-        <a:solidFill>
-          <a:schemeClr val="phClr"/>
-        </a:solidFill>
-        <a:solidFill>
-          <a:schemeClr val="phClr">
-            <a:tint val="95000"/>
-            <a:satMod val="170000"/>
-          </a:schemeClr>
-        </a:solidFill>
-        <a:gradFill rotWithShape="1">
-          <a:gsLst>
-            <a:gs pos="0">
-              <a:schemeClr val="phClr">
-                <a:tint val="93000"/>
-                <a:satMod val="150000"/>
-                <a:shade val="98000"/>
-                <a:lumMod val="102000"/>
-              </a:schemeClr>
-            </a:gs>
-            <a:gs pos="50000">
-              <a:schemeClr val="phClr">
-                <a:tint val="98000"/>
-                <a:satMod val="130000"/>
-                <a:shade val="90000"/>
-                <a:lumMod val="103000"/>
-              </a:schemeClr>
-            </a:gs>
-            <a:gs pos="100000">
-              <a:schemeClr val="phClr">
-                <a:shade val="63000"/>
-                <a:satMod val="120000"/>
-              </a:schemeClr>
-            </a:gs>
-          </a:gsLst>
-          <a:lin ang="5400000" scaled="0"/>
-        </a:gradFill>
-      </a:bgFillStyleLst>
-    </a:fmtScheme>
-  </a:themeElements>
-  <a:objectDefaults>
-    <a:lnDef>
-      <a:spPr/>
-      <a:bodyPr/>
-      <a:lstStyle/>
-      <a:style>
-        <a:lnRef idx="2">
-          <a:schemeClr val="accent1"/>
-        </a:lnRef>
-        <a:fillRef idx="0">
-          <a:schemeClr val="accent1"/>
-        </a:fillRef>
-        <a:effectRef idx="1">
-          <a:schemeClr val="accent1"/>
-        </a:effectRef>
-        <a:fontRef idx="minor">
-          <a:schemeClr val="tx1"/>
-        </a:fontRef>
-      </a:style>
-    </a:lnDef>
-  </a:objectDefaults>
-  <a:extraClrSchemeLst/>
-  <a:extLst>
-    <a:ext uri="{05A4C25C-085E-4340-85A3-A5531E510DB2}">
-      <thm15:themeFamily xmlns:thm15="http://schemas.microsoft.com/office/thememl/2012/main" name="Office Theme" id="{2E142A2C-CD16-42D6-873A-C26D2A0506FA}" vid="{1BDDFF52-6CD6-40A5-AB3C-68EB2F1E4D0A}"/>
-    </a:ext>
-  </a:extLst>
-</a:theme>
 </file>